--- a/presentation/Supply_Chain_Sentinel_Final.pptx
+++ b/presentation/Supply_Chain_Sentinel_Final.pptx
@@ -4,21 +4,24 @@
   <p:sldMasterIdLst>
     <p:sldMasterId id="2147483648" r:id="rId1"/>
   </p:sldMasterIdLst>
+  <p:notesMasterIdLst>
+    <p:notesMasterId r:id="rId14"/>
+  </p:notesMasterIdLst>
   <p:sldIdLst>
-    <p:sldId id="256" r:id="rId7"/>
-    <p:sldId id="257" r:id="rId9"/>
-    <p:sldId id="258" r:id="rId10"/>
-    <p:sldId id="259" r:id="rId11"/>
-    <p:sldId id="260" r:id="rId12"/>
-    <p:sldId id="261" r:id="rId13"/>
-    <p:sldId id="262" r:id="rId14"/>
-    <p:sldId id="263" r:id="rId15"/>
-    <p:sldId id="264" r:id="rId16"/>
-    <p:sldId id="265" r:id="rId17"/>
-    <p:sldId id="266" r:id="rId18"/>
-    <p:sldId id="267" r:id="rId19"/>
+    <p:sldId id="256" r:id="rId2"/>
+    <p:sldId id="257" r:id="rId3"/>
+    <p:sldId id="258" r:id="rId4"/>
+    <p:sldId id="259" r:id="rId5"/>
+    <p:sldId id="260" r:id="rId6"/>
+    <p:sldId id="261" r:id="rId7"/>
+    <p:sldId id="262" r:id="rId8"/>
+    <p:sldId id="263" r:id="rId9"/>
+    <p:sldId id="264" r:id="rId10"/>
+    <p:sldId id="265" r:id="rId11"/>
+    <p:sldId id="266" r:id="rId12"/>
+    <p:sldId id="267" r:id="rId13"/>
   </p:sldIdLst>
-  <p:sldSz cx="12191695" cy="6858000" type="screen4x3"/>
+  <p:sldSz cx="12192000" cy="6858000"/>
   <p:notesSz cx="6858000" cy="9144000"/>
   <p:defaultTextStyle>
     <a:defPPr>
@@ -115,11 +118,27 @@
       </a:defRPr>
     </a:lvl9pPr>
   </p:defaultTextStyle>
+  <p:extLst>
+    <p:ext uri="{EFAFB233-063F-42B5-8137-9DF3F51BA10A}">
+      <p15:sldGuideLst xmlns:p15="http://schemas.microsoft.com/office/powerpoint/2012/main">
+        <p15:guide id="1" orient="horz" pos="2160">
+          <p15:clr>
+            <a:srgbClr val="A4A3A4"/>
+          </p15:clr>
+        </p15:guide>
+        <p15:guide id="2" pos="2880">
+          <p15:clr>
+            <a:srgbClr val="A4A3A4"/>
+          </p15:clr>
+        </p15:guide>
+      </p15:sldGuideLst>
+    </p:ext>
+  </p:extLst>
 </p:presentation>
 </file>
 
 <file path=ppt/notesMasters/notesMaster1.xml><?xml version="1.0" encoding="utf-8"?>
-<p:notesMaster xmlns:a="http://schemas.openxmlformats.org/drawingml/2006/main" xmlns:p="http://schemas.openxmlformats.org/presentationml/2006/main" xmlns:r="http://schemas.openxmlformats.org/officeDocument/2006/relationships">
+<p:notesMaster xmlns:a="http://schemas.openxmlformats.org/drawingml/2006/main" xmlns:r="http://schemas.openxmlformats.org/officeDocument/2006/relationships" xmlns:p="http://schemas.openxmlformats.org/presentationml/2006/main">
   <p:cSld>
     <p:bg>
       <p:bgRef idx="1001">
@@ -140,241 +159,16 @@
           <a:chExt cx="0" cy="0"/>
         </a:xfrm>
       </p:grpSpPr>
-      <p:sp>
-        <p:nvSpPr>
-          <p:cNvPr id="2" name="Header Placeholder 1"/>
-          <p:cNvSpPr>
-            <a:spLocks noGrp="1"/>
-          </p:cNvSpPr>
-          <p:nvPr>
-            <p:ph type="hdr" sz="quarter"/>
-          </p:nvPr>
-        </p:nvSpPr>
-        <p:spPr>
-          <a:xfrm>
-            <a:off x="0" y="0"/>
-            <a:ext cx="2971800" cy="457200"/>
-          </a:xfrm>
-          <a:prstGeom prst="rect">
-            <a:avLst/>
-          </a:prstGeom>
-        </p:spPr>
-        <p:txBody>
-          <a:bodyPr vert="horz" lIns="91440" tIns="45720" rIns="91440" bIns="45720" rtlCol="0"/>
-          <a:lstStyle>
-            <a:lvl1pPr algn="l">
-              <a:defRPr sz="1200"/>
-            </a:lvl1pPr>
-          </a:lstStyle>
-          <a:p>
-            <a:endParaRPr lang="en-US"/>
-          </a:p>
-        </p:txBody>
-      </p:sp>
-      <p:sp>
-        <p:nvSpPr>
-          <p:cNvPr id="3" name="Date Placeholder 2"/>
-          <p:cNvSpPr>
-            <a:spLocks noGrp="1"/>
-          </p:cNvSpPr>
-          <p:nvPr>
-            <p:ph type="dt" idx="1"/>
-          </p:nvPr>
-        </p:nvSpPr>
-        <p:spPr>
-          <a:xfrm>
-            <a:off x="3884613" y="0"/>
-            <a:ext cx="2971800" cy="457200"/>
-          </a:xfrm>
-          <a:prstGeom prst="rect">
-            <a:avLst/>
-          </a:prstGeom>
-        </p:spPr>
-        <p:txBody>
-          <a:bodyPr vert="horz" lIns="91440" tIns="45720" rIns="91440" bIns="45720" rtlCol="0"/>
-          <a:lstStyle>
-            <a:lvl1pPr algn="r">
-              <a:defRPr sz="1200"/>
-            </a:lvl1pPr>
-          </a:lstStyle>
-          <a:p>
-            <a:fld id="{0F89C1C7-3DCD-1040-A9CF-14679D8B5DDD}" type="datetimeFigureOut">
-              <a:rPr lang="en-US" smtClean="0"/>
-              <a:t>10/17/16</a:t>
-            </a:fld>
-            <a:endParaRPr lang="en-US"/>
-          </a:p>
-        </p:txBody>
-      </p:sp>
-      <p:sp>
-        <p:nvSpPr>
-          <p:cNvPr id="4" name="Slide Image Placeholder 3"/>
-          <p:cNvSpPr>
-            <a:spLocks noGrp="1" noRot="1" noChangeAspect="1"/>
-          </p:cNvSpPr>
-          <p:nvPr>
-            <p:ph type="sldImg" idx="2"/>
-          </p:nvPr>
-        </p:nvSpPr>
-        <p:spPr>
-          <a:xfrm>
-            <a:off x="1143000" y="685800"/>
-            <a:ext cx="4572000" cy="3429000"/>
-          </a:xfrm>
-          <a:prstGeom prst="rect">
-            <a:avLst/>
-          </a:prstGeom>
-          <a:noFill/>
-          <a:ln w="12700">
-            <a:solidFill>
-              <a:prstClr val="black"/>
-            </a:solidFill>
-          </a:ln>
-        </p:spPr>
-        <p:txBody>
-          <a:bodyPr vert="horz" lIns="91440" tIns="45720" rIns="91440" bIns="45720" rtlCol="0" anchor="ctr"/>
-          <a:lstStyle/>
-          <a:p>
-            <a:endParaRPr lang="en-US"/>
-          </a:p>
-        </p:txBody>
-      </p:sp>
-      <p:sp>
-        <p:nvSpPr>
-          <p:cNvPr id="5" name="Notes Placeholder 4"/>
-          <p:cNvSpPr>
-            <a:spLocks noGrp="1"/>
-          </p:cNvSpPr>
-          <p:nvPr>
-            <p:ph type="body" sz="quarter" idx="3"/>
-          </p:nvPr>
-        </p:nvSpPr>
-        <p:spPr>
-          <a:xfrm>
-            <a:off x="685800" y="4343400"/>
-            <a:ext cx="5486400" cy="4114800"/>
-          </a:xfrm>
-          <a:prstGeom prst="rect">
-            <a:avLst/>
-          </a:prstGeom>
-        </p:spPr>
-        <p:txBody>
-          <a:bodyPr vert="horz" lIns="91440" tIns="45720" rIns="91440" bIns="45720" rtlCol="0"/>
-          <a:lstStyle/>
-          <a:p>
-            <a:pPr lvl="0"/>
-            <a:r>
-              <a:rPr lang="en-US" smtClean="0"/>
-              <a:t>Click to edit Master text styles</a:t>
-            </a:r>
-          </a:p>
-          <a:p>
-            <a:pPr lvl="1"/>
-            <a:r>
-              <a:rPr lang="en-US" smtClean="0"/>
-              <a:t>Second level</a:t>
-            </a:r>
-          </a:p>
-          <a:p>
-            <a:pPr lvl="2"/>
-            <a:r>
-              <a:rPr lang="en-US" smtClean="0"/>
-              <a:t>Third level</a:t>
-            </a:r>
-          </a:p>
-          <a:p>
-            <a:pPr lvl="3"/>
-            <a:r>
-              <a:rPr lang="en-US" smtClean="0"/>
-              <a:t>Fourth level</a:t>
-            </a:r>
-          </a:p>
-          <a:p>
-            <a:pPr lvl="4"/>
-            <a:r>
-              <a:rPr lang="en-US" smtClean="0"/>
-              <a:t>Fifth level</a:t>
-            </a:r>
-            <a:endParaRPr lang="en-US"/>
-          </a:p>
-        </p:txBody>
-      </p:sp>
-      <p:sp>
-        <p:nvSpPr>
-          <p:cNvPr id="6" name="Footer Placeholder 5"/>
-          <p:cNvSpPr>
-            <a:spLocks noGrp="1"/>
-          </p:cNvSpPr>
-          <p:nvPr>
-            <p:ph type="ftr" sz="quarter" idx="4"/>
-          </p:nvPr>
-        </p:nvSpPr>
-        <p:spPr>
-          <a:xfrm>
-            <a:off x="0" y="8685213"/>
-            <a:ext cx="2971800" cy="457200"/>
-          </a:xfrm>
-          <a:prstGeom prst="rect">
-            <a:avLst/>
-          </a:prstGeom>
-        </p:spPr>
-        <p:txBody>
-          <a:bodyPr vert="horz" lIns="91440" tIns="45720" rIns="91440" bIns="45720" rtlCol="0" anchor="b"/>
-          <a:lstStyle>
-            <a:lvl1pPr algn="l">
-              <a:defRPr sz="1200"/>
-            </a:lvl1pPr>
-          </a:lstStyle>
-          <a:p>
-            <a:endParaRPr lang="en-US"/>
-          </a:p>
-        </p:txBody>
-      </p:sp>
-      <p:sp>
-        <p:nvSpPr>
-          <p:cNvPr id="7" name="Slide Number Placeholder 6"/>
-          <p:cNvSpPr>
-            <a:spLocks noGrp="1"/>
-          </p:cNvSpPr>
-          <p:nvPr>
-            <p:ph type="sldNum" sz="quarter" idx="5"/>
-          </p:nvPr>
-        </p:nvSpPr>
-        <p:spPr>
-          <a:xfrm>
-            <a:off x="3884613" y="8685213"/>
-            <a:ext cx="2971800" cy="457200"/>
-          </a:xfrm>
-          <a:prstGeom prst="rect">
-            <a:avLst/>
-          </a:prstGeom>
-        </p:spPr>
-        <p:txBody>
-          <a:bodyPr vert="horz" lIns="91440" tIns="45720" rIns="91440" bIns="45720" rtlCol="0" anchor="b"/>
-          <a:lstStyle>
-            <a:lvl1pPr algn="r">
-              <a:defRPr sz="1200"/>
-            </a:lvl1pPr>
-          </a:lstStyle>
-          <a:p>
-            <a:fld id="{BB5E49A5-4136-284D-997B-48E1D791AD67}" type="slidenum">
-              <a:rPr lang="en-US" smtClean="0"/>
-              <a:t>‹#›</a:t>
-            </a:fld>
-            <a:endParaRPr lang="en-US"/>
-          </a:p>
-        </p:txBody>
-      </p:sp>
     </p:spTree>
     <p:extLst>
       <p:ext uri="{BB962C8B-B14F-4D97-AF65-F5344CB8AC3E}">
-        <p14:creationId xmlns:p14="http://schemas.microsoft.com/office/powerpoint/2010/main" val="2623252185"/>
+        <p14:creationId xmlns:p14="http://schemas.microsoft.com/office/powerpoint/2010/main" val="2817300130"/>
       </p:ext>
     </p:extLst>
   </p:cSld>
   <p:clrMap bg1="lt1" tx1="dk1" bg2="lt2" tx2="dk2" accent1="accent1" accent2="accent2" accent3="accent3" accent4="accent4" accent5="accent5" accent6="accent6" hlink="hlink" folHlink="folHlink"/>
   <p:notesStyle>
-    <a:lvl1pPr marL="0" algn="l" defTabSz="457200" rtl="0" eaLnBrk="1" latinLnBrk="0" hangingPunct="1">
+    <a:lvl1pPr marL="0" algn="l" defTabSz="914400" rtl="0" eaLnBrk="1" latinLnBrk="0" hangingPunct="1">
       <a:defRPr sz="1200" kern="1200">
         <a:solidFill>
           <a:schemeClr val="tx1"/>
@@ -384,7 +178,7 @@
         <a:cs typeface="+mn-cs"/>
       </a:defRPr>
     </a:lvl1pPr>
-    <a:lvl2pPr marL="457200" algn="l" defTabSz="457200" rtl="0" eaLnBrk="1" latinLnBrk="0" hangingPunct="1">
+    <a:lvl2pPr marL="457200" algn="l" defTabSz="914400" rtl="0" eaLnBrk="1" latinLnBrk="0" hangingPunct="1">
       <a:defRPr sz="1200" kern="1200">
         <a:solidFill>
           <a:schemeClr val="tx1"/>
@@ -394,7 +188,7 @@
         <a:cs typeface="+mn-cs"/>
       </a:defRPr>
     </a:lvl2pPr>
-    <a:lvl3pPr marL="914400" algn="l" defTabSz="457200" rtl="0" eaLnBrk="1" latinLnBrk="0" hangingPunct="1">
+    <a:lvl3pPr marL="914400" algn="l" defTabSz="914400" rtl="0" eaLnBrk="1" latinLnBrk="0" hangingPunct="1">
       <a:defRPr sz="1200" kern="1200">
         <a:solidFill>
           <a:schemeClr val="tx1"/>
@@ -404,7 +198,7 @@
         <a:cs typeface="+mn-cs"/>
       </a:defRPr>
     </a:lvl3pPr>
-    <a:lvl4pPr marL="1371600" algn="l" defTabSz="457200" rtl="0" eaLnBrk="1" latinLnBrk="0" hangingPunct="1">
+    <a:lvl4pPr marL="1371600" algn="l" defTabSz="914400" rtl="0" eaLnBrk="1" latinLnBrk="0" hangingPunct="1">
       <a:defRPr sz="1200" kern="1200">
         <a:solidFill>
           <a:schemeClr val="tx1"/>
@@ -414,7 +208,7 @@
         <a:cs typeface="+mn-cs"/>
       </a:defRPr>
     </a:lvl4pPr>
-    <a:lvl5pPr marL="1828800" algn="l" defTabSz="457200" rtl="0" eaLnBrk="1" latinLnBrk="0" hangingPunct="1">
+    <a:lvl5pPr marL="1828800" algn="l" defTabSz="914400" rtl="0" eaLnBrk="1" latinLnBrk="0" hangingPunct="1">
       <a:defRPr sz="1200" kern="1200">
         <a:solidFill>
           <a:schemeClr val="tx1"/>
@@ -424,7 +218,7 @@
         <a:cs typeface="+mn-cs"/>
       </a:defRPr>
     </a:lvl5pPr>
-    <a:lvl6pPr marL="2286000" algn="l" defTabSz="457200" rtl="0" eaLnBrk="1" latinLnBrk="0" hangingPunct="1">
+    <a:lvl6pPr marL="2286000" algn="l" defTabSz="914400" rtl="0" eaLnBrk="1" latinLnBrk="0" hangingPunct="1">
       <a:defRPr sz="1200" kern="1200">
         <a:solidFill>
           <a:schemeClr val="tx1"/>
@@ -434,7 +228,7 @@
         <a:cs typeface="+mn-cs"/>
       </a:defRPr>
     </a:lvl6pPr>
-    <a:lvl7pPr marL="2743200" algn="l" defTabSz="457200" rtl="0" eaLnBrk="1" latinLnBrk="0" hangingPunct="1">
+    <a:lvl7pPr marL="2743200" algn="l" defTabSz="914400" rtl="0" eaLnBrk="1" latinLnBrk="0" hangingPunct="1">
       <a:defRPr sz="1200" kern="1200">
         <a:solidFill>
           <a:schemeClr val="tx1"/>
@@ -444,7 +238,7 @@
         <a:cs typeface="+mn-cs"/>
       </a:defRPr>
     </a:lvl7pPr>
-    <a:lvl8pPr marL="3200400" algn="l" defTabSz="457200" rtl="0" eaLnBrk="1" latinLnBrk="0" hangingPunct="1">
+    <a:lvl8pPr marL="3200400" algn="l" defTabSz="914400" rtl="0" eaLnBrk="1" latinLnBrk="0" hangingPunct="1">
       <a:defRPr sz="1200" kern="1200">
         <a:solidFill>
           <a:schemeClr val="tx1"/>
@@ -454,7 +248,7 @@
         <a:cs typeface="+mn-cs"/>
       </a:defRPr>
     </a:lvl8pPr>
-    <a:lvl9pPr marL="3657600" algn="l" defTabSz="457200" rtl="0" eaLnBrk="1" latinLnBrk="0" hangingPunct="1">
+    <a:lvl9pPr marL="3657600" algn="l" defTabSz="914400" rtl="0" eaLnBrk="1" latinLnBrk="0" hangingPunct="1">
       <a:defRPr sz="1200" kern="1200">
         <a:solidFill>
           <a:schemeClr val="tx1"/>
@@ -469,7 +263,7 @@
 </file>
 
 <file path=ppt/notesSlides/notesSlide1.xml><?xml version="1.0" encoding="utf-8"?>
-<p:notes xmlns:a="http://schemas.openxmlformats.org/drawingml/2006/main" xmlns:p="http://schemas.openxmlformats.org/presentationml/2006/main" xmlns:r="http://schemas.openxmlformats.org/officeDocument/2006/relationships">
+<p:notes xmlns:a="http://schemas.openxmlformats.org/drawingml/2006/main" xmlns:r="http://schemas.openxmlformats.org/officeDocument/2006/relationships" xmlns:p="http://schemas.openxmlformats.org/presentationml/2006/main">
   <p:cSld>
     <p:spTree>
       <p:nvGrpSpPr>
@@ -489,13 +283,20 @@
         <p:nvSpPr>
           <p:cNvPr id="2" name="Slide Image Placeholder 1"/>
           <p:cNvSpPr>
-            <a:spLocks noGrp="1"/>
+            <a:spLocks noGrp="1" noRot="1" noChangeAspect="1"/>
           </p:cNvSpPr>
           <p:nvPr>
             <p:ph type="sldImg" idx="2"/>
           </p:nvPr>
         </p:nvSpPr>
         <p:spPr/>
+        <p:txBody>
+          <a:bodyPr/>
+          <a:lstStyle/>
+          <a:p>
+            <a:endParaRPr lang="en-CH"/>
+          </a:p>
+        </p:txBody>
       </p:sp>
       <p:sp>
         <p:nvSpPr>
@@ -504,7 +305,7 @@
             <a:spLocks noGrp="1"/>
           </p:cNvSpPr>
           <p:nvPr>
-            <p:ph type="body" idx="3" sz="quarter"/>
+            <p:ph type="body" sz="quarter" idx="3"/>
           </p:nvPr>
         </p:nvSpPr>
         <p:spPr/>
@@ -525,10 +326,17 @@
             <a:spLocks noGrp="1"/>
           </p:cNvSpPr>
           <p:nvPr>
-            <p:ph type="sldNum" idx="5" sz="quarter"/>
+            <p:ph type="sldNum" sz="quarter" idx="5"/>
           </p:nvPr>
         </p:nvSpPr>
         <p:spPr/>
+        <p:txBody>
+          <a:bodyPr/>
+          <a:lstStyle/>
+          <a:p>
+            <a:endParaRPr lang="en-CH"/>
+          </a:p>
+        </p:txBody>
       </p:sp>
     </p:spTree>
   </p:cSld>
@@ -539,7 +347,7 @@
 </file>
 
 <file path=ppt/notesSlides/notesSlide10.xml><?xml version="1.0" encoding="utf-8"?>
-<p:notes xmlns:a="http://schemas.openxmlformats.org/drawingml/2006/main" xmlns:p="http://schemas.openxmlformats.org/presentationml/2006/main" xmlns:r="http://schemas.openxmlformats.org/officeDocument/2006/relationships">
+<p:notes xmlns:a="http://schemas.openxmlformats.org/drawingml/2006/main" xmlns:r="http://schemas.openxmlformats.org/officeDocument/2006/relationships" xmlns:p="http://schemas.openxmlformats.org/presentationml/2006/main">
   <p:cSld>
     <p:spTree>
       <p:nvGrpSpPr>
@@ -559,13 +367,20 @@
         <p:nvSpPr>
           <p:cNvPr id="2" name="Slide Image Placeholder 1"/>
           <p:cNvSpPr>
-            <a:spLocks noGrp="1"/>
+            <a:spLocks noGrp="1" noRot="1" noChangeAspect="1"/>
           </p:cNvSpPr>
           <p:nvPr>
             <p:ph type="sldImg" idx="2"/>
           </p:nvPr>
         </p:nvSpPr>
         <p:spPr/>
+        <p:txBody>
+          <a:bodyPr/>
+          <a:lstStyle/>
+          <a:p>
+            <a:endParaRPr lang="en-CH"/>
+          </a:p>
+        </p:txBody>
       </p:sp>
       <p:sp>
         <p:nvSpPr>
@@ -574,7 +389,7 @@
             <a:spLocks noGrp="1"/>
           </p:cNvSpPr>
           <p:nvPr>
-            <p:ph type="body" idx="3" sz="quarter"/>
+            <p:ph type="body" sz="quarter" idx="3"/>
           </p:nvPr>
         </p:nvSpPr>
         <p:spPr/>
@@ -595,10 +410,17 @@
             <a:spLocks noGrp="1"/>
           </p:cNvSpPr>
           <p:nvPr>
-            <p:ph type="sldNum" idx="5" sz="quarter"/>
+            <p:ph type="sldNum" sz="quarter" idx="5"/>
           </p:nvPr>
         </p:nvSpPr>
         <p:spPr/>
+        <p:txBody>
+          <a:bodyPr/>
+          <a:lstStyle/>
+          <a:p>
+            <a:endParaRPr lang="en-CH"/>
+          </a:p>
+        </p:txBody>
       </p:sp>
     </p:spTree>
   </p:cSld>
@@ -609,7 +431,7 @@
 </file>
 
 <file path=ppt/notesSlides/notesSlide11.xml><?xml version="1.0" encoding="utf-8"?>
-<p:notes xmlns:a="http://schemas.openxmlformats.org/drawingml/2006/main" xmlns:p="http://schemas.openxmlformats.org/presentationml/2006/main" xmlns:r="http://schemas.openxmlformats.org/officeDocument/2006/relationships">
+<p:notes xmlns:a="http://schemas.openxmlformats.org/drawingml/2006/main" xmlns:r="http://schemas.openxmlformats.org/officeDocument/2006/relationships" xmlns:p="http://schemas.openxmlformats.org/presentationml/2006/main">
   <p:cSld>
     <p:spTree>
       <p:nvGrpSpPr>
@@ -629,13 +451,20 @@
         <p:nvSpPr>
           <p:cNvPr id="2" name="Slide Image Placeholder 1"/>
           <p:cNvSpPr>
-            <a:spLocks noGrp="1"/>
+            <a:spLocks noGrp="1" noRot="1" noChangeAspect="1"/>
           </p:cNvSpPr>
           <p:nvPr>
             <p:ph type="sldImg" idx="2"/>
           </p:nvPr>
         </p:nvSpPr>
         <p:spPr/>
+        <p:txBody>
+          <a:bodyPr/>
+          <a:lstStyle/>
+          <a:p>
+            <a:endParaRPr lang="en-CH"/>
+          </a:p>
+        </p:txBody>
       </p:sp>
       <p:sp>
         <p:nvSpPr>
@@ -644,7 +473,7 @@
             <a:spLocks noGrp="1"/>
           </p:cNvSpPr>
           <p:nvPr>
-            <p:ph type="body" idx="3" sz="quarter"/>
+            <p:ph type="body" sz="quarter" idx="3"/>
           </p:nvPr>
         </p:nvSpPr>
         <p:spPr/>
@@ -665,10 +494,17 @@
             <a:spLocks noGrp="1"/>
           </p:cNvSpPr>
           <p:nvPr>
-            <p:ph type="sldNum" idx="5" sz="quarter"/>
+            <p:ph type="sldNum" sz="quarter" idx="5"/>
           </p:nvPr>
         </p:nvSpPr>
         <p:spPr/>
+        <p:txBody>
+          <a:bodyPr/>
+          <a:lstStyle/>
+          <a:p>
+            <a:endParaRPr lang="en-CH"/>
+          </a:p>
+        </p:txBody>
       </p:sp>
     </p:spTree>
   </p:cSld>
@@ -679,7 +515,7 @@
 </file>
 
 <file path=ppt/notesSlides/notesSlide12.xml><?xml version="1.0" encoding="utf-8"?>
-<p:notes xmlns:a="http://schemas.openxmlformats.org/drawingml/2006/main" xmlns:p="http://schemas.openxmlformats.org/presentationml/2006/main" xmlns:r="http://schemas.openxmlformats.org/officeDocument/2006/relationships">
+<p:notes xmlns:a="http://schemas.openxmlformats.org/drawingml/2006/main" xmlns:r="http://schemas.openxmlformats.org/officeDocument/2006/relationships" xmlns:p="http://schemas.openxmlformats.org/presentationml/2006/main">
   <p:cSld>
     <p:spTree>
       <p:nvGrpSpPr>
@@ -699,13 +535,20 @@
         <p:nvSpPr>
           <p:cNvPr id="2" name="Slide Image Placeholder 1"/>
           <p:cNvSpPr>
-            <a:spLocks noGrp="1"/>
+            <a:spLocks noGrp="1" noRot="1" noChangeAspect="1"/>
           </p:cNvSpPr>
           <p:nvPr>
             <p:ph type="sldImg" idx="2"/>
           </p:nvPr>
         </p:nvSpPr>
         <p:spPr/>
+        <p:txBody>
+          <a:bodyPr/>
+          <a:lstStyle/>
+          <a:p>
+            <a:endParaRPr lang="en-CH"/>
+          </a:p>
+        </p:txBody>
       </p:sp>
       <p:sp>
         <p:nvSpPr>
@@ -714,7 +557,7 @@
             <a:spLocks noGrp="1"/>
           </p:cNvSpPr>
           <p:nvPr>
-            <p:ph type="body" idx="3" sz="quarter"/>
+            <p:ph type="body" sz="quarter" idx="3"/>
           </p:nvPr>
         </p:nvSpPr>
         <p:spPr/>
@@ -735,10 +578,17 @@
             <a:spLocks noGrp="1"/>
           </p:cNvSpPr>
           <p:nvPr>
-            <p:ph type="sldNum" idx="5" sz="quarter"/>
+            <p:ph type="sldNum" sz="quarter" idx="5"/>
           </p:nvPr>
         </p:nvSpPr>
         <p:spPr/>
+        <p:txBody>
+          <a:bodyPr/>
+          <a:lstStyle/>
+          <a:p>
+            <a:endParaRPr lang="en-CH"/>
+          </a:p>
+        </p:txBody>
       </p:sp>
     </p:spTree>
   </p:cSld>
@@ -749,7 +599,7 @@
 </file>
 
 <file path=ppt/notesSlides/notesSlide2.xml><?xml version="1.0" encoding="utf-8"?>
-<p:notes xmlns:a="http://schemas.openxmlformats.org/drawingml/2006/main" xmlns:p="http://schemas.openxmlformats.org/presentationml/2006/main" xmlns:r="http://schemas.openxmlformats.org/officeDocument/2006/relationships">
+<p:notes xmlns:a="http://schemas.openxmlformats.org/drawingml/2006/main" xmlns:r="http://schemas.openxmlformats.org/officeDocument/2006/relationships" xmlns:p="http://schemas.openxmlformats.org/presentationml/2006/main">
   <p:cSld>
     <p:spTree>
       <p:nvGrpSpPr>
@@ -769,13 +619,20 @@
         <p:nvSpPr>
           <p:cNvPr id="2" name="Slide Image Placeholder 1"/>
           <p:cNvSpPr>
-            <a:spLocks noGrp="1"/>
+            <a:spLocks noGrp="1" noRot="1" noChangeAspect="1"/>
           </p:cNvSpPr>
           <p:nvPr>
             <p:ph type="sldImg" idx="2"/>
           </p:nvPr>
         </p:nvSpPr>
         <p:spPr/>
+        <p:txBody>
+          <a:bodyPr/>
+          <a:lstStyle/>
+          <a:p>
+            <a:endParaRPr lang="en-CH"/>
+          </a:p>
+        </p:txBody>
       </p:sp>
       <p:sp>
         <p:nvSpPr>
@@ -784,7 +641,7 @@
             <a:spLocks noGrp="1"/>
           </p:cNvSpPr>
           <p:nvPr>
-            <p:ph type="body" idx="3" sz="quarter"/>
+            <p:ph type="body" sz="quarter" idx="3"/>
           </p:nvPr>
         </p:nvSpPr>
         <p:spPr/>
@@ -805,10 +662,17 @@
             <a:spLocks noGrp="1"/>
           </p:cNvSpPr>
           <p:nvPr>
-            <p:ph type="sldNum" idx="5" sz="quarter"/>
+            <p:ph type="sldNum" sz="quarter" idx="5"/>
           </p:nvPr>
         </p:nvSpPr>
         <p:spPr/>
+        <p:txBody>
+          <a:bodyPr/>
+          <a:lstStyle/>
+          <a:p>
+            <a:endParaRPr lang="en-CH"/>
+          </a:p>
+        </p:txBody>
       </p:sp>
     </p:spTree>
   </p:cSld>
@@ -819,7 +683,7 @@
 </file>
 
 <file path=ppt/notesSlides/notesSlide3.xml><?xml version="1.0" encoding="utf-8"?>
-<p:notes xmlns:a="http://schemas.openxmlformats.org/drawingml/2006/main" xmlns:p="http://schemas.openxmlformats.org/presentationml/2006/main" xmlns:r="http://schemas.openxmlformats.org/officeDocument/2006/relationships">
+<p:notes xmlns:a="http://schemas.openxmlformats.org/drawingml/2006/main" xmlns:r="http://schemas.openxmlformats.org/officeDocument/2006/relationships" xmlns:p="http://schemas.openxmlformats.org/presentationml/2006/main">
   <p:cSld>
     <p:spTree>
       <p:nvGrpSpPr>
@@ -839,13 +703,20 @@
         <p:nvSpPr>
           <p:cNvPr id="2" name="Slide Image Placeholder 1"/>
           <p:cNvSpPr>
-            <a:spLocks noGrp="1"/>
+            <a:spLocks noGrp="1" noRot="1" noChangeAspect="1"/>
           </p:cNvSpPr>
           <p:nvPr>
             <p:ph type="sldImg" idx="2"/>
           </p:nvPr>
         </p:nvSpPr>
         <p:spPr/>
+        <p:txBody>
+          <a:bodyPr/>
+          <a:lstStyle/>
+          <a:p>
+            <a:endParaRPr lang="en-CH"/>
+          </a:p>
+        </p:txBody>
       </p:sp>
       <p:sp>
         <p:nvSpPr>
@@ -854,7 +725,7 @@
             <a:spLocks noGrp="1"/>
           </p:cNvSpPr>
           <p:nvPr>
-            <p:ph type="body" idx="3" sz="quarter"/>
+            <p:ph type="body" sz="quarter" idx="3"/>
           </p:nvPr>
         </p:nvSpPr>
         <p:spPr/>
@@ -875,10 +746,17 @@
             <a:spLocks noGrp="1"/>
           </p:cNvSpPr>
           <p:nvPr>
-            <p:ph type="sldNum" idx="5" sz="quarter"/>
+            <p:ph type="sldNum" sz="quarter" idx="5"/>
           </p:nvPr>
         </p:nvSpPr>
         <p:spPr/>
+        <p:txBody>
+          <a:bodyPr/>
+          <a:lstStyle/>
+          <a:p>
+            <a:endParaRPr lang="en-CH"/>
+          </a:p>
+        </p:txBody>
       </p:sp>
     </p:spTree>
   </p:cSld>
@@ -889,7 +767,7 @@
 </file>
 
 <file path=ppt/notesSlides/notesSlide4.xml><?xml version="1.0" encoding="utf-8"?>
-<p:notes xmlns:a="http://schemas.openxmlformats.org/drawingml/2006/main" xmlns:p="http://schemas.openxmlformats.org/presentationml/2006/main" xmlns:r="http://schemas.openxmlformats.org/officeDocument/2006/relationships">
+<p:notes xmlns:a="http://schemas.openxmlformats.org/drawingml/2006/main" xmlns:r="http://schemas.openxmlformats.org/officeDocument/2006/relationships" xmlns:p="http://schemas.openxmlformats.org/presentationml/2006/main">
   <p:cSld>
     <p:spTree>
       <p:nvGrpSpPr>
@@ -909,13 +787,20 @@
         <p:nvSpPr>
           <p:cNvPr id="2" name="Slide Image Placeholder 1"/>
           <p:cNvSpPr>
-            <a:spLocks noGrp="1"/>
+            <a:spLocks noGrp="1" noRot="1" noChangeAspect="1"/>
           </p:cNvSpPr>
           <p:nvPr>
             <p:ph type="sldImg" idx="2"/>
           </p:nvPr>
         </p:nvSpPr>
         <p:spPr/>
+        <p:txBody>
+          <a:bodyPr/>
+          <a:lstStyle/>
+          <a:p>
+            <a:endParaRPr lang="en-CH"/>
+          </a:p>
+        </p:txBody>
       </p:sp>
       <p:sp>
         <p:nvSpPr>
@@ -924,7 +809,7 @@
             <a:spLocks noGrp="1"/>
           </p:cNvSpPr>
           <p:nvPr>
-            <p:ph type="body" idx="3" sz="quarter"/>
+            <p:ph type="body" sz="quarter" idx="3"/>
           </p:nvPr>
         </p:nvSpPr>
         <p:spPr/>
@@ -945,10 +830,17 @@
             <a:spLocks noGrp="1"/>
           </p:cNvSpPr>
           <p:nvPr>
-            <p:ph type="sldNum" idx="5" sz="quarter"/>
+            <p:ph type="sldNum" sz="quarter" idx="5"/>
           </p:nvPr>
         </p:nvSpPr>
         <p:spPr/>
+        <p:txBody>
+          <a:bodyPr/>
+          <a:lstStyle/>
+          <a:p>
+            <a:endParaRPr lang="en-CH"/>
+          </a:p>
+        </p:txBody>
       </p:sp>
     </p:spTree>
   </p:cSld>
@@ -959,7 +851,7 @@
 </file>
 
 <file path=ppt/notesSlides/notesSlide5.xml><?xml version="1.0" encoding="utf-8"?>
-<p:notes xmlns:a="http://schemas.openxmlformats.org/drawingml/2006/main" xmlns:p="http://schemas.openxmlformats.org/presentationml/2006/main" xmlns:r="http://schemas.openxmlformats.org/officeDocument/2006/relationships">
+<p:notes xmlns:a="http://schemas.openxmlformats.org/drawingml/2006/main" xmlns:r="http://schemas.openxmlformats.org/officeDocument/2006/relationships" xmlns:p="http://schemas.openxmlformats.org/presentationml/2006/main">
   <p:cSld>
     <p:spTree>
       <p:nvGrpSpPr>
@@ -979,13 +871,20 @@
         <p:nvSpPr>
           <p:cNvPr id="2" name="Slide Image Placeholder 1"/>
           <p:cNvSpPr>
-            <a:spLocks noGrp="1"/>
+            <a:spLocks noGrp="1" noRot="1" noChangeAspect="1"/>
           </p:cNvSpPr>
           <p:nvPr>
             <p:ph type="sldImg" idx="2"/>
           </p:nvPr>
         </p:nvSpPr>
         <p:spPr/>
+        <p:txBody>
+          <a:bodyPr/>
+          <a:lstStyle/>
+          <a:p>
+            <a:endParaRPr lang="en-CH"/>
+          </a:p>
+        </p:txBody>
       </p:sp>
       <p:sp>
         <p:nvSpPr>
@@ -994,7 +893,7 @@
             <a:spLocks noGrp="1"/>
           </p:cNvSpPr>
           <p:nvPr>
-            <p:ph type="body" idx="3" sz="quarter"/>
+            <p:ph type="body" sz="quarter" idx="3"/>
           </p:nvPr>
         </p:nvSpPr>
         <p:spPr/>
@@ -1015,10 +914,17 @@
             <a:spLocks noGrp="1"/>
           </p:cNvSpPr>
           <p:nvPr>
-            <p:ph type="sldNum" idx="5" sz="quarter"/>
+            <p:ph type="sldNum" sz="quarter" idx="5"/>
           </p:nvPr>
         </p:nvSpPr>
         <p:spPr/>
+        <p:txBody>
+          <a:bodyPr/>
+          <a:lstStyle/>
+          <a:p>
+            <a:endParaRPr lang="en-CH"/>
+          </a:p>
+        </p:txBody>
       </p:sp>
     </p:spTree>
   </p:cSld>
@@ -1029,7 +935,7 @@
 </file>
 
 <file path=ppt/notesSlides/notesSlide6.xml><?xml version="1.0" encoding="utf-8"?>
-<p:notes xmlns:a="http://schemas.openxmlformats.org/drawingml/2006/main" xmlns:p="http://schemas.openxmlformats.org/presentationml/2006/main" xmlns:r="http://schemas.openxmlformats.org/officeDocument/2006/relationships">
+<p:notes xmlns:a="http://schemas.openxmlformats.org/drawingml/2006/main" xmlns:r="http://schemas.openxmlformats.org/officeDocument/2006/relationships" xmlns:p="http://schemas.openxmlformats.org/presentationml/2006/main">
   <p:cSld>
     <p:spTree>
       <p:nvGrpSpPr>
@@ -1049,13 +955,20 @@
         <p:nvSpPr>
           <p:cNvPr id="2" name="Slide Image Placeholder 1"/>
           <p:cNvSpPr>
-            <a:spLocks noGrp="1"/>
+            <a:spLocks noGrp="1" noRot="1" noChangeAspect="1"/>
           </p:cNvSpPr>
           <p:nvPr>
             <p:ph type="sldImg" idx="2"/>
           </p:nvPr>
         </p:nvSpPr>
         <p:spPr/>
+        <p:txBody>
+          <a:bodyPr/>
+          <a:lstStyle/>
+          <a:p>
+            <a:endParaRPr lang="en-CH"/>
+          </a:p>
+        </p:txBody>
       </p:sp>
       <p:sp>
         <p:nvSpPr>
@@ -1064,7 +977,7 @@
             <a:spLocks noGrp="1"/>
           </p:cNvSpPr>
           <p:nvPr>
-            <p:ph type="body" idx="3" sz="quarter"/>
+            <p:ph type="body" sz="quarter" idx="3"/>
           </p:nvPr>
         </p:nvSpPr>
         <p:spPr/>
@@ -1085,10 +998,17 @@
             <a:spLocks noGrp="1"/>
           </p:cNvSpPr>
           <p:nvPr>
-            <p:ph type="sldNum" idx="5" sz="quarter"/>
+            <p:ph type="sldNum" sz="quarter" idx="5"/>
           </p:nvPr>
         </p:nvSpPr>
         <p:spPr/>
+        <p:txBody>
+          <a:bodyPr/>
+          <a:lstStyle/>
+          <a:p>
+            <a:endParaRPr lang="en-CH"/>
+          </a:p>
+        </p:txBody>
       </p:sp>
     </p:spTree>
   </p:cSld>
@@ -1099,7 +1019,7 @@
 </file>
 
 <file path=ppt/notesSlides/notesSlide7.xml><?xml version="1.0" encoding="utf-8"?>
-<p:notes xmlns:a="http://schemas.openxmlformats.org/drawingml/2006/main" xmlns:p="http://schemas.openxmlformats.org/presentationml/2006/main" xmlns:r="http://schemas.openxmlformats.org/officeDocument/2006/relationships">
+<p:notes xmlns:a="http://schemas.openxmlformats.org/drawingml/2006/main" xmlns:r="http://schemas.openxmlformats.org/officeDocument/2006/relationships" xmlns:p="http://schemas.openxmlformats.org/presentationml/2006/main">
   <p:cSld>
     <p:spTree>
       <p:nvGrpSpPr>
@@ -1119,13 +1039,20 @@
         <p:nvSpPr>
           <p:cNvPr id="2" name="Slide Image Placeholder 1"/>
           <p:cNvSpPr>
-            <a:spLocks noGrp="1"/>
+            <a:spLocks noGrp="1" noRot="1" noChangeAspect="1"/>
           </p:cNvSpPr>
           <p:nvPr>
             <p:ph type="sldImg" idx="2"/>
           </p:nvPr>
         </p:nvSpPr>
         <p:spPr/>
+        <p:txBody>
+          <a:bodyPr/>
+          <a:lstStyle/>
+          <a:p>
+            <a:endParaRPr lang="en-CH"/>
+          </a:p>
+        </p:txBody>
       </p:sp>
       <p:sp>
         <p:nvSpPr>
@@ -1134,7 +1061,7 @@
             <a:spLocks noGrp="1"/>
           </p:cNvSpPr>
           <p:nvPr>
-            <p:ph type="body" idx="3" sz="quarter"/>
+            <p:ph type="body" sz="quarter" idx="3"/>
           </p:nvPr>
         </p:nvSpPr>
         <p:spPr/>
@@ -1155,10 +1082,17 @@
             <a:spLocks noGrp="1"/>
           </p:cNvSpPr>
           <p:nvPr>
-            <p:ph type="sldNum" idx="5" sz="quarter"/>
+            <p:ph type="sldNum" sz="quarter" idx="5"/>
           </p:nvPr>
         </p:nvSpPr>
         <p:spPr/>
+        <p:txBody>
+          <a:bodyPr/>
+          <a:lstStyle/>
+          <a:p>
+            <a:endParaRPr lang="en-CH"/>
+          </a:p>
+        </p:txBody>
       </p:sp>
     </p:spTree>
   </p:cSld>
@@ -1169,7 +1103,7 @@
 </file>
 
 <file path=ppt/notesSlides/notesSlide8.xml><?xml version="1.0" encoding="utf-8"?>
-<p:notes xmlns:a="http://schemas.openxmlformats.org/drawingml/2006/main" xmlns:p="http://schemas.openxmlformats.org/presentationml/2006/main" xmlns:r="http://schemas.openxmlformats.org/officeDocument/2006/relationships">
+<p:notes xmlns:a="http://schemas.openxmlformats.org/drawingml/2006/main" xmlns:r="http://schemas.openxmlformats.org/officeDocument/2006/relationships" xmlns:p="http://schemas.openxmlformats.org/presentationml/2006/main">
   <p:cSld>
     <p:spTree>
       <p:nvGrpSpPr>
@@ -1189,13 +1123,20 @@
         <p:nvSpPr>
           <p:cNvPr id="2" name="Slide Image Placeholder 1"/>
           <p:cNvSpPr>
-            <a:spLocks noGrp="1"/>
+            <a:spLocks noGrp="1" noRot="1" noChangeAspect="1"/>
           </p:cNvSpPr>
           <p:nvPr>
             <p:ph type="sldImg" idx="2"/>
           </p:nvPr>
         </p:nvSpPr>
         <p:spPr/>
+        <p:txBody>
+          <a:bodyPr/>
+          <a:lstStyle/>
+          <a:p>
+            <a:endParaRPr lang="en-CH"/>
+          </a:p>
+        </p:txBody>
       </p:sp>
       <p:sp>
         <p:nvSpPr>
@@ -1204,7 +1145,7 @@
             <a:spLocks noGrp="1"/>
           </p:cNvSpPr>
           <p:nvPr>
-            <p:ph type="body" idx="3" sz="quarter"/>
+            <p:ph type="body" sz="quarter" idx="3"/>
           </p:nvPr>
         </p:nvSpPr>
         <p:spPr/>
@@ -1225,10 +1166,17 @@
             <a:spLocks noGrp="1"/>
           </p:cNvSpPr>
           <p:nvPr>
-            <p:ph type="sldNum" idx="5" sz="quarter"/>
+            <p:ph type="sldNum" sz="quarter" idx="5"/>
           </p:nvPr>
         </p:nvSpPr>
         <p:spPr/>
+        <p:txBody>
+          <a:bodyPr/>
+          <a:lstStyle/>
+          <a:p>
+            <a:endParaRPr lang="en-CH"/>
+          </a:p>
+        </p:txBody>
       </p:sp>
     </p:spTree>
   </p:cSld>
@@ -1239,7 +1187,7 @@
 </file>
 
 <file path=ppt/notesSlides/notesSlide9.xml><?xml version="1.0" encoding="utf-8"?>
-<p:notes xmlns:a="http://schemas.openxmlformats.org/drawingml/2006/main" xmlns:p="http://schemas.openxmlformats.org/presentationml/2006/main" xmlns:r="http://schemas.openxmlformats.org/officeDocument/2006/relationships">
+<p:notes xmlns:a="http://schemas.openxmlformats.org/drawingml/2006/main" xmlns:r="http://schemas.openxmlformats.org/officeDocument/2006/relationships" xmlns:p="http://schemas.openxmlformats.org/presentationml/2006/main">
   <p:cSld>
     <p:spTree>
       <p:nvGrpSpPr>
@@ -1259,13 +1207,20 @@
         <p:nvSpPr>
           <p:cNvPr id="2" name="Slide Image Placeholder 1"/>
           <p:cNvSpPr>
-            <a:spLocks noGrp="1"/>
+            <a:spLocks noGrp="1" noRot="1" noChangeAspect="1"/>
           </p:cNvSpPr>
           <p:nvPr>
             <p:ph type="sldImg" idx="2"/>
           </p:nvPr>
         </p:nvSpPr>
         <p:spPr/>
+        <p:txBody>
+          <a:bodyPr/>
+          <a:lstStyle/>
+          <a:p>
+            <a:endParaRPr lang="en-CH"/>
+          </a:p>
+        </p:txBody>
       </p:sp>
       <p:sp>
         <p:nvSpPr>
@@ -1274,7 +1229,7 @@
             <a:spLocks noGrp="1"/>
           </p:cNvSpPr>
           <p:nvPr>
-            <p:ph type="body" idx="3" sz="quarter"/>
+            <p:ph type="body" sz="quarter" idx="3"/>
           </p:nvPr>
         </p:nvSpPr>
         <p:spPr/>
@@ -1295,10 +1250,17 @@
             <a:spLocks noGrp="1"/>
           </p:cNvSpPr>
           <p:nvPr>
-            <p:ph type="sldNum" idx="5" sz="quarter"/>
+            <p:ph type="sldNum" sz="quarter" idx="5"/>
           </p:nvPr>
         </p:nvSpPr>
         <p:spPr/>
+        <p:txBody>
+          <a:bodyPr/>
+          <a:lstStyle/>
+          <a:p>
+            <a:endParaRPr lang="en-CH"/>
+          </a:p>
+        </p:txBody>
       </p:sp>
     </p:spTree>
   </p:cSld>
@@ -1346,10 +1308,9 @@
           <a:lstStyle/>
           <a:p>
             <a:r>
-              <a:rPr lang="en-US" smtClean="0"/>
+              <a:rPr lang="en-US"/>
               <a:t>Click to edit Master title style</a:t>
             </a:r>
-            <a:endParaRPr lang="en-US"/>
           </a:p>
         </p:txBody>
       </p:sp>
@@ -1465,10 +1426,9 @@
           </a:lstStyle>
           <a:p>
             <a:r>
-              <a:rPr lang="en-US" smtClean="0"/>
+              <a:rPr lang="en-US"/>
               <a:t>Click to edit Master subtitle style</a:t>
             </a:r>
-            <a:endParaRPr lang="en-US"/>
           </a:p>
         </p:txBody>
       </p:sp>
@@ -1489,7 +1449,7 @@
           <a:p>
             <a:fld id="{5BCAD085-E8A6-8845-BD4E-CB4CCA059FC4}" type="datetimeFigureOut">
               <a:rPr lang="en-US" smtClean="0"/>
-              <a:t>1/27/13</a:t>
+              <a:t>6/30/26</a:t>
             </a:fld>
             <a:endParaRPr lang="en-US"/>
           </a:p>
@@ -1583,10 +1543,9 @@
           <a:lstStyle/>
           <a:p>
             <a:r>
-              <a:rPr lang="en-US" smtClean="0"/>
+              <a:rPr lang="en-US"/>
               <a:t>Click to edit Master title style</a:t>
             </a:r>
-            <a:endParaRPr lang="en-US"/>
           </a:p>
         </p:txBody>
       </p:sp>
@@ -1607,38 +1566,37 @@
           <a:p>
             <a:pPr lvl="0"/>
             <a:r>
-              <a:rPr lang="en-US" smtClean="0"/>
+              <a:rPr lang="en-US"/>
               <a:t>Click to edit Master text styles</a:t>
             </a:r>
           </a:p>
           <a:p>
             <a:pPr lvl="1"/>
             <a:r>
-              <a:rPr lang="en-US" smtClean="0"/>
+              <a:rPr lang="en-US"/>
               <a:t>Second level</a:t>
             </a:r>
           </a:p>
           <a:p>
             <a:pPr lvl="2"/>
             <a:r>
-              <a:rPr lang="en-US" smtClean="0"/>
+              <a:rPr lang="en-US"/>
               <a:t>Third level</a:t>
             </a:r>
           </a:p>
           <a:p>
             <a:pPr lvl="3"/>
             <a:r>
-              <a:rPr lang="en-US" smtClean="0"/>
+              <a:rPr lang="en-US"/>
               <a:t>Fourth level</a:t>
             </a:r>
           </a:p>
           <a:p>
             <a:pPr lvl="4"/>
             <a:r>
-              <a:rPr lang="en-US" smtClean="0"/>
+              <a:rPr lang="en-US"/>
               <a:t>Fifth level</a:t>
             </a:r>
-            <a:endParaRPr lang="en-US"/>
           </a:p>
         </p:txBody>
       </p:sp>
@@ -1659,7 +1617,7 @@
           <a:p>
             <a:fld id="{5BCAD085-E8A6-8845-BD4E-CB4CCA059FC4}" type="datetimeFigureOut">
               <a:rPr lang="en-US" smtClean="0"/>
-              <a:t>1/27/13</a:t>
+              <a:t>6/30/26</a:t>
             </a:fld>
             <a:endParaRPr lang="en-US"/>
           </a:p>
@@ -1758,10 +1716,9 @@
           <a:lstStyle/>
           <a:p>
             <a:r>
-              <a:rPr lang="en-US" smtClean="0"/>
+              <a:rPr lang="en-US"/>
               <a:t>Click to edit Master title style</a:t>
             </a:r>
-            <a:endParaRPr lang="en-US"/>
           </a:p>
         </p:txBody>
       </p:sp>
@@ -1787,38 +1744,37 @@
           <a:p>
             <a:pPr lvl="0"/>
             <a:r>
-              <a:rPr lang="en-US" smtClean="0"/>
+              <a:rPr lang="en-US"/>
               <a:t>Click to edit Master text styles</a:t>
             </a:r>
           </a:p>
           <a:p>
             <a:pPr lvl="1"/>
             <a:r>
-              <a:rPr lang="en-US" smtClean="0"/>
+              <a:rPr lang="en-US"/>
               <a:t>Second level</a:t>
             </a:r>
           </a:p>
           <a:p>
             <a:pPr lvl="2"/>
             <a:r>
-              <a:rPr lang="en-US" smtClean="0"/>
+              <a:rPr lang="en-US"/>
               <a:t>Third level</a:t>
             </a:r>
           </a:p>
           <a:p>
             <a:pPr lvl="3"/>
             <a:r>
-              <a:rPr lang="en-US" smtClean="0"/>
+              <a:rPr lang="en-US"/>
               <a:t>Fourth level</a:t>
             </a:r>
           </a:p>
           <a:p>
             <a:pPr lvl="4"/>
             <a:r>
-              <a:rPr lang="en-US" smtClean="0"/>
+              <a:rPr lang="en-US"/>
               <a:t>Fifth level</a:t>
             </a:r>
-            <a:endParaRPr lang="en-US"/>
           </a:p>
         </p:txBody>
       </p:sp>
@@ -1839,7 +1795,7 @@
           <a:p>
             <a:fld id="{5BCAD085-E8A6-8845-BD4E-CB4CCA059FC4}" type="datetimeFigureOut">
               <a:rPr lang="en-US" smtClean="0"/>
-              <a:t>1/27/13</a:t>
+              <a:t>6/30/26</a:t>
             </a:fld>
             <a:endParaRPr lang="en-US"/>
           </a:p>
@@ -1933,10 +1889,9 @@
           <a:lstStyle/>
           <a:p>
             <a:r>
-              <a:rPr lang="en-US" smtClean="0"/>
+              <a:rPr lang="en-US"/>
               <a:t>Click to edit Master title style</a:t>
             </a:r>
-            <a:endParaRPr lang="en-US"/>
           </a:p>
         </p:txBody>
       </p:sp>
@@ -1957,38 +1912,37 @@
           <a:p>
             <a:pPr lvl="0"/>
             <a:r>
-              <a:rPr lang="en-US" smtClean="0"/>
+              <a:rPr lang="en-US"/>
               <a:t>Click to edit Master text styles</a:t>
             </a:r>
           </a:p>
           <a:p>
             <a:pPr lvl="1"/>
             <a:r>
-              <a:rPr lang="en-US" smtClean="0"/>
+              <a:rPr lang="en-US"/>
               <a:t>Second level</a:t>
             </a:r>
           </a:p>
           <a:p>
             <a:pPr lvl="2"/>
             <a:r>
-              <a:rPr lang="en-US" smtClean="0"/>
+              <a:rPr lang="en-US"/>
               <a:t>Third level</a:t>
             </a:r>
           </a:p>
           <a:p>
             <a:pPr lvl="3"/>
             <a:r>
-              <a:rPr lang="en-US" smtClean="0"/>
+              <a:rPr lang="en-US"/>
               <a:t>Fourth level</a:t>
             </a:r>
           </a:p>
           <a:p>
             <a:pPr lvl="4"/>
             <a:r>
-              <a:rPr lang="en-US" smtClean="0"/>
+              <a:rPr lang="en-US"/>
               <a:t>Fifth level</a:t>
             </a:r>
-            <a:endParaRPr lang="en-US"/>
           </a:p>
         </p:txBody>
       </p:sp>
@@ -2009,7 +1963,7 @@
           <a:p>
             <a:fld id="{5BCAD085-E8A6-8845-BD4E-CB4CCA059FC4}" type="datetimeFigureOut">
               <a:rPr lang="en-US" smtClean="0"/>
-              <a:t>1/27/13</a:t>
+              <a:t>6/30/26</a:t>
             </a:fld>
             <a:endParaRPr lang="en-US"/>
           </a:p>
@@ -2112,10 +2066,9 @@
           </a:lstStyle>
           <a:p>
             <a:r>
-              <a:rPr lang="en-US" smtClean="0"/>
+              <a:rPr lang="en-US"/>
               <a:t>Click to edit Master title style</a:t>
             </a:r>
-            <a:endParaRPr lang="en-US"/>
           </a:p>
         </p:txBody>
       </p:sp>
@@ -2232,7 +2185,7 @@
           <a:p>
             <a:pPr lvl="0"/>
             <a:r>
-              <a:rPr lang="en-US" smtClean="0"/>
+              <a:rPr lang="en-US"/>
               <a:t>Click to edit Master text styles</a:t>
             </a:r>
           </a:p>
@@ -2255,7 +2208,7 @@
           <a:p>
             <a:fld id="{5BCAD085-E8A6-8845-BD4E-CB4CCA059FC4}" type="datetimeFigureOut">
               <a:rPr lang="en-US" smtClean="0"/>
-              <a:t>1/27/13</a:t>
+              <a:t>6/30/26</a:t>
             </a:fld>
             <a:endParaRPr lang="en-US"/>
           </a:p>
@@ -2349,10 +2302,9 @@
           <a:lstStyle/>
           <a:p>
             <a:r>
-              <a:rPr lang="en-US" smtClean="0"/>
+              <a:rPr lang="en-US"/>
               <a:t>Click to edit Master title style</a:t>
             </a:r>
-            <a:endParaRPr lang="en-US"/>
           </a:p>
         </p:txBody>
       </p:sp>
@@ -2406,38 +2358,37 @@
           <a:p>
             <a:pPr lvl="0"/>
             <a:r>
-              <a:rPr lang="en-US" smtClean="0"/>
+              <a:rPr lang="en-US"/>
               <a:t>Click to edit Master text styles</a:t>
             </a:r>
           </a:p>
           <a:p>
             <a:pPr lvl="1"/>
             <a:r>
-              <a:rPr lang="en-US" smtClean="0"/>
+              <a:rPr lang="en-US"/>
               <a:t>Second level</a:t>
             </a:r>
           </a:p>
           <a:p>
             <a:pPr lvl="2"/>
             <a:r>
-              <a:rPr lang="en-US" smtClean="0"/>
+              <a:rPr lang="en-US"/>
               <a:t>Third level</a:t>
             </a:r>
           </a:p>
           <a:p>
             <a:pPr lvl="3"/>
             <a:r>
-              <a:rPr lang="en-US" smtClean="0"/>
+              <a:rPr lang="en-US"/>
               <a:t>Fourth level</a:t>
             </a:r>
           </a:p>
           <a:p>
             <a:pPr lvl="4"/>
             <a:r>
-              <a:rPr lang="en-US" smtClean="0"/>
+              <a:rPr lang="en-US"/>
               <a:t>Fifth level</a:t>
             </a:r>
-            <a:endParaRPr lang="en-US"/>
           </a:p>
         </p:txBody>
       </p:sp>
@@ -2491,38 +2442,37 @@
           <a:p>
             <a:pPr lvl="0"/>
             <a:r>
-              <a:rPr lang="en-US" smtClean="0"/>
+              <a:rPr lang="en-US"/>
               <a:t>Click to edit Master text styles</a:t>
             </a:r>
           </a:p>
           <a:p>
             <a:pPr lvl="1"/>
             <a:r>
-              <a:rPr lang="en-US" smtClean="0"/>
+              <a:rPr lang="en-US"/>
               <a:t>Second level</a:t>
             </a:r>
           </a:p>
           <a:p>
             <a:pPr lvl="2"/>
             <a:r>
-              <a:rPr lang="en-US" smtClean="0"/>
+              <a:rPr lang="en-US"/>
               <a:t>Third level</a:t>
             </a:r>
           </a:p>
           <a:p>
             <a:pPr lvl="3"/>
             <a:r>
-              <a:rPr lang="en-US" smtClean="0"/>
+              <a:rPr lang="en-US"/>
               <a:t>Fourth level</a:t>
             </a:r>
           </a:p>
           <a:p>
             <a:pPr lvl="4"/>
             <a:r>
-              <a:rPr lang="en-US" smtClean="0"/>
+              <a:rPr lang="en-US"/>
               <a:t>Fifth level</a:t>
             </a:r>
-            <a:endParaRPr lang="en-US"/>
           </a:p>
         </p:txBody>
       </p:sp>
@@ -2543,7 +2493,7 @@
           <a:p>
             <a:fld id="{5BCAD085-E8A6-8845-BD4E-CB4CCA059FC4}" type="datetimeFigureOut">
               <a:rPr lang="en-US" smtClean="0"/>
-              <a:t>1/27/13</a:t>
+              <a:t>6/30/26</a:t>
             </a:fld>
             <a:endParaRPr lang="en-US"/>
           </a:p>
@@ -2641,10 +2591,9 @@
           </a:lstStyle>
           <a:p>
             <a:r>
-              <a:rPr lang="en-US" smtClean="0"/>
+              <a:rPr lang="en-US"/>
               <a:t>Click to edit Master title style</a:t>
             </a:r>
-            <a:endParaRPr lang="en-US"/>
           </a:p>
         </p:txBody>
       </p:sp>
@@ -2707,7 +2656,7 @@
           <a:p>
             <a:pPr lvl="0"/>
             <a:r>
-              <a:rPr lang="en-US" smtClean="0"/>
+              <a:rPr lang="en-US"/>
               <a:t>Click to edit Master text styles</a:t>
             </a:r>
           </a:p>
@@ -2763,38 +2712,37 @@
           <a:p>
             <a:pPr lvl="0"/>
             <a:r>
-              <a:rPr lang="en-US" smtClean="0"/>
+              <a:rPr lang="en-US"/>
               <a:t>Click to edit Master text styles</a:t>
             </a:r>
           </a:p>
           <a:p>
             <a:pPr lvl="1"/>
             <a:r>
-              <a:rPr lang="en-US" smtClean="0"/>
+              <a:rPr lang="en-US"/>
               <a:t>Second level</a:t>
             </a:r>
           </a:p>
           <a:p>
             <a:pPr lvl="2"/>
             <a:r>
-              <a:rPr lang="en-US" smtClean="0"/>
+              <a:rPr lang="en-US"/>
               <a:t>Third level</a:t>
             </a:r>
           </a:p>
           <a:p>
             <a:pPr lvl="3"/>
             <a:r>
-              <a:rPr lang="en-US" smtClean="0"/>
+              <a:rPr lang="en-US"/>
               <a:t>Fourth level</a:t>
             </a:r>
           </a:p>
           <a:p>
             <a:pPr lvl="4"/>
             <a:r>
-              <a:rPr lang="en-US" smtClean="0"/>
+              <a:rPr lang="en-US"/>
               <a:t>Fifth level</a:t>
             </a:r>
-            <a:endParaRPr lang="en-US"/>
           </a:p>
         </p:txBody>
       </p:sp>
@@ -2857,7 +2805,7 @@
           <a:p>
             <a:pPr lvl="0"/>
             <a:r>
-              <a:rPr lang="en-US" smtClean="0"/>
+              <a:rPr lang="en-US"/>
               <a:t>Click to edit Master text styles</a:t>
             </a:r>
           </a:p>
@@ -2913,38 +2861,37 @@
           <a:p>
             <a:pPr lvl="0"/>
             <a:r>
-              <a:rPr lang="en-US" smtClean="0"/>
+              <a:rPr lang="en-US"/>
               <a:t>Click to edit Master text styles</a:t>
             </a:r>
           </a:p>
           <a:p>
             <a:pPr lvl="1"/>
             <a:r>
-              <a:rPr lang="en-US" smtClean="0"/>
+              <a:rPr lang="en-US"/>
               <a:t>Second level</a:t>
             </a:r>
           </a:p>
           <a:p>
             <a:pPr lvl="2"/>
             <a:r>
-              <a:rPr lang="en-US" smtClean="0"/>
+              <a:rPr lang="en-US"/>
               <a:t>Third level</a:t>
             </a:r>
           </a:p>
           <a:p>
             <a:pPr lvl="3"/>
             <a:r>
-              <a:rPr lang="en-US" smtClean="0"/>
+              <a:rPr lang="en-US"/>
               <a:t>Fourth level</a:t>
             </a:r>
           </a:p>
           <a:p>
             <a:pPr lvl="4"/>
             <a:r>
-              <a:rPr lang="en-US" smtClean="0"/>
+              <a:rPr lang="en-US"/>
               <a:t>Fifth level</a:t>
             </a:r>
-            <a:endParaRPr lang="en-US"/>
           </a:p>
         </p:txBody>
       </p:sp>
@@ -2965,7 +2912,7 @@
           <a:p>
             <a:fld id="{5BCAD085-E8A6-8845-BD4E-CB4CCA059FC4}" type="datetimeFigureOut">
               <a:rPr lang="en-US" smtClean="0"/>
-              <a:t>1/27/13</a:t>
+              <a:t>6/30/26</a:t>
             </a:fld>
             <a:endParaRPr lang="en-US"/>
           </a:p>
@@ -3059,10 +3006,9 @@
           <a:lstStyle/>
           <a:p>
             <a:r>
-              <a:rPr lang="en-US" smtClean="0"/>
+              <a:rPr lang="en-US"/>
               <a:t>Click to edit Master title style</a:t>
             </a:r>
-            <a:endParaRPr lang="en-US"/>
           </a:p>
         </p:txBody>
       </p:sp>
@@ -3083,7 +3029,7 @@
           <a:p>
             <a:fld id="{5BCAD085-E8A6-8845-BD4E-CB4CCA059FC4}" type="datetimeFigureOut">
               <a:rPr lang="en-US" smtClean="0"/>
-              <a:t>1/27/13</a:t>
+              <a:t>6/30/26</a:t>
             </a:fld>
             <a:endParaRPr lang="en-US"/>
           </a:p>
@@ -3178,7 +3124,7 @@
           <a:p>
             <a:fld id="{5BCAD085-E8A6-8845-BD4E-CB4CCA059FC4}" type="datetimeFigureOut">
               <a:rPr lang="en-US" smtClean="0"/>
-              <a:t>1/27/13</a:t>
+              <a:t>6/30/26</a:t>
             </a:fld>
             <a:endParaRPr lang="en-US"/>
           </a:p>
@@ -3281,10 +3227,9 @@
           </a:lstStyle>
           <a:p>
             <a:r>
-              <a:rPr lang="en-US" smtClean="0"/>
+              <a:rPr lang="en-US"/>
               <a:t>Click to edit Master title style</a:t>
             </a:r>
-            <a:endParaRPr lang="en-US"/>
           </a:p>
         </p:txBody>
       </p:sp>
@@ -3338,38 +3283,37 @@
           <a:p>
             <a:pPr lvl="0"/>
             <a:r>
-              <a:rPr lang="en-US" smtClean="0"/>
+              <a:rPr lang="en-US"/>
               <a:t>Click to edit Master text styles</a:t>
             </a:r>
           </a:p>
           <a:p>
             <a:pPr lvl="1"/>
             <a:r>
-              <a:rPr lang="en-US" smtClean="0"/>
+              <a:rPr lang="en-US"/>
               <a:t>Second level</a:t>
             </a:r>
           </a:p>
           <a:p>
             <a:pPr lvl="2"/>
             <a:r>
-              <a:rPr lang="en-US" smtClean="0"/>
+              <a:rPr lang="en-US"/>
               <a:t>Third level</a:t>
             </a:r>
           </a:p>
           <a:p>
             <a:pPr lvl="3"/>
             <a:r>
-              <a:rPr lang="en-US" smtClean="0"/>
+              <a:rPr lang="en-US"/>
               <a:t>Fourth level</a:t>
             </a:r>
           </a:p>
           <a:p>
             <a:pPr lvl="4"/>
             <a:r>
-              <a:rPr lang="en-US" smtClean="0"/>
+              <a:rPr lang="en-US"/>
               <a:t>Fifth level</a:t>
             </a:r>
-            <a:endParaRPr lang="en-US"/>
           </a:p>
         </p:txBody>
       </p:sp>
@@ -3432,7 +3376,7 @@
           <a:p>
             <a:pPr lvl="0"/>
             <a:r>
-              <a:rPr lang="en-US" smtClean="0"/>
+              <a:rPr lang="en-US"/>
               <a:t>Click to edit Master text styles</a:t>
             </a:r>
           </a:p>
@@ -3455,7 +3399,7 @@
           <a:p>
             <a:fld id="{5BCAD085-E8A6-8845-BD4E-CB4CCA059FC4}" type="datetimeFigureOut">
               <a:rPr lang="en-US" smtClean="0"/>
-              <a:t>1/27/13</a:t>
+              <a:t>6/30/26</a:t>
             </a:fld>
             <a:endParaRPr lang="en-US"/>
           </a:p>
@@ -3558,10 +3502,9 @@
           </a:lstStyle>
           <a:p>
             <a:r>
-              <a:rPr lang="en-US" smtClean="0"/>
+              <a:rPr lang="en-US"/>
               <a:t>Click to edit Master title style</a:t>
             </a:r>
-            <a:endParaRPr lang="en-US"/>
           </a:p>
         </p:txBody>
       </p:sp>
@@ -3685,7 +3628,7 @@
           <a:p>
             <a:pPr lvl="0"/>
             <a:r>
-              <a:rPr lang="en-US" smtClean="0"/>
+              <a:rPr lang="en-US"/>
               <a:t>Click to edit Master text styles</a:t>
             </a:r>
           </a:p>
@@ -3708,7 +3651,7 @@
           <a:p>
             <a:fld id="{5BCAD085-E8A6-8845-BD4E-CB4CCA059FC4}" type="datetimeFigureOut">
               <a:rPr lang="en-US" smtClean="0"/>
-              <a:t>1/27/13</a:t>
+              <a:t>6/30/26</a:t>
             </a:fld>
             <a:endParaRPr lang="en-US"/>
           </a:p>
@@ -3817,10 +3760,9 @@
           <a:lstStyle/>
           <a:p>
             <a:r>
-              <a:rPr lang="en-US" smtClean="0"/>
+              <a:rPr lang="en-US"/>
               <a:t>Click to edit Master title style</a:t>
             </a:r>
-            <a:endParaRPr lang="en-US"/>
           </a:p>
         </p:txBody>
       </p:sp>
@@ -3851,38 +3793,37 @@
           <a:p>
             <a:pPr lvl="0"/>
             <a:r>
-              <a:rPr lang="en-US" smtClean="0"/>
+              <a:rPr lang="en-US"/>
               <a:t>Click to edit Master text styles</a:t>
             </a:r>
           </a:p>
           <a:p>
             <a:pPr lvl="1"/>
             <a:r>
-              <a:rPr lang="en-US" smtClean="0"/>
+              <a:rPr lang="en-US"/>
               <a:t>Second level</a:t>
             </a:r>
           </a:p>
           <a:p>
             <a:pPr lvl="2"/>
             <a:r>
-              <a:rPr lang="en-US" smtClean="0"/>
+              <a:rPr lang="en-US"/>
               <a:t>Third level</a:t>
             </a:r>
           </a:p>
           <a:p>
             <a:pPr lvl="3"/>
             <a:r>
-              <a:rPr lang="en-US" smtClean="0"/>
+              <a:rPr lang="en-US"/>
               <a:t>Fourth level</a:t>
             </a:r>
           </a:p>
           <a:p>
             <a:pPr lvl="4"/>
             <a:r>
-              <a:rPr lang="en-US" smtClean="0"/>
+              <a:rPr lang="en-US"/>
               <a:t>Fifth level</a:t>
             </a:r>
-            <a:endParaRPr lang="en-US"/>
           </a:p>
         </p:txBody>
       </p:sp>
@@ -3921,7 +3862,7 @@
           <a:p>
             <a:fld id="{5BCAD085-E8A6-8845-BD4E-CB4CCA059FC4}" type="datetimeFigureOut">
               <a:rPr lang="en-US" smtClean="0"/>
-              <a:t>1/27/13</a:t>
+              <a:t>6/30/26</a:t>
             </a:fld>
             <a:endParaRPr lang="en-US"/>
           </a:p>
@@ -4280,7 +4221,7 @@
 </file>
 
 <file path=ppt/slides/slide1.xml><?xml version="1.0" encoding="utf-8"?>
-<p:sld xmlns:a="http://schemas.openxmlformats.org/drawingml/2006/main" xmlns:p="http://schemas.openxmlformats.org/presentationml/2006/main" xmlns:r="http://schemas.openxmlformats.org/officeDocument/2006/relationships">
+<p:sld xmlns:a="http://schemas.openxmlformats.org/drawingml/2006/main" xmlns:r="http://schemas.openxmlformats.org/officeDocument/2006/relationships" xmlns:p="http://schemas.openxmlformats.org/presentationml/2006/main">
   <p:cSld>
     <p:spTree>
       <p:nvGrpSpPr>
@@ -4288,7 +4229,14 @@
         <p:cNvGrpSpPr/>
         <p:nvPr/>
       </p:nvGrpSpPr>
-      <p:grpSpPr/>
+      <p:grpSpPr>
+        <a:xfrm>
+          <a:off x="0" y="0"/>
+          <a:ext cx="0" cy="0"/>
+          <a:chOff x="0" y="0"/>
+          <a:chExt cx="0" cy="0"/>
+        </a:xfrm>
+      </p:grpSpPr>
       <p:sp>
         <p:nvSpPr>
           <p:cNvPr id="2" name="Rectangle 1"/>
@@ -4330,6 +4278,7 @@
           <a:lstStyle/>
           <a:p>
             <a:pPr algn="ctr"/>
+            <a:endParaRPr/>
           </a:p>
         </p:txBody>
       </p:sp>
@@ -4374,6 +4323,7 @@
           <a:lstStyle/>
           <a:p>
             <a:pPr algn="ctr"/>
+            <a:endParaRPr/>
           </a:p>
         </p:txBody>
       </p:sp>
@@ -4512,7 +4462,7 @@
         <p:spPr>
           <a:xfrm>
             <a:off x="868680" y="5577840"/>
-            <a:ext cx="10607040" cy="822960"/>
+            <a:ext cx="10607040" cy="612540"/>
           </a:xfrm>
           <a:prstGeom prst="rect">
             <a:avLst/>
@@ -4534,7 +4484,7 @@
               </a:spcAft>
             </a:pPr>
             <a:r>
-              <a:rPr sz="1400" b="0">
+              <a:rPr sz="1400" b="0" dirty="0">
                 <a:solidFill>
                   <a:srgbClr val="CFDAF0"/>
                 </a:solidFill>
@@ -4544,7 +4494,7 @@
             </a:r>
           </a:p>
           <a:p>
-            <a:pPr algn="l">
+            <a:pPr>
               <a:lnSpc>
                 <a:spcPct val="105000"/>
               </a:lnSpc>
@@ -4553,14 +4503,65 @@
               </a:spcAft>
             </a:pPr>
             <a:r>
-              <a:rPr sz="1400" b="0">
+              <a:rPr sz="1400" b="0" dirty="0">
                 <a:solidFill>
                   <a:srgbClr val="CFDAF0"/>
                 </a:solidFill>
                 <a:latin typeface="Calibri"/>
               </a:rPr>
-              <a:t>Team: Gilles Hamers, [teammate], [teammate]</a:t>
-            </a:r>
+              <a:t>Team: Gilles Hamers, </a:t>
+            </a:r>
+            <a:r>
+              <a:rPr lang="de-CH" sz="1400" dirty="0">
+                <a:solidFill>
+                  <a:srgbClr val="CFDAF0"/>
+                </a:solidFill>
+                <a:latin typeface="Calibri"/>
+              </a:rPr>
+              <a:t>Lorenz Rösgen, Dan </a:t>
+            </a:r>
+            <a:r>
+              <a:rPr lang="de-CH" sz="1400" dirty="0" err="1">
+                <a:solidFill>
+                  <a:srgbClr val="CFDAF0"/>
+                </a:solidFill>
+                <a:latin typeface="Calibri"/>
+              </a:rPr>
+              <a:t>Tigu</a:t>
+            </a:r>
+            <a:r>
+              <a:rPr lang="de-CH" sz="1400" dirty="0">
+                <a:solidFill>
+                  <a:srgbClr val="CFDAF0"/>
+                </a:solidFill>
+                <a:latin typeface="Calibri"/>
+              </a:rPr>
+              <a:t>, Marti </a:t>
+            </a:r>
+            <a:r>
+              <a:rPr lang="de-CH" sz="1400" dirty="0" err="1">
+                <a:solidFill>
+                  <a:srgbClr val="CFDAF0"/>
+                </a:solidFill>
+                <a:latin typeface="Calibri"/>
+              </a:rPr>
+              <a:t>Solà</a:t>
+            </a:r>
+            <a:r>
+              <a:rPr lang="de-CH" sz="1400" dirty="0">
+                <a:solidFill>
+                  <a:srgbClr val="CFDAF0"/>
+                </a:solidFill>
+                <a:latin typeface="Calibri"/>
+              </a:rPr>
+              <a:t> Puig </a:t>
+            </a:r>
+            <a:endParaRPr sz="1400" b="0" dirty="0">
+              <a:solidFill>
+                <a:srgbClr val="CFDAF0"/>
+              </a:solidFill>
+              <a:latin typeface="Calibri"/>
+            </a:endParaRPr>
           </a:p>
         </p:txBody>
       </p:sp>
@@ -4573,7 +4574,7 @@
 </file>
 
 <file path=ppt/slides/slide10.xml><?xml version="1.0" encoding="utf-8"?>
-<p:sld xmlns:a="http://schemas.openxmlformats.org/drawingml/2006/main" xmlns:p="http://schemas.openxmlformats.org/presentationml/2006/main" xmlns:r="http://schemas.openxmlformats.org/officeDocument/2006/relationships">
+<p:sld xmlns:a="http://schemas.openxmlformats.org/drawingml/2006/main" xmlns:r="http://schemas.openxmlformats.org/officeDocument/2006/relationships" xmlns:p="http://schemas.openxmlformats.org/presentationml/2006/main">
   <p:cSld>
     <p:spTree>
       <p:nvGrpSpPr>
@@ -4581,7 +4582,14 @@
         <p:cNvGrpSpPr/>
         <p:nvPr/>
       </p:nvGrpSpPr>
-      <p:grpSpPr/>
+      <p:grpSpPr>
+        <a:xfrm>
+          <a:off x="0" y="0"/>
+          <a:ext cx="0" cy="0"/>
+          <a:chOff x="0" y="0"/>
+          <a:chExt cx="0" cy="0"/>
+        </a:xfrm>
+      </p:grpSpPr>
       <p:sp>
         <p:nvSpPr>
           <p:cNvPr id="2" name="Rectangle 1"/>
@@ -4623,6 +4631,7 @@
           <a:lstStyle/>
           <a:p>
             <a:pPr algn="ctr"/>
+            <a:endParaRPr/>
           </a:p>
         </p:txBody>
       </p:sp>
@@ -4751,6 +4760,7 @@
           <a:lstStyle/>
           <a:p>
             <a:pPr algn="ctr"/>
+            <a:endParaRPr/>
           </a:p>
         </p:txBody>
       </p:sp>
@@ -4802,7 +4812,13 @@
           <p:cNvGraphicFramePr>
             <a:graphicFrameLocks noGrp="1"/>
           </p:cNvGraphicFramePr>
-          <p:nvPr/>
+          <p:nvPr>
+            <p:extLst>
+              <p:ext uri="{D42A27DB-BD31-4B8C-83A1-F6EECF244321}">
+                <p14:modId xmlns:p14="http://schemas.microsoft.com/office/powerpoint/2010/main" val="2898428357"/>
+              </p:ext>
+            </p:extLst>
+          </p:nvPr>
         </p:nvGraphicFramePr>
         <p:xfrm>
           <a:off x="548640" y="1874519"/>
@@ -4815,9 +4831,27 @@
                 <a:tableStyleId>{5C22544A-7EE6-4342-B048-85BDC9FD1C3A}</a:tableStyleId>
               </a:tblPr>
               <a:tblGrid>
-                <a:gridCol w="2194560"/>
-                <a:gridCol w="4389120"/>
-                <a:gridCol w="4480560"/>
+                <a:gridCol w="2194560">
+                  <a:extLst>
+                    <a:ext uri="{9D8B030D-6E8A-4147-A177-3AD203B41FA5}">
+                      <a16:colId xmlns:a16="http://schemas.microsoft.com/office/drawing/2014/main" val="20000"/>
+                    </a:ext>
+                  </a:extLst>
+                </a:gridCol>
+                <a:gridCol w="4389120">
+                  <a:extLst>
+                    <a:ext uri="{9D8B030D-6E8A-4147-A177-3AD203B41FA5}">
+                      <a16:colId xmlns:a16="http://schemas.microsoft.com/office/drawing/2014/main" val="20001"/>
+                    </a:ext>
+                  </a:extLst>
+                </a:gridCol>
+                <a:gridCol w="4480560">
+                  <a:extLst>
+                    <a:ext uri="{9D8B030D-6E8A-4147-A177-3AD203B41FA5}">
+                      <a16:colId xmlns:a16="http://schemas.microsoft.com/office/drawing/2014/main" val="20002"/>
+                    </a:ext>
+                  </a:extLst>
+                </a:gridCol>
               </a:tblGrid>
               <a:tr h="603504">
                 <a:tc>
@@ -4886,6 +4920,11 @@
                     </a:solidFill>
                   </a:tcPr>
                 </a:tc>
+                <a:extLst>
+                  <a:ext uri="{0D108BD9-81ED-4DB2-BD59-A6C34878D82A}">
+                    <a16:rowId xmlns:a16="http://schemas.microsoft.com/office/drawing/2014/main" val="10000"/>
+                  </a:ext>
+                </a:extLst>
               </a:tr>
               <a:tr h="603504">
                 <a:tc>
@@ -4916,13 +4955,40 @@
                     <a:lstStyle/>
                     <a:p>
                       <a:r>
-                        <a:rPr sz="1150">
+                        <a:rPr lang="de-CH" sz="1150" dirty="0">
                           <a:solidFill>
                             <a:srgbClr val="1A1A2E"/>
                           </a:solidFill>
                           <a:latin typeface="Calibri"/>
                         </a:rPr>
-                        <a:t>Claude (the Opus or Sonnet model) as the thinking engine</a:t>
+                        <a:t>LLM </a:t>
+                      </a:r>
+                      <a:r>
+                        <a:rPr sz="1150" dirty="0">
+                          <a:solidFill>
+                            <a:srgbClr val="1A1A2E"/>
+                          </a:solidFill>
+                          <a:latin typeface="Calibri"/>
+                        </a:rPr>
+                        <a:t>as the </a:t>
+                      </a:r>
+                      <a:r>
+                        <a:rPr lang="de-CH" sz="1150" dirty="0" err="1">
+                          <a:solidFill>
+                            <a:srgbClr val="1A1A2E"/>
+                          </a:solidFill>
+                          <a:latin typeface="Calibri"/>
+                        </a:rPr>
+                        <a:t>reasoning</a:t>
+                      </a:r>
+                      <a:r>
+                        <a:rPr sz="1150" dirty="0">
+                          <a:solidFill>
+                            <a:srgbClr val="1A1A2E"/>
+                          </a:solidFill>
+                          <a:latin typeface="Calibri"/>
+                        </a:rPr>
+                        <a:t> engine</a:t>
                       </a:r>
                     </a:p>
                   </a:txBody>
@@ -4954,6 +5020,11 @@
                     </a:solidFill>
                   </a:tcPr>
                 </a:tc>
+                <a:extLst>
+                  <a:ext uri="{0D108BD9-81ED-4DB2-BD59-A6C34878D82A}">
+                    <a16:rowId xmlns:a16="http://schemas.microsoft.com/office/drawing/2014/main" val="10001"/>
+                  </a:ext>
+                </a:extLst>
               </a:tr>
               <a:tr h="603504">
                 <a:tc>
@@ -4984,13 +5055,31 @@
                     <a:lstStyle/>
                     <a:p>
                       <a:r>
-                        <a:rPr sz="1150">
+                        <a:rPr sz="1150" dirty="0">
                           <a:solidFill>
                             <a:srgbClr val="1A1A2E"/>
                           </a:solidFill>
                           <a:latin typeface="Calibri"/>
                         </a:rPr>
-                        <a:t>The option to add a purpose-trained model for arrival and lifespan predictions</a:t>
+                        <a:t>The option to add a </a:t>
+                      </a:r>
+                      <a:r>
+                        <a:rPr lang="de-CH" sz="1150" dirty="0" err="1">
+                          <a:solidFill>
+                            <a:srgbClr val="1A1A2E"/>
+                          </a:solidFill>
+                          <a:latin typeface="Calibri"/>
+                        </a:rPr>
+                        <a:t>fine-tuned</a:t>
+                      </a:r>
+                      <a:r>
+                        <a:rPr sz="1150" dirty="0">
+                          <a:solidFill>
+                            <a:srgbClr val="1A1A2E"/>
+                          </a:solidFill>
+                          <a:latin typeface="Calibri"/>
+                        </a:rPr>
+                        <a:t> model for arrival and lifespan predictions</a:t>
                       </a:r>
                     </a:p>
                   </a:txBody>
@@ -5006,13 +5095,31 @@
                     <a:lstStyle/>
                     <a:p>
                       <a:r>
-                        <a:rPr sz="1150">
+                        <a:rPr lang="de-CH" sz="1150" dirty="0">
                           <a:solidFill>
                             <a:srgbClr val="1A1A2E"/>
                           </a:solidFill>
                           <a:latin typeface="Calibri"/>
                         </a:rPr>
-                        <a:t>Purpose-trained models do better on numeric forecasts, and we can swap models freely</a:t>
+                        <a:t>Fine-</a:t>
+                      </a:r>
+                      <a:r>
+                        <a:rPr lang="de-CH" sz="1150" dirty="0" err="1">
+                          <a:solidFill>
+                            <a:srgbClr val="1A1A2E"/>
+                          </a:solidFill>
+                          <a:latin typeface="Calibri"/>
+                        </a:rPr>
+                        <a:t>tuned</a:t>
+                      </a:r>
+                      <a:r>
+                        <a:rPr sz="1150" dirty="0">
+                          <a:solidFill>
+                            <a:srgbClr val="1A1A2E"/>
+                          </a:solidFill>
+                          <a:latin typeface="Calibri"/>
+                        </a:rPr>
+                        <a:t> models do better on numeric forecasts, and we can swap models freely</a:t>
                       </a:r>
                     </a:p>
                   </a:txBody>
@@ -5022,6 +5129,11 @@
                     </a:solidFill>
                   </a:tcPr>
                 </a:tc>
+                <a:extLst>
+                  <a:ext uri="{0D108BD9-81ED-4DB2-BD59-A6C34878D82A}">
+                    <a16:rowId xmlns:a16="http://schemas.microsoft.com/office/drawing/2014/main" val="10002"/>
+                  </a:ext>
+                </a:extLst>
               </a:tr>
               <a:tr h="603504">
                 <a:tc>
@@ -5030,14 +5142,20 @@
                     <a:lstStyle/>
                     <a:p>
                       <a:r>
-                        <a:rPr sz="1150">
+                        <a:rPr lang="de-CH" sz="1150" dirty="0">
                           <a:solidFill>
                             <a:srgbClr val="1A1A2E"/>
                           </a:solidFill>
                           <a:latin typeface="Calibri"/>
                         </a:rPr>
-                        <a:t>Hosting</a:t>
+                        <a:t>Cloud</a:t>
                       </a:r>
+                      <a:endParaRPr sz="1150" dirty="0">
+                        <a:solidFill>
+                          <a:srgbClr val="1A1A2E"/>
+                        </a:solidFill>
+                        <a:latin typeface="Calibri"/>
+                      </a:endParaRPr>
                     </a:p>
                   </a:txBody>
                   <a:tcPr>
@@ -5090,6 +5208,11 @@
                     </a:solidFill>
                   </a:tcPr>
                 </a:tc>
+                <a:extLst>
+                  <a:ext uri="{0D108BD9-81ED-4DB2-BD59-A6C34878D82A}">
+                    <a16:rowId xmlns:a16="http://schemas.microsoft.com/office/drawing/2014/main" val="10003"/>
+                  </a:ext>
+                </a:extLst>
               </a:tr>
               <a:tr h="603504">
                 <a:tc>
@@ -5098,14 +5221,20 @@
                     <a:lstStyle/>
                     <a:p>
                       <a:r>
-                        <a:rPr sz="1150">
+                        <a:rPr lang="de-CH" sz="1150" dirty="0" err="1">
                           <a:solidFill>
                             <a:srgbClr val="1A1A2E"/>
                           </a:solidFill>
                           <a:latin typeface="Calibri"/>
                         </a:rPr>
-                        <a:t>Building blocks</a:t>
+                        <a:t>Platform</a:t>
                       </a:r>
+                      <a:endParaRPr sz="1150" dirty="0">
+                        <a:solidFill>
+                          <a:srgbClr val="1A1A2E"/>
+                        </a:solidFill>
+                        <a:latin typeface="Calibri"/>
+                      </a:endParaRPr>
                     </a:p>
                   </a:txBody>
                   <a:tcPr>
@@ -5120,13 +5249,31 @@
                     <a:lstStyle/>
                     <a:p>
                       <a:r>
-                        <a:rPr sz="1150">
+                        <a:rPr sz="1150" dirty="0">
                           <a:solidFill>
                             <a:srgbClr val="1A1A2E"/>
                           </a:solidFill>
                           <a:latin typeface="Calibri"/>
                         </a:rPr>
-                        <a:t>Python, with established agent frameworks (or a no-code option)</a:t>
+                        <a:t>Python, with established agent frameworks (or a no-code option</a:t>
+                      </a:r>
+                      <a:r>
+                        <a:rPr lang="de-CH" sz="1150" dirty="0">
+                          <a:solidFill>
+                            <a:srgbClr val="1A1A2E"/>
+                          </a:solidFill>
+                          <a:latin typeface="Calibri"/>
+                        </a:rPr>
+                        <a:t>, e.g. Helix</a:t>
+                      </a:r>
+                      <a:r>
+                        <a:rPr sz="1150" dirty="0">
+                          <a:solidFill>
+                            <a:srgbClr val="1A1A2E"/>
+                          </a:solidFill>
+                          <a:latin typeface="Calibri"/>
+                        </a:rPr>
+                        <a:t>)</a:t>
                       </a:r>
                     </a:p>
                   </a:txBody>
@@ -5158,6 +5305,11 @@
                     </a:solidFill>
                   </a:tcPr>
                 </a:tc>
+                <a:extLst>
+                  <a:ext uri="{0D108BD9-81ED-4DB2-BD59-A6C34878D82A}">
+                    <a16:rowId xmlns:a16="http://schemas.microsoft.com/office/drawing/2014/main" val="10004"/>
+                  </a:ext>
+                </a:extLst>
               </a:tr>
               <a:tr h="603504">
                 <a:tc>
@@ -5166,14 +5318,20 @@
                     <a:lstStyle/>
                     <a:p>
                       <a:r>
-                        <a:rPr sz="1150">
+                        <a:rPr lang="de-CH" sz="1150" dirty="0">
                           <a:solidFill>
                             <a:srgbClr val="1A1A2E"/>
                           </a:solidFill>
                           <a:latin typeface="Calibri"/>
                         </a:rPr>
-                        <a:t>Connections and tracing</a:t>
+                        <a:t>Standards</a:t>
                       </a:r>
+                      <a:endParaRPr sz="1150" dirty="0">
+                        <a:solidFill>
+                          <a:srgbClr val="1A1A2E"/>
+                        </a:solidFill>
+                        <a:latin typeface="Calibri"/>
+                      </a:endParaRPr>
                     </a:p>
                   </a:txBody>
                   <a:tcPr>
@@ -5210,7 +5368,7 @@
                     <a:lstStyle/>
                     <a:p>
                       <a:r>
-                        <a:rPr sz="1150">
+                        <a:rPr sz="1150" dirty="0">
                           <a:solidFill>
                             <a:srgbClr val="1A1A2E"/>
                           </a:solidFill>
@@ -5226,6 +5384,11 @@
                     </a:solidFill>
                   </a:tcPr>
                 </a:tc>
+                <a:extLst>
+                  <a:ext uri="{0D108BD9-81ED-4DB2-BD59-A6C34878D82A}">
+                    <a16:rowId xmlns:a16="http://schemas.microsoft.com/office/drawing/2014/main" val="10005"/>
+                  </a:ext>
+                </a:extLst>
               </a:tr>
             </a:tbl>
           </a:graphicData>
@@ -5272,6 +5435,7 @@
           <a:lstStyle/>
           <a:p>
             <a:pPr algn="ctr"/>
+            <a:endParaRPr/>
           </a:p>
         </p:txBody>
       </p:sp>
@@ -5283,8 +5447,8 @@
         </p:nvSpPr>
         <p:spPr>
           <a:xfrm>
-            <a:off x="731520" y="5687568"/>
-            <a:ext cx="10698480" cy="548640"/>
+            <a:off x="731520" y="5717814"/>
+            <a:ext cx="10698480" cy="488147"/>
           </a:xfrm>
           <a:prstGeom prst="rect">
             <a:avLst/>
@@ -5306,7 +5470,7 @@
               </a:spcAft>
             </a:pPr>
             <a:r>
-              <a:rPr sz="1250" b="1">
+              <a:rPr sz="1250" b="1" dirty="0">
                 <a:solidFill>
                   <a:srgbClr val="0E7C86"/>
                 </a:solidFill>
@@ -5315,13 +5479,13 @@
               <a:t>Our working prototype already mirrors this design: </a:t>
             </a:r>
             <a:r>
-              <a:rPr sz="1250" b="0">
+              <a:rPr sz="1250" b="0" dirty="0">
                 <a:solidFill>
                   <a:srgbClr val="1A1A2E"/>
                 </a:solidFill>
                 <a:latin typeface="Calibri"/>
               </a:rPr>
-              <a:t>a model layer stands in for Claude, a tool registry for the connectors, a console trace for the production tracing, and a single orchestrator for the supervisor.</a:t>
+              <a:t>a tool registry for the connectors, a console trace for the production tracing, and a single orchestrator for the supervisor.</a:t>
             </a:r>
           </a:p>
         </p:txBody>
@@ -5367,75 +5531,7 @@
           <a:lstStyle/>
           <a:p>
             <a:pPr algn="ctr"/>
-          </a:p>
-        </p:txBody>
-      </p:sp>
-      <p:sp>
-        <p:nvSpPr>
-          <p:cNvPr id="11" name="TextBox 10"/>
-          <p:cNvSpPr txBox="1"/>
-          <p:nvPr/>
-        </p:nvSpPr>
-        <p:spPr>
-          <a:xfrm>
-            <a:off x="502920" y="6519672"/>
-            <a:ext cx="11155680" cy="310896"/>
-          </a:xfrm>
-          <a:prstGeom prst="rect">
-            <a:avLst/>
-          </a:prstGeom>
-          <a:noFill/>
-        </p:spPr>
-        <p:txBody>
-          <a:bodyPr wrap="square" anchor="ctr">
-            <a:spAutoFit/>
-          </a:bodyPr>
-          <a:lstStyle/>
-          <a:p>
-            <a:pPr algn="l">
-              <a:lnSpc>
-                <a:spcPct val="105000"/>
-              </a:lnSpc>
-              <a:spcAft>
-                <a:spcPts val="600"/>
-              </a:spcAft>
-            </a:pPr>
-            <a:r>
-              <a:rPr sz="1100" b="1">
-                <a:solidFill>
-                  <a:srgbClr val="0A1F6B"/>
-                </a:solidFill>
-                <a:latin typeface="Calibri"/>
-              </a:rPr>
-              <a:t>Rubric: </a:t>
-            </a:r>
-            <a:r>
-              <a:rPr sz="1100" b="0">
-                <a:solidFill>
-                  <a:srgbClr val="555555"/>
-                </a:solidFill>
-                <a:latin typeface="Calibri"/>
-              </a:rPr>
-              <a:t>Architecture (10 points) and feasibility (15 points)</a:t>
-            </a:r>
-            <a:r>
-              <a:rPr sz="1100" b="1">
-                <a:solidFill>
-                  <a:srgbClr val="0A1F6B"/>
-                </a:solidFill>
-                <a:latin typeface="Calibri"/>
-              </a:rPr>
-              <a:t>     |     Reference: </a:t>
-            </a:r>
-            <a:r>
-              <a:rPr sz="1100" b="0">
-                <a:solidFill>
-                  <a:srgbClr val="555555"/>
-                </a:solidFill>
-                <a:latin typeface="Calibri"/>
-              </a:rPr>
-              <a:t>Design handout, section 8</a:t>
-            </a:r>
+            <a:endParaRPr/>
           </a:p>
         </p:txBody>
       </p:sp>
@@ -5448,7 +5544,7 @@
 </file>
 
 <file path=ppt/slides/slide11.xml><?xml version="1.0" encoding="utf-8"?>
-<p:sld xmlns:a="http://schemas.openxmlformats.org/drawingml/2006/main" xmlns:p="http://schemas.openxmlformats.org/presentationml/2006/main" xmlns:r="http://schemas.openxmlformats.org/officeDocument/2006/relationships">
+<p:sld xmlns:a="http://schemas.openxmlformats.org/drawingml/2006/main" xmlns:r="http://schemas.openxmlformats.org/officeDocument/2006/relationships" xmlns:p="http://schemas.openxmlformats.org/presentationml/2006/main">
   <p:cSld>
     <p:spTree>
       <p:nvGrpSpPr>
@@ -5456,7 +5552,14 @@
         <p:cNvGrpSpPr/>
         <p:nvPr/>
       </p:nvGrpSpPr>
-      <p:grpSpPr/>
+      <p:grpSpPr>
+        <a:xfrm>
+          <a:off x="0" y="0"/>
+          <a:ext cx="0" cy="0"/>
+          <a:chOff x="0" y="0"/>
+          <a:chExt cx="0" cy="0"/>
+        </a:xfrm>
+      </p:grpSpPr>
       <p:sp>
         <p:nvSpPr>
           <p:cNvPr id="2" name="Rectangle 1"/>
@@ -5498,6 +5601,7 @@
           <a:lstStyle/>
           <a:p>
             <a:pPr algn="ctr"/>
+            <a:endParaRPr/>
           </a:p>
         </p:txBody>
       </p:sp>
@@ -5626,6 +5730,7 @@
           <a:lstStyle/>
           <a:p>
             <a:pPr algn="ctr"/>
+            <a:endParaRPr/>
           </a:p>
         </p:txBody>
       </p:sp>
@@ -6004,6 +6109,7 @@
           <a:lstStyle/>
           <a:p>
             <a:pPr algn="ctr"/>
+            <a:endParaRPr/>
           </a:p>
         </p:txBody>
       </p:sp>
@@ -6099,75 +6205,7 @@
           <a:lstStyle/>
           <a:p>
             <a:pPr algn="ctr"/>
-          </a:p>
-        </p:txBody>
-      </p:sp>
-      <p:sp>
-        <p:nvSpPr>
-          <p:cNvPr id="13" name="TextBox 12"/>
-          <p:cNvSpPr txBox="1"/>
-          <p:nvPr/>
-        </p:nvSpPr>
-        <p:spPr>
-          <a:xfrm>
-            <a:off x="502920" y="6519672"/>
-            <a:ext cx="11155680" cy="310896"/>
-          </a:xfrm>
-          <a:prstGeom prst="rect">
-            <a:avLst/>
-          </a:prstGeom>
-          <a:noFill/>
-        </p:spPr>
-        <p:txBody>
-          <a:bodyPr wrap="square" anchor="ctr">
-            <a:spAutoFit/>
-          </a:bodyPr>
-          <a:lstStyle/>
-          <a:p>
-            <a:pPr algn="l">
-              <a:lnSpc>
-                <a:spcPct val="105000"/>
-              </a:lnSpc>
-              <a:spcAft>
-                <a:spcPts val="600"/>
-              </a:spcAft>
-            </a:pPr>
-            <a:r>
-              <a:rPr sz="1100" b="1">
-                <a:solidFill>
-                  <a:srgbClr val="0A1F6B"/>
-                </a:solidFill>
-                <a:latin typeface="Calibri"/>
-              </a:rPr>
-              <a:t>Rubric: </a:t>
-            </a:r>
-            <a:r>
-              <a:rPr sz="1100" b="0">
-                <a:solidFill>
-                  <a:srgbClr val="555555"/>
-                </a:solidFill>
-                <a:latin typeface="Calibri"/>
-              </a:rPr>
-              <a:t>Clarity, presentation quality and creativity (20 points)</a:t>
-            </a:r>
-            <a:r>
-              <a:rPr sz="1100" b="1">
-                <a:solidFill>
-                  <a:srgbClr val="0A1F6B"/>
-                </a:solidFill>
-                <a:latin typeface="Calibri"/>
-              </a:rPr>
-              <a:t>     |     Reference: </a:t>
-            </a:r>
-            <a:r>
-              <a:rPr sz="1100" b="0">
-                <a:solidFill>
-                  <a:srgbClr val="555555"/>
-                </a:solidFill>
-                <a:latin typeface="Calibri"/>
-              </a:rPr>
-              <a:t>Assignment: benefits and next steps</a:t>
-            </a:r>
+            <a:endParaRPr/>
           </a:p>
         </p:txBody>
       </p:sp>
@@ -6180,7 +6218,7 @@
 </file>
 
 <file path=ppt/slides/slide12.xml><?xml version="1.0" encoding="utf-8"?>
-<p:sld xmlns:a="http://schemas.openxmlformats.org/drawingml/2006/main" xmlns:p="http://schemas.openxmlformats.org/presentationml/2006/main" xmlns:r="http://schemas.openxmlformats.org/officeDocument/2006/relationships">
+<p:sld xmlns:a="http://schemas.openxmlformats.org/drawingml/2006/main" xmlns:r="http://schemas.openxmlformats.org/officeDocument/2006/relationships" xmlns:p="http://schemas.openxmlformats.org/presentationml/2006/main">
   <p:cSld>
     <p:spTree>
       <p:nvGrpSpPr>
@@ -6188,7 +6226,14 @@
         <p:cNvGrpSpPr/>
         <p:nvPr/>
       </p:nvGrpSpPr>
-      <p:grpSpPr/>
+      <p:grpSpPr>
+        <a:xfrm>
+          <a:off x="0" y="0"/>
+          <a:ext cx="0" cy="0"/>
+          <a:chOff x="0" y="0"/>
+          <a:chExt cx="0" cy="0"/>
+        </a:xfrm>
+      </p:grpSpPr>
       <p:sp>
         <p:nvSpPr>
           <p:cNvPr id="2" name="Rectangle 1"/>
@@ -6230,6 +6275,7 @@
           <a:lstStyle/>
           <a:p>
             <a:pPr algn="ctr"/>
+            <a:endParaRPr/>
           </a:p>
         </p:txBody>
       </p:sp>
@@ -6274,6 +6320,7 @@
           <a:lstStyle/>
           <a:p>
             <a:pPr algn="ctr"/>
+            <a:endParaRPr/>
           </a:p>
         </p:txBody>
       </p:sp>
@@ -6412,7 +6459,7 @@
         <p:spPr>
           <a:xfrm>
             <a:off x="868680" y="5943600"/>
-            <a:ext cx="10607040" cy="548640"/>
+            <a:ext cx="10607040" cy="293863"/>
           </a:xfrm>
           <a:prstGeom prst="rect">
             <a:avLst/>
@@ -6425,7 +6472,7 @@
           </a:bodyPr>
           <a:lstStyle/>
           <a:p>
-            <a:pPr algn="l">
+            <a:pPr>
               <a:lnSpc>
                 <a:spcPct val="105000"/>
               </a:lnSpc>
@@ -6434,13 +6481,67 @@
               </a:spcAft>
             </a:pPr>
             <a:r>
-              <a:rPr sz="1300" b="0">
+              <a:rPr sz="1300" b="0" dirty="0">
                 <a:solidFill>
                   <a:srgbClr val="CFDAF0"/>
                 </a:solidFill>
                 <a:latin typeface="Calibri"/>
               </a:rPr>
-              <a:t>Team: Gilles Hamers, [teammate], [teammate]  |  Agentic AI for IT, IE University</a:t>
+              <a:t>Team: Gilles Hamers, </a:t>
+            </a:r>
+            <a:r>
+              <a:rPr lang="de-CH" sz="1300" dirty="0">
+                <a:solidFill>
+                  <a:srgbClr val="CFDAF0"/>
+                </a:solidFill>
+                <a:latin typeface="Calibri"/>
+              </a:rPr>
+              <a:t>Lorenz Rösgen, Dan </a:t>
+            </a:r>
+            <a:r>
+              <a:rPr lang="de-CH" sz="1300" dirty="0" err="1">
+                <a:solidFill>
+                  <a:srgbClr val="CFDAF0"/>
+                </a:solidFill>
+                <a:latin typeface="Calibri"/>
+              </a:rPr>
+              <a:t>Tigu</a:t>
+            </a:r>
+            <a:r>
+              <a:rPr lang="de-CH" sz="1300" dirty="0">
+                <a:solidFill>
+                  <a:srgbClr val="CFDAF0"/>
+                </a:solidFill>
+                <a:latin typeface="Calibri"/>
+              </a:rPr>
+              <a:t>, Marti </a:t>
+            </a:r>
+            <a:r>
+              <a:rPr lang="de-CH" sz="1300" dirty="0" err="1">
+                <a:solidFill>
+                  <a:srgbClr val="CFDAF0"/>
+                </a:solidFill>
+                <a:latin typeface="Calibri"/>
+              </a:rPr>
+              <a:t>Solà</a:t>
+            </a:r>
+            <a:r>
+              <a:rPr lang="de-CH" sz="1300" dirty="0">
+                <a:solidFill>
+                  <a:srgbClr val="CFDAF0"/>
+                </a:solidFill>
+                <a:latin typeface="Calibri"/>
+              </a:rPr>
+              <a:t> Puig</a:t>
+            </a:r>
+            <a:r>
+              <a:rPr sz="1300" b="0" dirty="0">
+                <a:solidFill>
+                  <a:srgbClr val="CFDAF0"/>
+                </a:solidFill>
+                <a:latin typeface="Calibri"/>
+              </a:rPr>
+              <a:t>  |  Agentic AI for IT, IE University</a:t>
             </a:r>
           </a:p>
         </p:txBody>
@@ -6454,7 +6555,7 @@
 </file>
 
 <file path=ppt/slides/slide2.xml><?xml version="1.0" encoding="utf-8"?>
-<p:sld xmlns:a="http://schemas.openxmlformats.org/drawingml/2006/main" xmlns:p="http://schemas.openxmlformats.org/presentationml/2006/main" xmlns:r="http://schemas.openxmlformats.org/officeDocument/2006/relationships">
+<p:sld xmlns:a="http://schemas.openxmlformats.org/drawingml/2006/main" xmlns:r="http://schemas.openxmlformats.org/officeDocument/2006/relationships" xmlns:p="http://schemas.openxmlformats.org/presentationml/2006/main">
   <p:cSld>
     <p:spTree>
       <p:nvGrpSpPr>
@@ -6462,7 +6563,14 @@
         <p:cNvGrpSpPr/>
         <p:nvPr/>
       </p:nvGrpSpPr>
-      <p:grpSpPr/>
+      <p:grpSpPr>
+        <a:xfrm>
+          <a:off x="0" y="0"/>
+          <a:ext cx="0" cy="0"/>
+          <a:chOff x="0" y="0"/>
+          <a:chExt cx="0" cy="0"/>
+        </a:xfrm>
+      </p:grpSpPr>
       <p:sp>
         <p:nvSpPr>
           <p:cNvPr id="2" name="Rectangle 1"/>
@@ -6504,6 +6612,7 @@
           <a:lstStyle/>
           <a:p>
             <a:pPr algn="ctr"/>
+            <a:endParaRPr/>
           </a:p>
         </p:txBody>
       </p:sp>
@@ -6632,6 +6741,7 @@
           <a:lstStyle/>
           <a:p>
             <a:pPr algn="ctr"/>
+            <a:endParaRPr/>
           </a:p>
         </p:txBody>
       </p:sp>
@@ -6676,6 +6786,7 @@
           <a:lstStyle/>
           <a:p>
             <a:pPr algn="ctr"/>
+            <a:endParaRPr/>
           </a:p>
         </p:txBody>
       </p:sp>
@@ -7041,75 +7152,7 @@
           <a:lstStyle/>
           <a:p>
             <a:pPr algn="ctr"/>
-          </a:p>
-        </p:txBody>
-      </p:sp>
-      <p:sp>
-        <p:nvSpPr>
-          <p:cNvPr id="13" name="TextBox 12"/>
-          <p:cNvSpPr txBox="1"/>
-          <p:nvPr/>
-        </p:nvSpPr>
-        <p:spPr>
-          <a:xfrm>
-            <a:off x="502920" y="6519672"/>
-            <a:ext cx="11155680" cy="310896"/>
-          </a:xfrm>
-          <a:prstGeom prst="rect">
-            <a:avLst/>
-          </a:prstGeom>
-          <a:noFill/>
-        </p:spPr>
-        <p:txBody>
-          <a:bodyPr wrap="square" anchor="ctr">
-            <a:spAutoFit/>
-          </a:bodyPr>
-          <a:lstStyle/>
-          <a:p>
-            <a:pPr algn="l">
-              <a:lnSpc>
-                <a:spcPct val="105000"/>
-              </a:lnSpc>
-              <a:spcAft>
-                <a:spcPts val="600"/>
-              </a:spcAft>
-            </a:pPr>
-            <a:r>
-              <a:rPr sz="1100" b="1">
-                <a:solidFill>
-                  <a:srgbClr val="0A1F6B"/>
-                </a:solidFill>
-                <a:latin typeface="Calibri"/>
-              </a:rPr>
-              <a:t>Rubric: </a:t>
-            </a:r>
-            <a:r>
-              <a:rPr sz="1100" b="0">
-                <a:solidFill>
-                  <a:srgbClr val="555555"/>
-                </a:solidFill>
-                <a:latin typeface="Calibri"/>
-              </a:rPr>
-              <a:t>Problem framing, agent goals and prompt (15 points)</a:t>
-            </a:r>
-            <a:r>
-              <a:rPr sz="1100" b="1">
-                <a:solidFill>
-                  <a:srgbClr val="0A1F6B"/>
-                </a:solidFill>
-                <a:latin typeface="Calibri"/>
-              </a:rPr>
-              <a:t>     |     Reference: </a:t>
-            </a:r>
-            <a:r>
-              <a:rPr sz="1100" b="0">
-                <a:solidFill>
-                  <a:srgbClr val="555555"/>
-                </a:solidFill>
-                <a:latin typeface="Calibri"/>
-              </a:rPr>
-              <a:t>Design handout, section 1</a:t>
-            </a:r>
+            <a:endParaRPr/>
           </a:p>
         </p:txBody>
       </p:sp>
@@ -7122,7 +7165,7 @@
 </file>
 
 <file path=ppt/slides/slide3.xml><?xml version="1.0" encoding="utf-8"?>
-<p:sld xmlns:a="http://schemas.openxmlformats.org/drawingml/2006/main" xmlns:p="http://schemas.openxmlformats.org/presentationml/2006/main" xmlns:r="http://schemas.openxmlformats.org/officeDocument/2006/relationships">
+<p:sld xmlns:a="http://schemas.openxmlformats.org/drawingml/2006/main" xmlns:r="http://schemas.openxmlformats.org/officeDocument/2006/relationships" xmlns:p="http://schemas.openxmlformats.org/presentationml/2006/main">
   <p:cSld>
     <p:spTree>
       <p:nvGrpSpPr>
@@ -7130,7 +7173,14 @@
         <p:cNvGrpSpPr/>
         <p:nvPr/>
       </p:nvGrpSpPr>
-      <p:grpSpPr/>
+      <p:grpSpPr>
+        <a:xfrm>
+          <a:off x="0" y="0"/>
+          <a:ext cx="0" cy="0"/>
+          <a:chOff x="0" y="0"/>
+          <a:chExt cx="0" cy="0"/>
+        </a:xfrm>
+      </p:grpSpPr>
       <p:sp>
         <p:nvSpPr>
           <p:cNvPr id="2" name="Rectangle 1"/>
@@ -7172,6 +7222,7 @@
           <a:lstStyle/>
           <a:p>
             <a:pPr algn="ctr"/>
+            <a:endParaRPr/>
           </a:p>
         </p:txBody>
       </p:sp>
@@ -7300,6 +7351,7 @@
           <a:lstStyle/>
           <a:p>
             <a:pPr algn="ctr"/>
+            <a:endParaRPr/>
           </a:p>
         </p:txBody>
       </p:sp>
@@ -7309,7 +7361,13 @@
           <p:cNvGraphicFramePr>
             <a:graphicFrameLocks noGrp="1"/>
           </p:cNvGraphicFramePr>
-          <p:nvPr/>
+          <p:nvPr>
+            <p:extLst>
+              <p:ext uri="{D42A27DB-BD31-4B8C-83A1-F6EECF244321}">
+                <p14:modId xmlns:p14="http://schemas.microsoft.com/office/powerpoint/2010/main" val="241943476"/>
+              </p:ext>
+            </p:extLst>
+          </p:nvPr>
         </p:nvGraphicFramePr>
         <p:xfrm>
           <a:off x="548640" y="1417320"/>
@@ -7322,15 +7380,47 @@
                 <a:tableStyleId>{5C22544A-7EE6-4342-B048-85BDC9FD1C3A}</a:tableStyleId>
               </a:tblPr>
               <a:tblGrid>
-                <a:gridCol w="2651760"/>
-                <a:gridCol w="8412480"/>
+                <a:gridCol w="2651760">
+                  <a:extLst>
+                    <a:ext uri="{9D8B030D-6E8A-4147-A177-3AD203B41FA5}">
+                      <a16:colId xmlns:a16="http://schemas.microsoft.com/office/drawing/2014/main" val="20000"/>
+                    </a:ext>
+                  </a:extLst>
+                </a:gridCol>
+                <a:gridCol w="8412480">
+                  <a:extLst>
+                    <a:ext uri="{9D8B030D-6E8A-4147-A177-3AD203B41FA5}">
+                      <a16:colId xmlns:a16="http://schemas.microsoft.com/office/drawing/2014/main" val="20001"/>
+                    </a:ext>
+                  </a:extLst>
+                </a:gridCol>
               </a:tblGrid>
               <a:tr h="685800">
                 <a:tc>
                   <a:txBody>
                     <a:bodyPr/>
                     <a:lstStyle/>
-                    <a:p/>
+                    <a:p>
+                      <a:r>
+                        <a:rPr lang="de-CH" sz="1200" b="1" kern="1200" dirty="0" err="1">
+                          <a:solidFill>
+                            <a:srgbClr val="FFFFFF"/>
+                          </a:solidFill>
+                          <a:latin typeface="Calibri"/>
+                          <a:ea typeface="+mn-ea"/>
+                          <a:cs typeface="+mn-cs"/>
+                        </a:rPr>
+                        <a:t>Aspect</a:t>
+                      </a:r>
+                      <a:endParaRPr sz="1200" b="1" kern="1200" dirty="0">
+                        <a:solidFill>
+                          <a:srgbClr val="FFFFFF"/>
+                        </a:solidFill>
+                        <a:latin typeface="Calibri"/>
+                        <a:ea typeface="+mn-ea"/>
+                        <a:cs typeface="+mn-cs"/>
+                      </a:endParaRPr>
+                    </a:p>
                   </a:txBody>
                   <a:tcPr>
                     <a:solidFill>
@@ -7344,7 +7434,7 @@
                     <a:lstStyle/>
                     <a:p>
                       <a:r>
-                        <a:rPr sz="1200" b="1">
+                        <a:rPr sz="1200" b="1" dirty="0">
                           <a:solidFill>
                             <a:srgbClr val="FFFFFF"/>
                           </a:solidFill>
@@ -7360,6 +7450,11 @@
                     </a:solidFill>
                   </a:tcPr>
                 </a:tc>
+                <a:extLst>
+                  <a:ext uri="{0D108BD9-81ED-4DB2-BD59-A6C34878D82A}">
+                    <a16:rowId xmlns:a16="http://schemas.microsoft.com/office/drawing/2014/main" val="10000"/>
+                  </a:ext>
+                </a:extLst>
               </a:tr>
               <a:tr h="685800">
                 <a:tc>
@@ -7368,14 +7463,20 @@
                     <a:lstStyle/>
                     <a:p>
                       <a:r>
-                        <a:rPr sz="1200">
+                        <a:rPr lang="de-CH" sz="1200" dirty="0">
                           <a:solidFill>
                             <a:srgbClr val="1A1A2E"/>
                           </a:solidFill>
                           <a:latin typeface="Calibri"/>
                         </a:rPr>
-                        <a:t>What wakes it up</a:t>
+                        <a:t>Triggers</a:t>
                       </a:r>
+                      <a:endParaRPr sz="1200" dirty="0">
+                        <a:solidFill>
+                          <a:srgbClr val="1A1A2E"/>
+                        </a:solidFill>
+                        <a:latin typeface="Calibri"/>
+                      </a:endParaRPr>
                     </a:p>
                   </a:txBody>
                   <a:tcPr>
@@ -7406,6 +7507,11 @@
                     </a:solidFill>
                   </a:tcPr>
                 </a:tc>
+                <a:extLst>
+                  <a:ext uri="{0D108BD9-81ED-4DB2-BD59-A6C34878D82A}">
+                    <a16:rowId xmlns:a16="http://schemas.microsoft.com/office/drawing/2014/main" val="10001"/>
+                  </a:ext>
+                </a:extLst>
               </a:tr>
               <a:tr h="685800">
                 <a:tc>
@@ -7414,14 +7520,29 @@
                     <a:lstStyle/>
                     <a:p>
                       <a:r>
-                        <a:rPr sz="1200">
+                        <a:rPr lang="de-CH" sz="1200" dirty="0">
                           <a:solidFill>
                             <a:srgbClr val="1A1A2E"/>
                           </a:solidFill>
                           <a:latin typeface="Calibri"/>
                         </a:rPr>
-                        <a:t>What it reads</a:t>
+                        <a:t>Input </a:t>
                       </a:r>
+                      <a:r>
+                        <a:rPr lang="de-CH" sz="1200" dirty="0" err="1">
+                          <a:solidFill>
+                            <a:srgbClr val="1A1A2E"/>
+                          </a:solidFill>
+                          <a:latin typeface="Calibri"/>
+                        </a:rPr>
+                        <a:t>data</a:t>
+                      </a:r>
+                      <a:endParaRPr sz="1200" dirty="0">
+                        <a:solidFill>
+                          <a:srgbClr val="1A1A2E"/>
+                        </a:solidFill>
+                        <a:latin typeface="Calibri"/>
+                      </a:endParaRPr>
                     </a:p>
                   </a:txBody>
                   <a:tcPr>
@@ -7436,7 +7557,7 @@
                     <a:lstStyle/>
                     <a:p>
                       <a:r>
-                        <a:rPr sz="1200">
+                        <a:rPr sz="1200" dirty="0">
                           <a:solidFill>
                             <a:srgbClr val="1A1A2E"/>
                           </a:solidFill>
@@ -7452,6 +7573,11 @@
                     </a:solidFill>
                   </a:tcPr>
                 </a:tc>
+                <a:extLst>
+                  <a:ext uri="{0D108BD9-81ED-4DB2-BD59-A6C34878D82A}">
+                    <a16:rowId xmlns:a16="http://schemas.microsoft.com/office/drawing/2014/main" val="10002"/>
+                  </a:ext>
+                </a:extLst>
               </a:tr>
               <a:tr h="685800">
                 <a:tc>
@@ -7460,14 +7586,20 @@
                     <a:lstStyle/>
                     <a:p>
                       <a:r>
-                        <a:rPr sz="1200">
+                        <a:rPr lang="de-CH" sz="1200" dirty="0">
                           <a:solidFill>
                             <a:srgbClr val="1A1A2E"/>
                           </a:solidFill>
                           <a:latin typeface="Calibri"/>
                         </a:rPr>
-                        <a:t>What moves and what stays steady</a:t>
+                        <a:t>Dynamic vs. Static</a:t>
                       </a:r>
+                      <a:endParaRPr sz="1200" dirty="0">
+                        <a:solidFill>
+                          <a:srgbClr val="1A1A2E"/>
+                        </a:solidFill>
+                        <a:latin typeface="Calibri"/>
+                      </a:endParaRPr>
                     </a:p>
                   </a:txBody>
                   <a:tcPr>
@@ -7482,14 +7614,29 @@
                     <a:lstStyle/>
                     <a:p>
                       <a:r>
-                        <a:rPr sz="1200">
+                        <a:rPr sz="1200" dirty="0">
                           <a:solidFill>
                             <a:srgbClr val="1A1A2E"/>
                           </a:solidFill>
                           <a:latin typeface="Calibri"/>
                         </a:rPr>
-                        <a:t>Always moving: shipment status, arrival dates, stock levels, events and prices. Mostly steady: the supplier map, the parts list, our approved suppliers and our approval rules.</a:t>
+                        <a:t>Always moving: shipment status, arrival dates, stock levels, events and prices. Mostly steady: the supplier map, the parts list, our </a:t>
                       </a:r>
+                      <a:r>
+                        <a:rPr lang="en-GB" sz="1200" dirty="0">
+                          <a:solidFill>
+                            <a:srgbClr val="1A1A2E"/>
+                          </a:solidFill>
+                          <a:latin typeface="+mn-lt"/>
+                        </a:rPr>
+                        <a:t>qualified suppliers, approval policy</a:t>
+                      </a:r>
+                      <a:endParaRPr sz="1200" dirty="0">
+                        <a:solidFill>
+                          <a:srgbClr val="1A1A2E"/>
+                        </a:solidFill>
+                        <a:latin typeface="Calibri"/>
+                      </a:endParaRPr>
                     </a:p>
                   </a:txBody>
                   <a:tcPr>
@@ -7498,6 +7645,11 @@
                     </a:solidFill>
                   </a:tcPr>
                 </a:tc>
+                <a:extLst>
+                  <a:ext uri="{0D108BD9-81ED-4DB2-BD59-A6C34878D82A}">
+                    <a16:rowId xmlns:a16="http://schemas.microsoft.com/office/drawing/2014/main" val="10003"/>
+                  </a:ext>
+                </a:extLst>
               </a:tr>
             </a:tbl>
           </a:graphicData>
@@ -7512,7 +7664,7 @@
         <p:spPr>
           <a:xfrm>
             <a:off x="548640" y="4297680"/>
-            <a:ext cx="11064240" cy="365760"/>
+            <a:ext cx="11064240" cy="324897"/>
           </a:xfrm>
           <a:prstGeom prst="rect">
             <a:avLst/>
@@ -7534,14 +7686,38 @@
               </a:spcAft>
             </a:pPr>
             <a:r>
-              <a:rPr sz="1500" b="1">
+              <a:rPr lang="de-CH" sz="1500" b="1" dirty="0">
                 <a:solidFill>
                   <a:srgbClr val="0A1F6B"/>
                 </a:solidFill>
                 <a:latin typeface="Calibri"/>
               </a:rPr>
-              <a:t>The four kinds of memory it draws on</a:t>
-            </a:r>
+              <a:t>Memory </a:t>
+            </a:r>
+            <a:r>
+              <a:rPr lang="de-CH" sz="1500" b="1" dirty="0" err="1">
+                <a:solidFill>
+                  <a:srgbClr val="0A1F6B"/>
+                </a:solidFill>
+                <a:latin typeface="Calibri"/>
+              </a:rPr>
+              <a:t>model</a:t>
+            </a:r>
+            <a:r>
+              <a:rPr lang="de-CH" sz="1500" b="1" dirty="0">
+                <a:solidFill>
+                  <a:srgbClr val="0A1F6B"/>
+                </a:solidFill>
+                <a:latin typeface="Calibri"/>
+              </a:rPr>
+              <a:t>:</a:t>
+            </a:r>
+            <a:endParaRPr sz="1500" b="1" dirty="0">
+              <a:solidFill>
+                <a:srgbClr val="0A1F6B"/>
+              </a:solidFill>
+              <a:latin typeface="Calibri"/>
+            </a:endParaRPr>
           </a:p>
         </p:txBody>
       </p:sp>
@@ -7551,7 +7727,13 @@
           <p:cNvGraphicFramePr>
             <a:graphicFrameLocks noGrp="1"/>
           </p:cNvGraphicFramePr>
-          <p:nvPr/>
+          <p:nvPr>
+            <p:extLst>
+              <p:ext uri="{D42A27DB-BD31-4B8C-83A1-F6EECF244321}">
+                <p14:modId xmlns:p14="http://schemas.microsoft.com/office/powerpoint/2010/main" val="11064470"/>
+              </p:ext>
+            </p:extLst>
+          </p:nvPr>
         </p:nvGraphicFramePr>
         <p:xfrm>
           <a:off x="548640" y="4663440"/>
@@ -7564,10 +7746,34 @@
                 <a:tableStyleId>{5C22544A-7EE6-4342-B048-85BDC9FD1C3A}</a:tableStyleId>
               </a:tblPr>
               <a:tblGrid>
-                <a:gridCol w="2651760"/>
-                <a:gridCol w="3017520"/>
-                <a:gridCol w="2743200"/>
-                <a:gridCol w="2651760"/>
+                <a:gridCol w="2651760">
+                  <a:extLst>
+                    <a:ext uri="{9D8B030D-6E8A-4147-A177-3AD203B41FA5}">
+                      <a16:colId xmlns:a16="http://schemas.microsoft.com/office/drawing/2014/main" val="20000"/>
+                    </a:ext>
+                  </a:extLst>
+                </a:gridCol>
+                <a:gridCol w="3017520">
+                  <a:extLst>
+                    <a:ext uri="{9D8B030D-6E8A-4147-A177-3AD203B41FA5}">
+                      <a16:colId xmlns:a16="http://schemas.microsoft.com/office/drawing/2014/main" val="20001"/>
+                    </a:ext>
+                  </a:extLst>
+                </a:gridCol>
+                <a:gridCol w="2743200">
+                  <a:extLst>
+                    <a:ext uri="{9D8B030D-6E8A-4147-A177-3AD203B41FA5}">
+                      <a16:colId xmlns:a16="http://schemas.microsoft.com/office/drawing/2014/main" val="20002"/>
+                    </a:ext>
+                  </a:extLst>
+                </a:gridCol>
+                <a:gridCol w="2651760">
+                  <a:extLst>
+                    <a:ext uri="{9D8B030D-6E8A-4147-A177-3AD203B41FA5}">
+                      <a16:colId xmlns:a16="http://schemas.microsoft.com/office/drawing/2014/main" val="20003"/>
+                    </a:ext>
+                  </a:extLst>
+                </a:gridCol>
               </a:tblGrid>
               <a:tr h="777240">
                 <a:tc>
@@ -7576,14 +7782,29 @@
                     <a:lstStyle/>
                     <a:p>
                       <a:r>
-                        <a:rPr sz="1100" b="1">
+                        <a:rPr lang="de-CH" sz="1100" b="1" dirty="0">
                           <a:solidFill>
                             <a:srgbClr val="FFFFFF"/>
                           </a:solidFill>
                           <a:latin typeface="Calibri"/>
                         </a:rPr>
-                        <a:t>Working memory</a:t>
+                        <a:t>In-</a:t>
                       </a:r>
+                      <a:r>
+                        <a:rPr lang="de-CH" sz="1100" b="1" dirty="0" err="1">
+                          <a:solidFill>
+                            <a:srgbClr val="FFFFFF"/>
+                          </a:solidFill>
+                          <a:latin typeface="Calibri"/>
+                        </a:rPr>
+                        <a:t>context</a:t>
+                      </a:r>
+                      <a:endParaRPr sz="1100" b="1" dirty="0">
+                        <a:solidFill>
+                          <a:srgbClr val="FFFFFF"/>
+                        </a:solidFill>
+                        <a:latin typeface="Calibri"/>
+                      </a:endParaRPr>
                     </a:p>
                   </a:txBody>
                   <a:tcPr>
@@ -7598,14 +7819,20 @@
                     <a:lstStyle/>
                     <a:p>
                       <a:r>
-                        <a:rPr sz="1100" b="1">
+                        <a:rPr lang="de-CH" sz="1100" b="1" dirty="0">
                           <a:solidFill>
                             <a:srgbClr val="FFFFFF"/>
                           </a:solidFill>
                           <a:latin typeface="Calibri"/>
                         </a:rPr>
-                        <a:t>Reference knowledge</a:t>
+                        <a:t>External (RAG)</a:t>
                       </a:r>
+                      <a:endParaRPr sz="1100" b="1" dirty="0">
+                        <a:solidFill>
+                          <a:srgbClr val="FFFFFF"/>
+                        </a:solidFill>
+                        <a:latin typeface="Calibri"/>
+                      </a:endParaRPr>
                     </a:p>
                   </a:txBody>
                   <a:tcPr>
@@ -7620,14 +7847,20 @@
                     <a:lstStyle/>
                     <a:p>
                       <a:r>
-                        <a:rPr sz="1100" b="1">
+                        <a:rPr lang="de-CH" sz="1100" b="1" dirty="0" err="1">
                           <a:solidFill>
                             <a:srgbClr val="FFFFFF"/>
                           </a:solidFill>
                           <a:latin typeface="Calibri"/>
                         </a:rPr>
-                        <a:t>Past experience</a:t>
+                        <a:t>Episodic</a:t>
                       </a:r>
+                      <a:endParaRPr sz="1100" b="1" dirty="0">
+                        <a:solidFill>
+                          <a:srgbClr val="FFFFFF"/>
+                        </a:solidFill>
+                        <a:latin typeface="Calibri"/>
+                      </a:endParaRPr>
                     </a:p>
                   </a:txBody>
                   <a:tcPr>
@@ -7642,14 +7875,20 @@
                     <a:lstStyle/>
                     <a:p>
                       <a:r>
-                        <a:rPr sz="1100" b="1">
+                        <a:rPr lang="de-CH" sz="1100" b="1" dirty="0" err="1">
                           <a:solidFill>
                             <a:srgbClr val="FFFFFF"/>
                           </a:solidFill>
                           <a:latin typeface="Calibri"/>
                         </a:rPr>
-                        <a:t>General know-how</a:t>
+                        <a:t>Semantic</a:t>
                       </a:r>
+                      <a:endParaRPr sz="1100" b="1" dirty="0">
+                        <a:solidFill>
+                          <a:srgbClr val="FFFFFF"/>
+                        </a:solidFill>
+                        <a:latin typeface="Calibri"/>
+                      </a:endParaRPr>
                     </a:p>
                   </a:txBody>
                   <a:tcPr>
@@ -7658,6 +7897,11 @@
                     </a:solidFill>
                   </a:tcPr>
                 </a:tc>
+                <a:extLst>
+                  <a:ext uri="{0D108BD9-81ED-4DB2-BD59-A6C34878D82A}">
+                    <a16:rowId xmlns:a16="http://schemas.microsoft.com/office/drawing/2014/main" val="10000"/>
+                  </a:ext>
+                </a:extLst>
               </a:tr>
               <a:tr h="777240">
                 <a:tc>
@@ -7688,7 +7932,7 @@
                     <a:lstStyle/>
                     <a:p>
                       <a:r>
-                        <a:rPr sz="1100">
+                        <a:rPr sz="1100" dirty="0">
                           <a:solidFill>
                             <a:srgbClr val="1A1A2E"/>
                           </a:solidFill>
@@ -7710,13 +7954,22 @@
                     <a:lstStyle/>
                     <a:p>
                       <a:r>
-                        <a:rPr sz="1100">
+                        <a:rPr lang="de-CH" sz="1100" dirty="0">
                           <a:solidFill>
                             <a:srgbClr val="1A1A2E"/>
                           </a:solidFill>
                           <a:latin typeface="Calibri"/>
                         </a:rPr>
-                        <a:t>Earlier disruptions and the fixes that worked</a:t>
+                        <a:t>Past</a:t>
+                      </a:r>
+                      <a:r>
+                        <a:rPr sz="1100" dirty="0">
+                          <a:solidFill>
+                            <a:srgbClr val="1A1A2E"/>
+                          </a:solidFill>
+                          <a:latin typeface="Calibri"/>
+                        </a:rPr>
+                        <a:t> disruptions and the fixes that worked</a:t>
                       </a:r>
                     </a:p>
                   </a:txBody>
@@ -7732,14 +7985,29 @@
                     <a:lstStyle/>
                     <a:p>
                       <a:r>
-                        <a:rPr sz="1100">
+                        <a:rPr sz="1100" dirty="0">
                           <a:solidFill>
                             <a:srgbClr val="1A1A2E"/>
                           </a:solidFill>
                           <a:latin typeface="Calibri"/>
                         </a:rPr>
-                        <a:t>Rules of thumb and domain knowledge</a:t>
+                        <a:t>Rules of thumb and domain </a:t>
                       </a:r>
+                      <a:r>
+                        <a:rPr lang="en-GB" sz="1100" dirty="0">
+                          <a:solidFill>
+                            <a:srgbClr val="1A1A2E"/>
+                          </a:solidFill>
+                          <a:latin typeface="Calibri"/>
+                        </a:rPr>
+                        <a:t>knowledge</a:t>
+                      </a:r>
+                      <a:endParaRPr sz="1100" dirty="0">
+                        <a:solidFill>
+                          <a:srgbClr val="1A1A2E"/>
+                        </a:solidFill>
+                        <a:latin typeface="Calibri"/>
+                      </a:endParaRPr>
                     </a:p>
                   </a:txBody>
                   <a:tcPr>
@@ -7748,6 +8016,11 @@
                     </a:solidFill>
                   </a:tcPr>
                 </a:tc>
+                <a:extLst>
+                  <a:ext uri="{0D108BD9-81ED-4DB2-BD59-A6C34878D82A}">
+                    <a16:rowId xmlns:a16="http://schemas.microsoft.com/office/drawing/2014/main" val="10001"/>
+                  </a:ext>
+                </a:extLst>
               </a:tr>
             </a:tbl>
           </a:graphicData>
@@ -7794,75 +8067,7 @@
           <a:lstStyle/>
           <a:p>
             <a:pPr algn="ctr"/>
-          </a:p>
-        </p:txBody>
-      </p:sp>
-      <p:sp>
-        <p:nvSpPr>
-          <p:cNvPr id="10" name="TextBox 9"/>
-          <p:cNvSpPr txBox="1"/>
-          <p:nvPr/>
-        </p:nvSpPr>
-        <p:spPr>
-          <a:xfrm>
-            <a:off x="502920" y="6519672"/>
-            <a:ext cx="11155680" cy="310896"/>
-          </a:xfrm>
-          <a:prstGeom prst="rect">
-            <a:avLst/>
-          </a:prstGeom>
-          <a:noFill/>
-        </p:spPr>
-        <p:txBody>
-          <a:bodyPr wrap="square" anchor="ctr">
-            <a:spAutoFit/>
-          </a:bodyPr>
-          <a:lstStyle/>
-          <a:p>
-            <a:pPr algn="l">
-              <a:lnSpc>
-                <a:spcPct val="105000"/>
-              </a:lnSpc>
-              <a:spcAft>
-                <a:spcPts val="600"/>
-              </a:spcAft>
-            </a:pPr>
-            <a:r>
-              <a:rPr sz="1100" b="1">
-                <a:solidFill>
-                  <a:srgbClr val="0A1F6B"/>
-                </a:solidFill>
-                <a:latin typeface="Calibri"/>
-              </a:rPr>
-              <a:t>Rubric: </a:t>
-            </a:r>
-            <a:r>
-              <a:rPr sz="1100" b="0">
-                <a:solidFill>
-                  <a:srgbClr val="555555"/>
-                </a:solidFill>
-                <a:latin typeface="Calibri"/>
-              </a:rPr>
-              <a:t>Problem framing (15 points) and architecture (10 points)</a:t>
-            </a:r>
-            <a:r>
-              <a:rPr sz="1100" b="1">
-                <a:solidFill>
-                  <a:srgbClr val="0A1F6B"/>
-                </a:solidFill>
-                <a:latin typeface="Calibri"/>
-              </a:rPr>
-              <a:t>     |     Reference: </a:t>
-            </a:r>
-            <a:r>
-              <a:rPr sz="1100" b="0">
-                <a:solidFill>
-                  <a:srgbClr val="555555"/>
-                </a:solidFill>
-                <a:latin typeface="Calibri"/>
-              </a:rPr>
-              <a:t>Design handout, section 2</a:t>
-            </a:r>
+            <a:endParaRPr/>
           </a:p>
         </p:txBody>
       </p:sp>
@@ -7875,7 +8080,7 @@
 </file>
 
 <file path=ppt/slides/slide4.xml><?xml version="1.0" encoding="utf-8"?>
-<p:sld xmlns:a="http://schemas.openxmlformats.org/drawingml/2006/main" xmlns:p="http://schemas.openxmlformats.org/presentationml/2006/main" xmlns:r="http://schemas.openxmlformats.org/officeDocument/2006/relationships">
+<p:sld xmlns:a="http://schemas.openxmlformats.org/drawingml/2006/main" xmlns:r="http://schemas.openxmlformats.org/officeDocument/2006/relationships" xmlns:p="http://schemas.openxmlformats.org/presentationml/2006/main">
   <p:cSld>
     <p:spTree>
       <p:nvGrpSpPr>
@@ -7883,7 +8088,14 @@
         <p:cNvGrpSpPr/>
         <p:nvPr/>
       </p:nvGrpSpPr>
-      <p:grpSpPr/>
+      <p:grpSpPr>
+        <a:xfrm>
+          <a:off x="0" y="0"/>
+          <a:ext cx="0" cy="0"/>
+          <a:chOff x="0" y="0"/>
+          <a:chExt cx="0" cy="0"/>
+        </a:xfrm>
+      </p:grpSpPr>
       <p:sp>
         <p:nvSpPr>
           <p:cNvPr id="2" name="Rectangle 1"/>
@@ -7925,6 +8137,7 @@
           <a:lstStyle/>
           <a:p>
             <a:pPr algn="ctr"/>
+            <a:endParaRPr/>
           </a:p>
         </p:txBody>
       </p:sp>
@@ -8053,6 +8266,7 @@
           <a:lstStyle/>
           <a:p>
             <a:pPr algn="ctr"/>
+            <a:endParaRPr/>
           </a:p>
         </p:txBody>
       </p:sp>
@@ -8097,6 +8311,7 @@
           <a:lstStyle/>
           <a:p>
             <a:pPr algn="ctr"/>
+            <a:endParaRPr/>
           </a:p>
         </p:txBody>
       </p:sp>
@@ -8108,8 +8323,8 @@
         </p:nvSpPr>
         <p:spPr>
           <a:xfrm>
-            <a:off x="658368" y="1481328"/>
-            <a:ext cx="2148840" cy="777240"/>
+            <a:off x="658368" y="1518088"/>
+            <a:ext cx="2148840" cy="703719"/>
           </a:xfrm>
           <a:prstGeom prst="rect">
             <a:avLst/>
@@ -8131,7 +8346,7 @@
               </a:spcAft>
             </a:pPr>
             <a:r>
-              <a:rPr sz="1250" b="1">
+              <a:rPr sz="1250" b="1" dirty="0">
                 <a:solidFill>
                   <a:srgbClr val="0A1F6B"/>
                 </a:solidFill>
@@ -8150,14 +8365,29 @@
               </a:spcAft>
             </a:pPr>
             <a:r>
-              <a:rPr sz="1050" b="0">
+              <a:rPr sz="1050" b="0" dirty="0">
                 <a:solidFill>
                   <a:srgbClr val="555555"/>
                 </a:solidFill>
                 <a:latin typeface="Calibri"/>
               </a:rPr>
-              <a:t>an alert, a regular check, or a planner's question</a:t>
-            </a:r>
+              <a:t>an alert, a regular check, or a planner’s </a:t>
+            </a:r>
+            <a:r>
+              <a:rPr lang="de-CH" sz="1050" b="0" dirty="0" err="1">
+                <a:solidFill>
+                  <a:srgbClr val="555555"/>
+                </a:solidFill>
+                <a:latin typeface="Calibri"/>
+              </a:rPr>
+              <a:t>query</a:t>
+            </a:r>
+            <a:endParaRPr sz="1050" b="0" dirty="0">
+              <a:solidFill>
+                <a:srgbClr val="555555"/>
+              </a:solidFill>
+              <a:latin typeface="Calibri"/>
+            </a:endParaRPr>
           </a:p>
         </p:txBody>
       </p:sp>
@@ -8202,6 +8432,7 @@
           <a:lstStyle/>
           <a:p>
             <a:pPr algn="ctr"/>
+            <a:endParaRPr/>
           </a:p>
         </p:txBody>
       </p:sp>
@@ -8213,8 +8444,8 @@
         </p:nvSpPr>
         <p:spPr>
           <a:xfrm>
-            <a:off x="3291840" y="1481328"/>
-            <a:ext cx="8229600" cy="777240"/>
+            <a:off x="3291840" y="1578874"/>
+            <a:ext cx="8229600" cy="582147"/>
           </a:xfrm>
           <a:prstGeom prst="rect">
             <a:avLst/>
@@ -8236,7 +8467,7 @@
               </a:spcAft>
             </a:pPr>
             <a:r>
-              <a:rPr sz="1500" b="1">
+              <a:rPr sz="1500" b="1" dirty="0">
                 <a:solidFill>
                   <a:srgbClr val="FFFFFF"/>
                 </a:solidFill>
@@ -8255,13 +8486,12 @@
               </a:spcAft>
             </a:pPr>
             <a:r>
-              <a:rPr sz="1100" b="0">
+              <a:rPr lang="en-GB" sz="1100" dirty="0">
                 <a:solidFill>
                   <a:srgbClr val="CFDAF0"/>
                 </a:solidFill>
-                <a:latin typeface="Calibri"/>
-              </a:rPr>
-              <a:t>sets the goal, decides who works on what, and writes the final briefing; it never touches the data tools itself</a:t>
+              </a:rPr>
+              <a:t>owns the objective, routes work, synthesizes the briefing; does NOT call data tools directly</a:t>
             </a:r>
           </a:p>
         </p:txBody>
@@ -8275,7 +8505,7 @@
         <p:spPr>
           <a:xfrm>
             <a:off x="3154680" y="2331720"/>
-            <a:ext cx="8458200" cy="274320"/>
+            <a:ext cx="8458200" cy="262892"/>
           </a:xfrm>
           <a:prstGeom prst="rect">
             <a:avLst/>
@@ -8297,7 +8527,7 @@
               </a:spcAft>
             </a:pPr>
             <a:r>
-              <a:rPr sz="1100" b="1">
+              <a:rPr sz="1100" b="1" dirty="0">
                 <a:solidFill>
                   <a:srgbClr val="0E7C86"/>
                 </a:solidFill>
@@ -8305,6 +8535,37 @@
               </a:rPr>
               <a:t>Shared notes pass between the agents, and each one runs its own reason-and-act loop</a:t>
             </a:r>
+            <a:r>
+              <a:rPr lang="de-CH" sz="1100" b="1" dirty="0">
+                <a:solidFill>
+                  <a:srgbClr val="0E7C86"/>
+                </a:solidFill>
+                <a:latin typeface="Calibri"/>
+              </a:rPr>
+              <a:t> (</a:t>
+            </a:r>
+            <a:r>
+              <a:rPr lang="en-GB" sz="1100" b="1" dirty="0">
+                <a:solidFill>
+                  <a:srgbClr val="0E7C86"/>
+                </a:solidFill>
+              </a:rPr>
+              <a:t>A2A shared context</a:t>
+            </a:r>
+            <a:r>
+              <a:rPr lang="en-GB" sz="1100" b="1" dirty="0">
+                <a:solidFill>
+                  <a:srgbClr val="0E7C86"/>
+                </a:solidFill>
+                <a:latin typeface="Calibri"/>
+              </a:rPr>
+              <a:t>)</a:t>
+            </a:r>
+            <a:endParaRPr lang="en-GB" sz="1100" b="1" dirty="0">
+              <a:solidFill>
+                <a:srgbClr val="0E7C86"/>
+              </a:solidFill>
+            </a:endParaRPr>
           </a:p>
         </p:txBody>
       </p:sp>
@@ -8349,6 +8610,7 @@
           <a:lstStyle/>
           <a:p>
             <a:pPr algn="ctr"/>
+            <a:endParaRPr/>
           </a:p>
         </p:txBody>
       </p:sp>
@@ -8454,6 +8716,7 @@
           <a:lstStyle/>
           <a:p>
             <a:pPr algn="ctr"/>
+            <a:endParaRPr/>
           </a:p>
         </p:txBody>
       </p:sp>
@@ -8488,7 +8751,7 @@
               </a:spcAft>
             </a:pPr>
             <a:r>
-              <a:rPr sz="1300" b="1">
+              <a:rPr sz="1300" b="1" dirty="0">
                 <a:solidFill>
                   <a:srgbClr val="FFFFFF"/>
                 </a:solidFill>
@@ -8507,7 +8770,7 @@
               </a:spcAft>
             </a:pPr>
             <a:r>
-              <a:rPr sz="1050" b="0">
+              <a:rPr sz="1050" b="0" dirty="0">
                 <a:solidFill>
                   <a:srgbClr val="CFDAF0"/>
                 </a:solidFill>
@@ -8559,6 +8822,7 @@
           <a:lstStyle/>
           <a:p>
             <a:pPr algn="ctr"/>
+            <a:endParaRPr/>
           </a:p>
         </p:txBody>
       </p:sp>
@@ -8664,6 +8928,7 @@
           <a:lstStyle/>
           <a:p>
             <a:pPr algn="ctr"/>
+            <a:endParaRPr/>
           </a:p>
         </p:txBody>
       </p:sp>
@@ -8675,8 +8940,8 @@
         </p:nvSpPr>
         <p:spPr>
           <a:xfrm>
-            <a:off x="8988552" y="2743200"/>
-            <a:ext cx="2606040" cy="868680"/>
+            <a:off x="8988552" y="2906472"/>
+            <a:ext cx="2606040" cy="542136"/>
           </a:xfrm>
           <a:prstGeom prst="rect">
             <a:avLst/>
@@ -8698,7 +8963,7 @@
               </a:spcAft>
             </a:pPr>
             <a:r>
-              <a:rPr sz="1300" b="1">
+              <a:rPr sz="1300" b="1" dirty="0">
                 <a:solidFill>
                   <a:srgbClr val="FFFFFF"/>
                 </a:solidFill>
@@ -8717,14 +8982,29 @@
               </a:spcAft>
             </a:pPr>
             <a:r>
-              <a:rPr sz="1050" b="0">
+              <a:rPr lang="de-CH" sz="1050" dirty="0">
                 <a:solidFill>
                   <a:srgbClr val="CFDAF0"/>
                 </a:solidFill>
                 <a:latin typeface="Calibri"/>
               </a:rPr>
-              <a:t>plans and takes action</a:t>
-            </a:r>
+              <a:t>Score, plan &amp; </a:t>
+            </a:r>
+            <a:r>
+              <a:rPr lang="de-CH" sz="1050" dirty="0" err="1">
+                <a:solidFill>
+                  <a:srgbClr val="CFDAF0"/>
+                </a:solidFill>
+                <a:latin typeface="Calibri"/>
+              </a:rPr>
+              <a:t>act</a:t>
+            </a:r>
+            <a:endParaRPr sz="1050" b="0" dirty="0">
+              <a:solidFill>
+                <a:srgbClr val="CFDAF0"/>
+              </a:solidFill>
+              <a:latin typeface="Calibri"/>
+            </a:endParaRPr>
           </a:p>
         </p:txBody>
       </p:sp>
@@ -8769,6 +9049,7 @@
           <a:lstStyle/>
           <a:p>
             <a:pPr algn="ctr"/>
+            <a:endParaRPr/>
           </a:p>
         </p:txBody>
       </p:sp>
@@ -8780,8 +9061,8 @@
         </p:nvSpPr>
         <p:spPr>
           <a:xfrm>
-            <a:off x="640080" y="3840480"/>
-            <a:ext cx="10881360" cy="384048"/>
+            <a:off x="640080" y="3893299"/>
+            <a:ext cx="10881360" cy="278410"/>
           </a:xfrm>
           <a:prstGeom prst="rect">
             <a:avLst/>
@@ -8803,13 +9084,12 @@
               </a:spcAft>
             </a:pPr>
             <a:r>
-              <a:rPr sz="1200" b="1">
+              <a:rPr lang="en-GB" sz="1200" b="1" dirty="0">
                 <a:solidFill>
                   <a:srgbClr val="FFFFFF"/>
                 </a:solidFill>
-                <a:latin typeface="Calibri"/>
-              </a:rPr>
-              <a:t>The tools each specialist can call (a star marks an action that needs human approval)</a:t>
+              </a:rPr>
+              <a:t>MCP tool layer  (* = requires human approval)</a:t>
             </a:r>
           </a:p>
         </p:txBody>
@@ -9137,6 +9417,7 @@
           <a:lstStyle/>
           <a:p>
             <a:pPr algn="ctr"/>
+            <a:endParaRPr/>
           </a:p>
         </p:txBody>
       </p:sp>
@@ -9148,8 +9429,8 @@
         </p:nvSpPr>
         <p:spPr>
           <a:xfrm>
-            <a:off x="640080" y="5486400"/>
-            <a:ext cx="10881360" cy="457200"/>
+            <a:off x="640080" y="5579674"/>
+            <a:ext cx="10881360" cy="270652"/>
           </a:xfrm>
           <a:prstGeom prst="rect">
             <a:avLst/>
@@ -9171,13 +9452,31 @@
               </a:spcAft>
             </a:pPr>
             <a:r>
-              <a:rPr sz="1150" b="1">
+              <a:rPr sz="1150" b="1" dirty="0">
                 <a:solidFill>
                   <a:srgbClr val="0A1F6B"/>
                 </a:solidFill>
                 <a:latin typeface="Calibri"/>
               </a:rPr>
-              <a:t>Connects to our real systems: the planning system, transport and shipping data, factory-floor controls, the manufacturing system, and news and weather feeds.</a:t>
+              <a:t>Connects to our real systems: </a:t>
+            </a:r>
+            <a:r>
+              <a:rPr lang="de-CH" sz="1150" b="1" dirty="0">
+                <a:solidFill>
+                  <a:srgbClr val="0A1F6B"/>
+                </a:solidFill>
+                <a:latin typeface="Calibri"/>
+              </a:rPr>
+              <a:t>ERP</a:t>
+            </a:r>
+            <a:r>
+              <a:rPr sz="1150" b="1" dirty="0">
+                <a:solidFill>
+                  <a:srgbClr val="0A1F6B"/>
+                </a:solidFill>
+                <a:latin typeface="Calibri"/>
+              </a:rPr>
+              <a:t>, transport and shipping data, factory-floor controls, the manufacturing system, and news and weather feeds.</a:t>
             </a:r>
           </a:p>
         </p:txBody>
@@ -9223,75 +9522,7 @@
           <a:lstStyle/>
           <a:p>
             <a:pPr algn="ctr"/>
-          </a:p>
-        </p:txBody>
-      </p:sp>
-      <p:sp>
-        <p:nvSpPr>
-          <p:cNvPr id="28" name="TextBox 27"/>
-          <p:cNvSpPr txBox="1"/>
-          <p:nvPr/>
-        </p:nvSpPr>
-        <p:spPr>
-          <a:xfrm>
-            <a:off x="502920" y="6519672"/>
-            <a:ext cx="11155680" cy="310896"/>
-          </a:xfrm>
-          <a:prstGeom prst="rect">
-            <a:avLst/>
-          </a:prstGeom>
-          <a:noFill/>
-        </p:spPr>
-        <p:txBody>
-          <a:bodyPr wrap="square" anchor="ctr">
-            <a:spAutoFit/>
-          </a:bodyPr>
-          <a:lstStyle/>
-          <a:p>
-            <a:pPr algn="l">
-              <a:lnSpc>
-                <a:spcPct val="105000"/>
-              </a:lnSpc>
-              <a:spcAft>
-                <a:spcPts val="600"/>
-              </a:spcAft>
-            </a:pPr>
-            <a:r>
-              <a:rPr sz="1100" b="1">
-                <a:solidFill>
-                  <a:srgbClr val="0A1F6B"/>
-                </a:solidFill>
-                <a:latin typeface="Calibri"/>
-              </a:rPr>
-              <a:t>Rubric: </a:t>
-            </a:r>
-            <a:r>
-              <a:rPr sz="1100" b="0">
-                <a:solidFill>
-                  <a:srgbClr val="555555"/>
-                </a:solidFill>
-                <a:latin typeface="Calibri"/>
-              </a:rPr>
-              <a:t>Agentic system architecture (10 points)</a:t>
-            </a:r>
-            <a:r>
-              <a:rPr sz="1100" b="1">
-                <a:solidFill>
-                  <a:srgbClr val="0A1F6B"/>
-                </a:solidFill>
-                <a:latin typeface="Calibri"/>
-              </a:rPr>
-              <a:t>     |     Reference: </a:t>
-            </a:r>
-            <a:r>
-              <a:rPr sz="1100" b="0">
-                <a:solidFill>
-                  <a:srgbClr val="555555"/>
-                </a:solidFill>
-                <a:latin typeface="Calibri"/>
-              </a:rPr>
-              <a:t>Design handout, section 5</a:t>
-            </a:r>
+            <a:endParaRPr/>
           </a:p>
         </p:txBody>
       </p:sp>
@@ -9304,7 +9535,7 @@
 </file>
 
 <file path=ppt/slides/slide5.xml><?xml version="1.0" encoding="utf-8"?>
-<p:sld xmlns:a="http://schemas.openxmlformats.org/drawingml/2006/main" xmlns:p="http://schemas.openxmlformats.org/presentationml/2006/main" xmlns:r="http://schemas.openxmlformats.org/officeDocument/2006/relationships">
+<p:sld xmlns:a="http://schemas.openxmlformats.org/drawingml/2006/main" xmlns:r="http://schemas.openxmlformats.org/officeDocument/2006/relationships" xmlns:p="http://schemas.openxmlformats.org/presentationml/2006/main">
   <p:cSld>
     <p:spTree>
       <p:nvGrpSpPr>
@@ -9312,7 +9543,14 @@
         <p:cNvGrpSpPr/>
         <p:nvPr/>
       </p:nvGrpSpPr>
-      <p:grpSpPr/>
+      <p:grpSpPr>
+        <a:xfrm>
+          <a:off x="0" y="0"/>
+          <a:ext cx="0" cy="0"/>
+          <a:chOff x="0" y="0"/>
+          <a:chExt cx="0" cy="0"/>
+        </a:xfrm>
+      </p:grpSpPr>
       <p:sp>
         <p:nvSpPr>
           <p:cNvPr id="2" name="Rectangle 1"/>
@@ -9354,6 +9592,7 @@
           <a:lstStyle/>
           <a:p>
             <a:pPr algn="ctr"/>
+            <a:endParaRPr/>
           </a:p>
         </p:txBody>
       </p:sp>
@@ -9482,6 +9721,7 @@
           <a:lstStyle/>
           <a:p>
             <a:pPr algn="ctr"/>
+            <a:endParaRPr/>
           </a:p>
         </p:txBody>
       </p:sp>
@@ -9491,7 +9731,13 @@
           <p:cNvGraphicFramePr>
             <a:graphicFrameLocks noGrp="1"/>
           </p:cNvGraphicFramePr>
-          <p:nvPr/>
+          <p:nvPr>
+            <p:extLst>
+              <p:ext uri="{D42A27DB-BD31-4B8C-83A1-F6EECF244321}">
+                <p14:modId xmlns:p14="http://schemas.microsoft.com/office/powerpoint/2010/main" val="2783326891"/>
+              </p:ext>
+            </p:extLst>
+          </p:nvPr>
         </p:nvGraphicFramePr>
         <p:xfrm>
           <a:off x="548640" y="1463040"/>
@@ -9504,9 +9750,27 @@
                 <a:tableStyleId>{5C22544A-7EE6-4342-B048-85BDC9FD1C3A}</a:tableStyleId>
               </a:tblPr>
               <a:tblGrid>
-                <a:gridCol w="3291840"/>
-                <a:gridCol w="1371600"/>
-                <a:gridCol w="6400800"/>
+                <a:gridCol w="3291840">
+                  <a:extLst>
+                    <a:ext uri="{9D8B030D-6E8A-4147-A177-3AD203B41FA5}">
+                      <a16:colId xmlns:a16="http://schemas.microsoft.com/office/drawing/2014/main" val="20000"/>
+                    </a:ext>
+                  </a:extLst>
+                </a:gridCol>
+                <a:gridCol w="1371600">
+                  <a:extLst>
+                    <a:ext uri="{9D8B030D-6E8A-4147-A177-3AD203B41FA5}">
+                      <a16:colId xmlns:a16="http://schemas.microsoft.com/office/drawing/2014/main" val="20001"/>
+                    </a:ext>
+                  </a:extLst>
+                </a:gridCol>
+                <a:gridCol w="6400800">
+                  <a:extLst>
+                    <a:ext uri="{9D8B030D-6E8A-4147-A177-3AD203B41FA5}">
+                      <a16:colId xmlns:a16="http://schemas.microsoft.com/office/drawing/2014/main" val="20002"/>
+                    </a:ext>
+                  </a:extLst>
+                </a:gridCol>
               </a:tblGrid>
               <a:tr h="713232">
                 <a:tc>
@@ -9575,6 +9839,11 @@
                     </a:solidFill>
                   </a:tcPr>
                 </a:tc>
+                <a:extLst>
+                  <a:ext uri="{0D108BD9-81ED-4DB2-BD59-A6C34878D82A}">
+                    <a16:rowId xmlns:a16="http://schemas.microsoft.com/office/drawing/2014/main" val="10000"/>
+                  </a:ext>
+                </a:extLst>
               </a:tr>
               <a:tr h="713232">
                 <a:tc>
@@ -9605,13 +9874,13 @@
                     <a:lstStyle/>
                     <a:p>
                       <a:r>
-                        <a:rPr sz="1250">
+                        <a:rPr sz="1300">
                           <a:solidFill>
                             <a:srgbClr val="1A1A2E"/>
                           </a:solidFill>
                           <a:latin typeface="Calibri"/>
                         </a:rPr>
-                        <a:t>Not chosen</a:t>
+                        <a:t>Rejected</a:t>
                       </a:r>
                     </a:p>
                   </a:txBody>
@@ -9627,13 +9896,13 @@
                     <a:lstStyle/>
                     <a:p>
                       <a:r>
-                        <a:rPr sz="1250">
+                        <a:rPr sz="1300" dirty="0">
                           <a:solidFill>
                             <a:srgbClr val="1A1A2E"/>
                           </a:solidFill>
                           <a:latin typeface="Calibri"/>
                         </a:rPr>
-                        <a:t>Too many tools lead to poor choices, the context grows unmanageable, and one agent cannot be an expert at everything.</a:t>
+                        <a:t>Too many tools means poor decisions; context explodes; cannot be expert at everything</a:t>
                       </a:r>
                     </a:p>
                   </a:txBody>
@@ -9643,6 +9912,11 @@
                     </a:solidFill>
                   </a:tcPr>
                 </a:tc>
+                <a:extLst>
+                  <a:ext uri="{0D108BD9-81ED-4DB2-BD59-A6C34878D82A}">
+                    <a16:rowId xmlns:a16="http://schemas.microsoft.com/office/drawing/2014/main" val="10001"/>
+                  </a:ext>
+                </a:extLst>
               </a:tr>
               <a:tr h="713232">
                 <a:tc>
@@ -9651,13 +9925,13 @@
                     <a:lstStyle/>
                     <a:p>
                       <a:r>
-                        <a:rPr sz="1250">
+                        <a:rPr sz="1300">
                           <a:solidFill>
                             <a:srgbClr val="1A1A2E"/>
                           </a:solidFill>
                           <a:latin typeface="Calibri"/>
                         </a:rPr>
-                        <a:t>Independent agents talking peer to peer</a:t>
+                        <a:t>Decentralized peer-to-peer</a:t>
                       </a:r>
                     </a:p>
                   </a:txBody>
@@ -9673,13 +9947,13 @@
                     <a:lstStyle/>
                     <a:p>
                       <a:r>
-                        <a:rPr sz="1250">
+                        <a:rPr sz="1300" dirty="0">
                           <a:solidFill>
                             <a:srgbClr val="1A1A2E"/>
                           </a:solidFill>
                           <a:latin typeface="Calibri"/>
                         </a:rPr>
-                        <a:t>Not chosen</a:t>
+                        <a:t>Rejected</a:t>
                       </a:r>
                     </a:p>
                   </a:txBody>
@@ -9695,13 +9969,13 @@
                     <a:lstStyle/>
                     <a:p>
                       <a:r>
-                        <a:rPr sz="1250">
+                        <a:rPr sz="1300">
                           <a:solidFill>
                             <a:srgbClr val="1A1A2E"/>
                           </a:solidFill>
                           <a:latin typeface="Calibri"/>
                         </a:rPr>
-                        <a:t>Hard to predict and to debug, with no clear accountability for a three-million-dollar decision.</a:t>
+                        <a:t>Hard to predict and debug; no clear accountability for a 3 million dollar decision</a:t>
                       </a:r>
                     </a:p>
                   </a:txBody>
@@ -9711,6 +9985,11 @@
                     </a:solidFill>
                   </a:tcPr>
                 </a:tc>
+                <a:extLst>
+                  <a:ext uri="{0D108BD9-81ED-4DB2-BD59-A6C34878D82A}">
+                    <a16:rowId xmlns:a16="http://schemas.microsoft.com/office/drawing/2014/main" val="10002"/>
+                  </a:ext>
+                </a:extLst>
               </a:tr>
               <a:tr h="713232">
                 <a:tc>
@@ -9719,13 +9998,13 @@
                     <a:lstStyle/>
                     <a:p>
                       <a:r>
-                        <a:rPr sz="1250">
+                        <a:rPr sz="1300">
                           <a:solidFill>
                             <a:srgbClr val="1A1A2E"/>
                           </a:solidFill>
                           <a:latin typeface="Calibri"/>
                         </a:rPr>
-                        <a:t>A supervisor guiding specialists</a:t>
+                        <a:t>Orchestrator / Supervisor</a:t>
                       </a:r>
                     </a:p>
                   </a:txBody>
@@ -9763,13 +10042,13 @@
                     <a:lstStyle/>
                     <a:p>
                       <a:r>
-                        <a:rPr sz="1250">
+                        <a:rPr sz="1300">
                           <a:solidFill>
                             <a:srgbClr val="1A1A2E"/>
                           </a:solidFill>
                           <a:latin typeface="Calibri"/>
                         </a:rPr>
-                        <a:t>Clear accountability, easy to follow and fix, work shared among experts, and every step can be audited.</a:t>
+                        <a:t>Clear accountability and control, simple to debug, divides work to specialists, auditable</a:t>
                       </a:r>
                     </a:p>
                   </a:txBody>
@@ -9779,6 +10058,11 @@
                     </a:solidFill>
                   </a:tcPr>
                 </a:tc>
+                <a:extLst>
+                  <a:ext uri="{0D108BD9-81ED-4DB2-BD59-A6C34878D82A}">
+                    <a16:rowId xmlns:a16="http://schemas.microsoft.com/office/drawing/2014/main" val="10003"/>
+                  </a:ext>
+                </a:extLst>
               </a:tr>
               <a:tr h="713232">
                 <a:tc>
@@ -9787,13 +10071,13 @@
                     <a:lstStyle/>
                     <a:p>
                       <a:r>
-                        <a:rPr sz="1250">
+                        <a:rPr sz="1300" dirty="0">
                           <a:solidFill>
                             <a:srgbClr val="1A1A2E"/>
                           </a:solidFill>
                           <a:latin typeface="Calibri"/>
                         </a:rPr>
-                        <a:t>A deeper management hierarchy</a:t>
+                        <a:t>Hierarchical (CEO to worker)</a:t>
                       </a:r>
                     </a:p>
                   </a:txBody>
@@ -9809,14 +10093,20 @@
                     <a:lstStyle/>
                     <a:p>
                       <a:r>
-                        <a:rPr sz="1250">
+                        <a:rPr lang="de-CH" sz="1250" dirty="0">
                           <a:solidFill>
                             <a:srgbClr val="1A1A2E"/>
                           </a:solidFill>
                           <a:latin typeface="Calibri"/>
                         </a:rPr>
-                        <a:t>For later</a:t>
+                        <a:t>Future</a:t>
                       </a:r>
+                      <a:endParaRPr sz="1250" dirty="0">
+                        <a:solidFill>
+                          <a:srgbClr val="1A1A2E"/>
+                        </a:solidFill>
+                        <a:latin typeface="Calibri"/>
+                      </a:endParaRPr>
                     </a:p>
                   </a:txBody>
                   <a:tcPr>
@@ -9831,13 +10121,13 @@
                     <a:lstStyle/>
                     <a:p>
                       <a:r>
-                        <a:rPr sz="1250">
+                        <a:rPr sz="1300" dirty="0">
                           <a:solidFill>
                             <a:srgbClr val="1A1A2E"/>
                           </a:solidFill>
                           <a:latin typeface="Calibri"/>
                         </a:rPr>
-                        <a:t>More than we need today, but a natural way to grow as we take on the other challenges.</a:t>
+                        <a:t>Overkill for the MVP; the natural growth path as we add the other case challenges</a:t>
                       </a:r>
                     </a:p>
                   </a:txBody>
@@ -9847,6 +10137,11 @@
                     </a:solidFill>
                   </a:tcPr>
                 </a:tc>
+                <a:extLst>
+                  <a:ext uri="{0D108BD9-81ED-4DB2-BD59-A6C34878D82A}">
+                    <a16:rowId xmlns:a16="http://schemas.microsoft.com/office/drawing/2014/main" val="10004"/>
+                  </a:ext>
+                </a:extLst>
               </a:tr>
             </a:tbl>
           </a:graphicData>
@@ -9893,6 +10188,7 @@
           <a:lstStyle/>
           <a:p>
             <a:pPr algn="ctr"/>
+            <a:endParaRPr/>
           </a:p>
         </p:txBody>
       </p:sp>
@@ -9988,75 +10284,7 @@
           <a:lstStyle/>
           <a:p>
             <a:pPr algn="ctr"/>
-          </a:p>
-        </p:txBody>
-      </p:sp>
-      <p:sp>
-        <p:nvSpPr>
-          <p:cNvPr id="10" name="TextBox 9"/>
-          <p:cNvSpPr txBox="1"/>
-          <p:nvPr/>
-        </p:nvSpPr>
-        <p:spPr>
-          <a:xfrm>
-            <a:off x="502920" y="6519672"/>
-            <a:ext cx="11155680" cy="310896"/>
-          </a:xfrm>
-          <a:prstGeom prst="rect">
-            <a:avLst/>
-          </a:prstGeom>
-          <a:noFill/>
-        </p:spPr>
-        <p:txBody>
-          <a:bodyPr wrap="square" anchor="ctr">
-            <a:spAutoFit/>
-          </a:bodyPr>
-          <a:lstStyle/>
-          <a:p>
-            <a:pPr algn="l">
-              <a:lnSpc>
-                <a:spcPct val="105000"/>
-              </a:lnSpc>
-              <a:spcAft>
-                <a:spcPts val="600"/>
-              </a:spcAft>
-            </a:pPr>
-            <a:r>
-              <a:rPr sz="1100" b="1">
-                <a:solidFill>
-                  <a:srgbClr val="0A1F6B"/>
-                </a:solidFill>
-                <a:latin typeface="Calibri"/>
-              </a:rPr>
-              <a:t>Rubric: </a:t>
-            </a:r>
-            <a:r>
-              <a:rPr sz="1100" b="0">
-                <a:solidFill>
-                  <a:srgbClr val="555555"/>
-                </a:solidFill>
-                <a:latin typeface="Calibri"/>
-              </a:rPr>
-              <a:t>Agentic system architecture (10 points)</a:t>
-            </a:r>
-            <a:r>
-              <a:rPr sz="1100" b="1">
-                <a:solidFill>
-                  <a:srgbClr val="0A1F6B"/>
-                </a:solidFill>
-                <a:latin typeface="Calibri"/>
-              </a:rPr>
-              <a:t>     |     Reference: </a:t>
-            </a:r>
-            <a:r>
-              <a:rPr sz="1100" b="0">
-                <a:solidFill>
-                  <a:srgbClr val="555555"/>
-                </a:solidFill>
-                <a:latin typeface="Calibri"/>
-              </a:rPr>
-              <a:t>Design handout, section 5</a:t>
-            </a:r>
+            <a:endParaRPr/>
           </a:p>
         </p:txBody>
       </p:sp>
@@ -10069,7 +10297,7 @@
 </file>
 
 <file path=ppt/slides/slide6.xml><?xml version="1.0" encoding="utf-8"?>
-<p:sld xmlns:a="http://schemas.openxmlformats.org/drawingml/2006/main" xmlns:p="http://schemas.openxmlformats.org/presentationml/2006/main" xmlns:r="http://schemas.openxmlformats.org/officeDocument/2006/relationships">
+<p:sld xmlns:a="http://schemas.openxmlformats.org/drawingml/2006/main" xmlns:r="http://schemas.openxmlformats.org/officeDocument/2006/relationships" xmlns:p="http://schemas.openxmlformats.org/presentationml/2006/main">
   <p:cSld>
     <p:spTree>
       <p:nvGrpSpPr>
@@ -10077,7 +10305,14 @@
         <p:cNvGrpSpPr/>
         <p:nvPr/>
       </p:nvGrpSpPr>
-      <p:grpSpPr/>
+      <p:grpSpPr>
+        <a:xfrm>
+          <a:off x="0" y="0"/>
+          <a:ext cx="0" cy="0"/>
+          <a:chOff x="0" y="0"/>
+          <a:chExt cx="0" cy="0"/>
+        </a:xfrm>
+      </p:grpSpPr>
       <p:sp>
         <p:nvSpPr>
           <p:cNvPr id="2" name="Rectangle 1"/>
@@ -10119,6 +10354,7 @@
           <a:lstStyle/>
           <a:p>
             <a:pPr algn="ctr"/>
+            <a:endParaRPr/>
           </a:p>
         </p:txBody>
       </p:sp>
@@ -10247,6 +10483,7 @@
           <a:lstStyle/>
           <a:p>
             <a:pPr algn="ctr"/>
+            <a:endParaRPr/>
           </a:p>
         </p:txBody>
       </p:sp>
@@ -10311,10 +10548,34 @@
                 <a:tableStyleId>{5C22544A-7EE6-4342-B048-85BDC9FD1C3A}</a:tableStyleId>
               </a:tblPr>
               <a:tblGrid>
-                <a:gridCol w="2468880"/>
-                <a:gridCol w="1188720"/>
-                <a:gridCol w="1828800"/>
-                <a:gridCol w="5577840"/>
+                <a:gridCol w="2468880">
+                  <a:extLst>
+                    <a:ext uri="{9D8B030D-6E8A-4147-A177-3AD203B41FA5}">
+                      <a16:colId xmlns:a16="http://schemas.microsoft.com/office/drawing/2014/main" val="20000"/>
+                    </a:ext>
+                  </a:extLst>
+                </a:gridCol>
+                <a:gridCol w="1188720">
+                  <a:extLst>
+                    <a:ext uri="{9D8B030D-6E8A-4147-A177-3AD203B41FA5}">
+                      <a16:colId xmlns:a16="http://schemas.microsoft.com/office/drawing/2014/main" val="20001"/>
+                    </a:ext>
+                  </a:extLst>
+                </a:gridCol>
+                <a:gridCol w="1828800">
+                  <a:extLst>
+                    <a:ext uri="{9D8B030D-6E8A-4147-A177-3AD203B41FA5}">
+                      <a16:colId xmlns:a16="http://schemas.microsoft.com/office/drawing/2014/main" val="20002"/>
+                    </a:ext>
+                  </a:extLst>
+                </a:gridCol>
+                <a:gridCol w="5577840">
+                  <a:extLst>
+                    <a:ext uri="{9D8B030D-6E8A-4147-A177-3AD203B41FA5}">
+                      <a16:colId xmlns:a16="http://schemas.microsoft.com/office/drawing/2014/main" val="20003"/>
+                    </a:ext>
+                  </a:extLst>
+                </a:gridCol>
               </a:tblGrid>
               <a:tr h="402336">
                 <a:tc>
@@ -10405,6 +10666,11 @@
                     </a:solidFill>
                   </a:tcPr>
                 </a:tc>
+                <a:extLst>
+                  <a:ext uri="{0D108BD9-81ED-4DB2-BD59-A6C34878D82A}">
+                    <a16:rowId xmlns:a16="http://schemas.microsoft.com/office/drawing/2014/main" val="10000"/>
+                  </a:ext>
+                </a:extLst>
               </a:tr>
               <a:tr h="402336">
                 <a:tc>
@@ -10495,6 +10761,11 @@
                     </a:solidFill>
                   </a:tcPr>
                 </a:tc>
+                <a:extLst>
+                  <a:ext uri="{0D108BD9-81ED-4DB2-BD59-A6C34878D82A}">
+                    <a16:rowId xmlns:a16="http://schemas.microsoft.com/office/drawing/2014/main" val="10001"/>
+                  </a:ext>
+                </a:extLst>
               </a:tr>
               <a:tr h="402336">
                 <a:tc>
@@ -10585,6 +10856,11 @@
                     </a:solidFill>
                   </a:tcPr>
                 </a:tc>
+                <a:extLst>
+                  <a:ext uri="{0D108BD9-81ED-4DB2-BD59-A6C34878D82A}">
+                    <a16:rowId xmlns:a16="http://schemas.microsoft.com/office/drawing/2014/main" val="10002"/>
+                  </a:ext>
+                </a:extLst>
               </a:tr>
               <a:tr h="402336">
                 <a:tc>
@@ -10675,6 +10951,11 @@
                     </a:solidFill>
                   </a:tcPr>
                 </a:tc>
+                <a:extLst>
+                  <a:ext uri="{0D108BD9-81ED-4DB2-BD59-A6C34878D82A}">
+                    <a16:rowId xmlns:a16="http://schemas.microsoft.com/office/drawing/2014/main" val="10003"/>
+                  </a:ext>
+                </a:extLst>
               </a:tr>
               <a:tr h="402336">
                 <a:tc>
@@ -10765,6 +11046,11 @@
                     </a:solidFill>
                   </a:tcPr>
                 </a:tc>
+                <a:extLst>
+                  <a:ext uri="{0D108BD9-81ED-4DB2-BD59-A6C34878D82A}">
+                    <a16:rowId xmlns:a16="http://schemas.microsoft.com/office/drawing/2014/main" val="10004"/>
+                  </a:ext>
+                </a:extLst>
               </a:tr>
               <a:tr h="402336">
                 <a:tc>
@@ -10855,6 +11141,11 @@
                     </a:solidFill>
                   </a:tcPr>
                 </a:tc>
+                <a:extLst>
+                  <a:ext uri="{0D108BD9-81ED-4DB2-BD59-A6C34878D82A}">
+                    <a16:rowId xmlns:a16="http://schemas.microsoft.com/office/drawing/2014/main" val="10005"/>
+                  </a:ext>
+                </a:extLst>
               </a:tr>
               <a:tr h="402336">
                 <a:tc>
@@ -10945,6 +11236,11 @@
                     </a:solidFill>
                   </a:tcPr>
                 </a:tc>
+                <a:extLst>
+                  <a:ext uri="{0D108BD9-81ED-4DB2-BD59-A6C34878D82A}">
+                    <a16:rowId xmlns:a16="http://schemas.microsoft.com/office/drawing/2014/main" val="10006"/>
+                  </a:ext>
+                </a:extLst>
               </a:tr>
               <a:tr h="402336">
                 <a:tc>
@@ -11035,6 +11331,11 @@
                     </a:solidFill>
                   </a:tcPr>
                 </a:tc>
+                <a:extLst>
+                  <a:ext uri="{0D108BD9-81ED-4DB2-BD59-A6C34878D82A}">
+                    <a16:rowId xmlns:a16="http://schemas.microsoft.com/office/drawing/2014/main" val="10007"/>
+                  </a:ext>
+                </a:extLst>
               </a:tr>
               <a:tr h="402336">
                 <a:tc>
@@ -11125,6 +11426,11 @@
                     </a:solidFill>
                   </a:tcPr>
                 </a:tc>
+                <a:extLst>
+                  <a:ext uri="{0D108BD9-81ED-4DB2-BD59-A6C34878D82A}">
+                    <a16:rowId xmlns:a16="http://schemas.microsoft.com/office/drawing/2014/main" val="10008"/>
+                  </a:ext>
+                </a:extLst>
               </a:tr>
               <a:tr h="402336">
                 <a:tc>
@@ -11215,6 +11521,11 @@
                     </a:solidFill>
                   </a:tcPr>
                 </a:tc>
+                <a:extLst>
+                  <a:ext uri="{0D108BD9-81ED-4DB2-BD59-A6C34878D82A}">
+                    <a16:rowId xmlns:a16="http://schemas.microsoft.com/office/drawing/2014/main" val="10009"/>
+                  </a:ext>
+                </a:extLst>
               </a:tr>
               <a:tr h="402336">
                 <a:tc>
@@ -11305,6 +11616,11 @@
                     </a:solidFill>
                   </a:tcPr>
                 </a:tc>
+                <a:extLst>
+                  <a:ext uri="{0D108BD9-81ED-4DB2-BD59-A6C34878D82A}">
+                    <a16:rowId xmlns:a16="http://schemas.microsoft.com/office/drawing/2014/main" val="10010"/>
+                  </a:ext>
+                </a:extLst>
               </a:tr>
             </a:tbl>
           </a:graphicData>
@@ -11351,75 +11667,7 @@
           <a:lstStyle/>
           <a:p>
             <a:pPr algn="ctr"/>
-          </a:p>
-        </p:txBody>
-      </p:sp>
-      <p:sp>
-        <p:nvSpPr>
-          <p:cNvPr id="9" name="TextBox 8"/>
-          <p:cNvSpPr txBox="1"/>
-          <p:nvPr/>
-        </p:nvSpPr>
-        <p:spPr>
-          <a:xfrm>
-            <a:off x="502920" y="6519672"/>
-            <a:ext cx="11155680" cy="310896"/>
-          </a:xfrm>
-          <a:prstGeom prst="rect">
-            <a:avLst/>
-          </a:prstGeom>
-          <a:noFill/>
-        </p:spPr>
-        <p:txBody>
-          <a:bodyPr wrap="square" anchor="ctr">
-            <a:spAutoFit/>
-          </a:bodyPr>
-          <a:lstStyle/>
-          <a:p>
-            <a:pPr algn="l">
-              <a:lnSpc>
-                <a:spcPct val="105000"/>
-              </a:lnSpc>
-              <a:spcAft>
-                <a:spcPts val="600"/>
-              </a:spcAft>
-            </a:pPr>
-            <a:r>
-              <a:rPr sz="1100" b="1">
-                <a:solidFill>
-                  <a:srgbClr val="0A1F6B"/>
-                </a:solidFill>
-                <a:latin typeface="Calibri"/>
-              </a:rPr>
-              <a:t>Rubric: </a:t>
-            </a:r>
-            <a:r>
-              <a:rPr sz="1100" b="0">
-                <a:solidFill>
-                  <a:srgbClr val="555555"/>
-                </a:solidFill>
-                <a:latin typeface="Calibri"/>
-              </a:rPr>
-              <a:t>Tools, actions and feasibility (15 points)</a:t>
-            </a:r>
-            <a:r>
-              <a:rPr sz="1100" b="1">
-                <a:solidFill>
-                  <a:srgbClr val="0A1F6B"/>
-                </a:solidFill>
-                <a:latin typeface="Calibri"/>
-              </a:rPr>
-              <a:t>     |     Reference: </a:t>
-            </a:r>
-            <a:r>
-              <a:rPr sz="1100" b="0">
-                <a:solidFill>
-                  <a:srgbClr val="555555"/>
-                </a:solidFill>
-                <a:latin typeface="Calibri"/>
-              </a:rPr>
-              <a:t>Design handout, section 3</a:t>
-            </a:r>
+            <a:endParaRPr/>
           </a:p>
         </p:txBody>
       </p:sp>
@@ -11432,7 +11680,7 @@
 </file>
 
 <file path=ppt/slides/slide7.xml><?xml version="1.0" encoding="utf-8"?>
-<p:sld xmlns:a="http://schemas.openxmlformats.org/drawingml/2006/main" xmlns:p="http://schemas.openxmlformats.org/presentationml/2006/main" xmlns:r="http://schemas.openxmlformats.org/officeDocument/2006/relationships">
+<p:sld xmlns:a="http://schemas.openxmlformats.org/drawingml/2006/main" xmlns:r="http://schemas.openxmlformats.org/officeDocument/2006/relationships" xmlns:p="http://schemas.openxmlformats.org/presentationml/2006/main">
   <p:cSld>
     <p:spTree>
       <p:nvGrpSpPr>
@@ -11440,7 +11688,14 @@
         <p:cNvGrpSpPr/>
         <p:nvPr/>
       </p:nvGrpSpPr>
-      <p:grpSpPr/>
+      <p:grpSpPr>
+        <a:xfrm>
+          <a:off x="0" y="0"/>
+          <a:ext cx="0" cy="0"/>
+          <a:chOff x="0" y="0"/>
+          <a:chExt cx="0" cy="0"/>
+        </a:xfrm>
+      </p:grpSpPr>
       <p:sp>
         <p:nvSpPr>
           <p:cNvPr id="2" name="Rectangle 1"/>
@@ -11482,6 +11737,7 @@
           <a:lstStyle/>
           <a:p>
             <a:pPr algn="ctr"/>
+            <a:endParaRPr/>
           </a:p>
         </p:txBody>
       </p:sp>
@@ -11536,7 +11792,7 @@
         <p:spPr>
           <a:xfrm>
             <a:off x="502920" y="530352"/>
-            <a:ext cx="11247120" cy="822960"/>
+            <a:ext cx="11247120" cy="510909"/>
           </a:xfrm>
           <a:prstGeom prst="rect">
             <a:avLst/>
@@ -11549,7 +11805,7 @@
           </a:bodyPr>
           <a:lstStyle/>
           <a:p>
-            <a:pPr algn="l">
+            <a:pPr>
               <a:lnSpc>
                 <a:spcPct val="105000"/>
               </a:lnSpc>
@@ -11558,14 +11814,28 @@
               </a:spcAft>
             </a:pPr>
             <a:r>
-              <a:rPr sz="2700" b="1">
+              <a:rPr sz="2700" b="1" dirty="0">
                 <a:solidFill>
                   <a:srgbClr val="0A1F6B"/>
                 </a:solidFill>
                 <a:latin typeface="Calibri"/>
               </a:rPr>
-              <a:t>6. How the agent thinks: notice, reason, act, learn</a:t>
-            </a:r>
+              <a:t>6. </a:t>
+            </a:r>
+            <a:r>
+              <a:rPr lang="en-GB" sz="2700" b="1" dirty="0">
+                <a:solidFill>
+                  <a:srgbClr val="0A1F6B"/>
+                </a:solidFill>
+              </a:rPr>
+              <a:t>Perception, reasoning, action, learning</a:t>
+            </a:r>
+            <a:endParaRPr sz="2700" b="1" dirty="0">
+              <a:solidFill>
+                <a:srgbClr val="0A1F6B"/>
+              </a:solidFill>
+              <a:latin typeface="Calibri"/>
+            </a:endParaRPr>
           </a:p>
         </p:txBody>
       </p:sp>
@@ -11610,92 +11880,7 @@
           <a:lstStyle/>
           <a:p>
             <a:pPr algn="ctr"/>
-          </a:p>
-        </p:txBody>
-      </p:sp>
-      <p:sp>
-        <p:nvSpPr>
-          <p:cNvPr id="6" name="Rectangle 5"/>
-          <p:cNvSpPr/>
-          <p:nvPr/>
-        </p:nvSpPr>
-        <p:spPr>
-          <a:xfrm>
-            <a:off x="548640" y="1554480"/>
-            <a:ext cx="2011680" cy="960120"/>
-          </a:xfrm>
-          <a:prstGeom prst="rect">
-            <a:avLst/>
-          </a:prstGeom>
-          <a:solidFill>
-            <a:srgbClr val="1E408A"/>
-          </a:solidFill>
-          <a:ln>
-            <a:noFill/>
-          </a:ln>
-          <a:effectLst/>
-        </p:spPr>
-        <p:style>
-          <a:lnRef idx="1">
-            <a:schemeClr val="accent1"/>
-          </a:lnRef>
-          <a:fillRef idx="3">
-            <a:schemeClr val="accent1"/>
-          </a:fillRef>
-          <a:effectRef idx="2">
-            <a:schemeClr val="accent1"/>
-          </a:effectRef>
-          <a:fontRef idx="minor">
-            <a:schemeClr val="lt1"/>
-          </a:fontRef>
-        </p:style>
-        <p:txBody>
-          <a:bodyPr rtlCol="0" anchor="ctr"/>
-          <a:lstStyle/>
-          <a:p>
-            <a:pPr algn="ctr"/>
-          </a:p>
-        </p:txBody>
-      </p:sp>
-      <p:sp>
-        <p:nvSpPr>
-          <p:cNvPr id="7" name="TextBox 6"/>
-          <p:cNvSpPr txBox="1"/>
-          <p:nvPr/>
-        </p:nvSpPr>
-        <p:spPr>
-          <a:xfrm>
-            <a:off x="548640" y="1554480"/>
-            <a:ext cx="2011680" cy="960120"/>
-          </a:xfrm>
-          <a:prstGeom prst="rect">
-            <a:avLst/>
-          </a:prstGeom>
-          <a:noFill/>
-        </p:spPr>
-        <p:txBody>
-          <a:bodyPr wrap="square" anchor="ctr">
-            <a:spAutoFit/>
-          </a:bodyPr>
-          <a:lstStyle/>
-          <a:p>
-            <a:pPr algn="ctr">
-              <a:lnSpc>
-                <a:spcPct val="105000"/>
-              </a:lnSpc>
-              <a:spcAft>
-                <a:spcPts val="600"/>
-              </a:spcAft>
-            </a:pPr>
-            <a:r>
-              <a:rPr sz="1500" b="1">
-                <a:solidFill>
-                  <a:srgbClr val="FFFFFF"/>
-                </a:solidFill>
-                <a:latin typeface="Calibri"/>
-              </a:rPr>
-              <a:t>NOTICE</a:t>
-            </a:r>
+            <a:endParaRPr/>
           </a:p>
         </p:txBody>
       </p:sp>
@@ -11743,92 +11928,6 @@
       </p:sp>
       <p:sp>
         <p:nvSpPr>
-          <p:cNvPr id="9" name="Rectangle 8"/>
-          <p:cNvSpPr/>
-          <p:nvPr/>
-        </p:nvSpPr>
-        <p:spPr>
-          <a:xfrm>
-            <a:off x="548640" y="2633472"/>
-            <a:ext cx="2011680" cy="960120"/>
-          </a:xfrm>
-          <a:prstGeom prst="rect">
-            <a:avLst/>
-          </a:prstGeom>
-          <a:solidFill>
-            <a:srgbClr val="1E408A"/>
-          </a:solidFill>
-          <a:ln>
-            <a:noFill/>
-          </a:ln>
-          <a:effectLst/>
-        </p:spPr>
-        <p:style>
-          <a:lnRef idx="1">
-            <a:schemeClr val="accent1"/>
-          </a:lnRef>
-          <a:fillRef idx="3">
-            <a:schemeClr val="accent1"/>
-          </a:fillRef>
-          <a:effectRef idx="2">
-            <a:schemeClr val="accent1"/>
-          </a:effectRef>
-          <a:fontRef idx="minor">
-            <a:schemeClr val="lt1"/>
-          </a:fontRef>
-        </p:style>
-        <p:txBody>
-          <a:bodyPr rtlCol="0" anchor="ctr"/>
-          <a:lstStyle/>
-          <a:p>
-            <a:pPr algn="ctr"/>
-          </a:p>
-        </p:txBody>
-      </p:sp>
-      <p:sp>
-        <p:nvSpPr>
-          <p:cNvPr id="10" name="TextBox 9"/>
-          <p:cNvSpPr txBox="1"/>
-          <p:nvPr/>
-        </p:nvSpPr>
-        <p:spPr>
-          <a:xfrm>
-            <a:off x="548640" y="2633472"/>
-            <a:ext cx="2011680" cy="960120"/>
-          </a:xfrm>
-          <a:prstGeom prst="rect">
-            <a:avLst/>
-          </a:prstGeom>
-          <a:noFill/>
-        </p:spPr>
-        <p:txBody>
-          <a:bodyPr wrap="square" anchor="ctr">
-            <a:spAutoFit/>
-          </a:bodyPr>
-          <a:lstStyle/>
-          <a:p>
-            <a:pPr algn="ctr">
-              <a:lnSpc>
-                <a:spcPct val="105000"/>
-              </a:lnSpc>
-              <a:spcAft>
-                <a:spcPts val="600"/>
-              </a:spcAft>
-            </a:pPr>
-            <a:r>
-              <a:rPr sz="1500" b="1">
-                <a:solidFill>
-                  <a:srgbClr val="FFFFFF"/>
-                </a:solidFill>
-                <a:latin typeface="Calibri"/>
-              </a:rPr>
-              <a:t>REASON</a:t>
-            </a:r>
-          </a:p>
-        </p:txBody>
-      </p:sp>
-      <p:sp>
-        <p:nvSpPr>
           <p:cNvPr id="11" name="TextBox 10"/>
           <p:cNvSpPr txBox="1"/>
           <p:nvPr/>
@@ -11871,92 +11970,6 @@
       </p:sp>
       <p:sp>
         <p:nvSpPr>
-          <p:cNvPr id="12" name="Rectangle 11"/>
-          <p:cNvSpPr/>
-          <p:nvPr/>
-        </p:nvSpPr>
-        <p:spPr>
-          <a:xfrm>
-            <a:off x="548640" y="3712463"/>
-            <a:ext cx="2011680" cy="960120"/>
-          </a:xfrm>
-          <a:prstGeom prst="rect">
-            <a:avLst/>
-          </a:prstGeom>
-          <a:solidFill>
-            <a:srgbClr val="1E408A"/>
-          </a:solidFill>
-          <a:ln>
-            <a:noFill/>
-          </a:ln>
-          <a:effectLst/>
-        </p:spPr>
-        <p:style>
-          <a:lnRef idx="1">
-            <a:schemeClr val="accent1"/>
-          </a:lnRef>
-          <a:fillRef idx="3">
-            <a:schemeClr val="accent1"/>
-          </a:fillRef>
-          <a:effectRef idx="2">
-            <a:schemeClr val="accent1"/>
-          </a:effectRef>
-          <a:fontRef idx="minor">
-            <a:schemeClr val="lt1"/>
-          </a:fontRef>
-        </p:style>
-        <p:txBody>
-          <a:bodyPr rtlCol="0" anchor="ctr"/>
-          <a:lstStyle/>
-          <a:p>
-            <a:pPr algn="ctr"/>
-          </a:p>
-        </p:txBody>
-      </p:sp>
-      <p:sp>
-        <p:nvSpPr>
-          <p:cNvPr id="13" name="TextBox 12"/>
-          <p:cNvSpPr txBox="1"/>
-          <p:nvPr/>
-        </p:nvSpPr>
-        <p:spPr>
-          <a:xfrm>
-            <a:off x="548640" y="3712463"/>
-            <a:ext cx="2011680" cy="960120"/>
-          </a:xfrm>
-          <a:prstGeom prst="rect">
-            <a:avLst/>
-          </a:prstGeom>
-          <a:noFill/>
-        </p:spPr>
-        <p:txBody>
-          <a:bodyPr wrap="square" anchor="ctr">
-            <a:spAutoFit/>
-          </a:bodyPr>
-          <a:lstStyle/>
-          <a:p>
-            <a:pPr algn="ctr">
-              <a:lnSpc>
-                <a:spcPct val="105000"/>
-              </a:lnSpc>
-              <a:spcAft>
-                <a:spcPts val="600"/>
-              </a:spcAft>
-            </a:pPr>
-            <a:r>
-              <a:rPr sz="1500" b="1">
-                <a:solidFill>
-                  <a:srgbClr val="FFFFFF"/>
-                </a:solidFill>
-                <a:latin typeface="Calibri"/>
-              </a:rPr>
-              <a:t>ACT</a:t>
-            </a:r>
-          </a:p>
-        </p:txBody>
-      </p:sp>
-      <p:sp>
-        <p:nvSpPr>
           <p:cNvPr id="14" name="TextBox 13"/>
           <p:cNvSpPr txBox="1"/>
           <p:nvPr/>
@@ -11993,134 +12006,6 @@
                 <a:latin typeface="Calibri"/>
               </a:rPr>
               <a:t>It drafts a backup order on its own, then, once a person signs off, places the order, reschedules the line, tells the right people, and records everything.</a:t>
-            </a:r>
-          </a:p>
-        </p:txBody>
-      </p:sp>
-      <p:sp>
-        <p:nvSpPr>
-          <p:cNvPr id="15" name="Rectangle 14"/>
-          <p:cNvSpPr/>
-          <p:nvPr/>
-        </p:nvSpPr>
-        <p:spPr>
-          <a:xfrm>
-            <a:off x="548640" y="4791455"/>
-            <a:ext cx="2011680" cy="960120"/>
-          </a:xfrm>
-          <a:prstGeom prst="rect">
-            <a:avLst/>
-          </a:prstGeom>
-          <a:solidFill>
-            <a:srgbClr val="1E408A"/>
-          </a:solidFill>
-          <a:ln>
-            <a:noFill/>
-          </a:ln>
-          <a:effectLst/>
-        </p:spPr>
-        <p:style>
-          <a:lnRef idx="1">
-            <a:schemeClr val="accent1"/>
-          </a:lnRef>
-          <a:fillRef idx="3">
-            <a:schemeClr val="accent1"/>
-          </a:fillRef>
-          <a:effectRef idx="2">
-            <a:schemeClr val="accent1"/>
-          </a:effectRef>
-          <a:fontRef idx="minor">
-            <a:schemeClr val="lt1"/>
-          </a:fontRef>
-        </p:style>
-        <p:txBody>
-          <a:bodyPr rtlCol="0" anchor="ctr"/>
-          <a:lstStyle/>
-          <a:p>
-            <a:pPr algn="ctr"/>
-          </a:p>
-        </p:txBody>
-      </p:sp>
-      <p:sp>
-        <p:nvSpPr>
-          <p:cNvPr id="16" name="TextBox 15"/>
-          <p:cNvSpPr txBox="1"/>
-          <p:nvPr/>
-        </p:nvSpPr>
-        <p:spPr>
-          <a:xfrm>
-            <a:off x="548640" y="4791455"/>
-            <a:ext cx="2011680" cy="960120"/>
-          </a:xfrm>
-          <a:prstGeom prst="rect">
-            <a:avLst/>
-          </a:prstGeom>
-          <a:noFill/>
-        </p:spPr>
-        <p:txBody>
-          <a:bodyPr wrap="square" anchor="ctr">
-            <a:spAutoFit/>
-          </a:bodyPr>
-          <a:lstStyle/>
-          <a:p>
-            <a:pPr algn="ctr">
-              <a:lnSpc>
-                <a:spcPct val="105000"/>
-              </a:lnSpc>
-              <a:spcAft>
-                <a:spcPts val="600"/>
-              </a:spcAft>
-            </a:pPr>
-            <a:r>
-              <a:rPr sz="1500" b="1">
-                <a:solidFill>
-                  <a:srgbClr val="FFFFFF"/>
-                </a:solidFill>
-                <a:latin typeface="Calibri"/>
-              </a:rPr>
-              <a:t>LEARN</a:t>
-            </a:r>
-          </a:p>
-        </p:txBody>
-      </p:sp>
-      <p:sp>
-        <p:nvSpPr>
-          <p:cNvPr id="17" name="TextBox 16"/>
-          <p:cNvSpPr txBox="1"/>
-          <p:nvPr/>
-        </p:nvSpPr>
-        <p:spPr>
-          <a:xfrm>
-            <a:off x="2743200" y="4791455"/>
-            <a:ext cx="8869680" cy="960120"/>
-          </a:xfrm>
-          <a:prstGeom prst="rect">
-            <a:avLst/>
-          </a:prstGeom>
-          <a:noFill/>
-        </p:spPr>
-        <p:txBody>
-          <a:bodyPr wrap="square" anchor="ctr">
-            <a:spAutoFit/>
-          </a:bodyPr>
-          <a:lstStyle/>
-          <a:p>
-            <a:pPr algn="l">
-              <a:lnSpc>
-                <a:spcPct val="105000"/>
-              </a:lnSpc>
-              <a:spcAft>
-                <a:spcPts val="600"/>
-              </a:spcAft>
-            </a:pPr>
-            <a:r>
-              <a:rPr sz="1400" b="0">
-                <a:solidFill>
-                  <a:srgbClr val="1A1A2E"/>
-                </a:solidFill>
-                <a:latin typeface="Calibri"/>
-              </a:rPr>
-              <a:t>Every run is remembered, and the approvals and edits planners make become feedback that gradually tunes the risk thresholds and supplier preferences.</a:t>
             </a:r>
           </a:p>
         </p:txBody>
@@ -12166,48 +12051,7 @@
           <a:lstStyle/>
           <a:p>
             <a:pPr algn="ctr"/>
-          </a:p>
-        </p:txBody>
-      </p:sp>
-      <p:sp>
-        <p:nvSpPr>
-          <p:cNvPr id="19" name="TextBox 18"/>
-          <p:cNvSpPr txBox="1"/>
-          <p:nvPr/>
-        </p:nvSpPr>
-        <p:spPr>
-          <a:xfrm>
-            <a:off x="731520" y="5943600"/>
-            <a:ext cx="10698480" cy="457200"/>
-          </a:xfrm>
-          <a:prstGeom prst="rect">
-            <a:avLst/>
-          </a:prstGeom>
-          <a:noFill/>
-        </p:spPr>
-        <p:txBody>
-          <a:bodyPr wrap="square" anchor="ctr">
-            <a:spAutoFit/>
-          </a:bodyPr>
-          <a:lstStyle/>
-          <a:p>
-            <a:pPr algn="l">
-              <a:lnSpc>
-                <a:spcPct val="105000"/>
-              </a:lnSpc>
-              <a:spcAft>
-                <a:spcPts val="600"/>
-              </a:spcAft>
-            </a:pPr>
-            <a:r>
-              <a:rPr sz="1350" b="1">
-                <a:solidFill>
-                  <a:srgbClr val="FFFFFF"/>
-                </a:solidFill>
-                <a:latin typeface="Calibri"/>
-              </a:rPr>
-              <a:t>An honest note: these agents do not improve by magic. They get better because we feed real human feedback back into them.</a:t>
-            </a:r>
+            <a:endParaRPr/>
           </a:p>
         </p:txBody>
       </p:sp>
@@ -12252,19 +12096,422 @@
           <a:lstStyle/>
           <a:p>
             <a:pPr algn="ctr"/>
-          </a:p>
-        </p:txBody>
-      </p:sp>
-      <p:sp>
-        <p:nvSpPr>
-          <p:cNvPr id="21" name="TextBox 20"/>
+            <a:endParaRPr/>
+          </a:p>
+        </p:txBody>
+      </p:sp>
+      <p:sp>
+        <p:nvSpPr>
+          <p:cNvPr id="22" name="Rectangle 21">
+            <a:extLst>
+              <a:ext uri="{FF2B5EF4-FFF2-40B4-BE49-F238E27FC236}">
+                <a16:creationId xmlns:a16="http://schemas.microsoft.com/office/drawing/2014/main" id="{E2DA18D0-9E77-5BDB-CEA2-EAA553EC3299}"/>
+              </a:ext>
+            </a:extLst>
+          </p:cNvPr>
+          <p:cNvSpPr/>
+          <p:nvPr/>
+        </p:nvSpPr>
+        <p:spPr>
+          <a:xfrm>
+            <a:off x="548640" y="1554480"/>
+            <a:ext cx="2148840" cy="960120"/>
+          </a:xfrm>
+          <a:prstGeom prst="rect">
+            <a:avLst/>
+          </a:prstGeom>
+          <a:solidFill>
+            <a:srgbClr val="1E408A"/>
+          </a:solidFill>
+          <a:ln>
+            <a:noFill/>
+          </a:ln>
+          <a:effectLst/>
+        </p:spPr>
+        <p:style>
+          <a:lnRef idx="1">
+            <a:schemeClr val="accent1"/>
+          </a:lnRef>
+          <a:fillRef idx="3">
+            <a:schemeClr val="accent1"/>
+          </a:fillRef>
+          <a:effectRef idx="2">
+            <a:schemeClr val="accent1"/>
+          </a:effectRef>
+          <a:fontRef idx="minor">
+            <a:schemeClr val="lt1"/>
+          </a:fontRef>
+        </p:style>
+        <p:txBody>
+          <a:bodyPr rtlCol="0" anchor="ctr"/>
+          <a:lstStyle/>
+          <a:p>
+            <a:pPr algn="ctr"/>
+            <a:endParaRPr/>
+          </a:p>
+        </p:txBody>
+      </p:sp>
+      <p:sp>
+        <p:nvSpPr>
+          <p:cNvPr id="23" name="TextBox 22">
+            <a:extLst>
+              <a:ext uri="{FF2B5EF4-FFF2-40B4-BE49-F238E27FC236}">
+                <a16:creationId xmlns:a16="http://schemas.microsoft.com/office/drawing/2014/main" id="{83A24BDB-A2FB-BBEA-3492-DF43F4FF19FA}"/>
+              </a:ext>
+            </a:extLst>
+          </p:cNvPr>
           <p:cNvSpPr txBox="1"/>
           <p:nvPr/>
         </p:nvSpPr>
         <p:spPr>
           <a:xfrm>
-            <a:off x="502920" y="6519672"/>
-            <a:ext cx="11155680" cy="310896"/>
+            <a:off x="548640" y="1554480"/>
+            <a:ext cx="2148840" cy="960120"/>
+          </a:xfrm>
+          <a:prstGeom prst="rect">
+            <a:avLst/>
+          </a:prstGeom>
+          <a:noFill/>
+        </p:spPr>
+        <p:txBody>
+          <a:bodyPr wrap="square" anchor="ctr">
+            <a:spAutoFit/>
+          </a:bodyPr>
+          <a:lstStyle/>
+          <a:p>
+            <a:pPr algn="ctr">
+              <a:lnSpc>
+                <a:spcPct val="105000"/>
+              </a:lnSpc>
+              <a:spcAft>
+                <a:spcPts val="600"/>
+              </a:spcAft>
+            </a:pPr>
+            <a:r>
+              <a:rPr sz="1400" b="1">
+                <a:solidFill>
+                  <a:srgbClr val="FFFFFF"/>
+                </a:solidFill>
+                <a:latin typeface="Calibri"/>
+              </a:rPr>
+              <a:t>PERCEPTION</a:t>
+            </a:r>
+          </a:p>
+        </p:txBody>
+      </p:sp>
+      <p:sp>
+        <p:nvSpPr>
+          <p:cNvPr id="24" name="Rectangle 23">
+            <a:extLst>
+              <a:ext uri="{FF2B5EF4-FFF2-40B4-BE49-F238E27FC236}">
+                <a16:creationId xmlns:a16="http://schemas.microsoft.com/office/drawing/2014/main" id="{1C0A5F45-883B-6ECE-3315-27B468782949}"/>
+              </a:ext>
+            </a:extLst>
+          </p:cNvPr>
+          <p:cNvSpPr/>
+          <p:nvPr/>
+        </p:nvSpPr>
+        <p:spPr>
+          <a:xfrm>
+            <a:off x="548640" y="2633472"/>
+            <a:ext cx="2148840" cy="960120"/>
+          </a:xfrm>
+          <a:prstGeom prst="rect">
+            <a:avLst/>
+          </a:prstGeom>
+          <a:solidFill>
+            <a:srgbClr val="1E408A"/>
+          </a:solidFill>
+          <a:ln>
+            <a:noFill/>
+          </a:ln>
+          <a:effectLst/>
+        </p:spPr>
+        <p:style>
+          <a:lnRef idx="1">
+            <a:schemeClr val="accent1"/>
+          </a:lnRef>
+          <a:fillRef idx="3">
+            <a:schemeClr val="accent1"/>
+          </a:fillRef>
+          <a:effectRef idx="2">
+            <a:schemeClr val="accent1"/>
+          </a:effectRef>
+          <a:fontRef idx="minor">
+            <a:schemeClr val="lt1"/>
+          </a:fontRef>
+        </p:style>
+        <p:txBody>
+          <a:bodyPr rtlCol="0" anchor="ctr"/>
+          <a:lstStyle/>
+          <a:p>
+            <a:pPr algn="ctr"/>
+            <a:endParaRPr/>
+          </a:p>
+        </p:txBody>
+      </p:sp>
+      <p:sp>
+        <p:nvSpPr>
+          <p:cNvPr id="25" name="TextBox 24">
+            <a:extLst>
+              <a:ext uri="{FF2B5EF4-FFF2-40B4-BE49-F238E27FC236}">
+                <a16:creationId xmlns:a16="http://schemas.microsoft.com/office/drawing/2014/main" id="{EA29CD0C-C5EF-4AA9-57AF-42BBC18E5C0C}"/>
+              </a:ext>
+            </a:extLst>
+          </p:cNvPr>
+          <p:cNvSpPr txBox="1"/>
+          <p:nvPr/>
+        </p:nvSpPr>
+        <p:spPr>
+          <a:xfrm>
+            <a:off x="548640" y="2633472"/>
+            <a:ext cx="2148840" cy="960120"/>
+          </a:xfrm>
+          <a:prstGeom prst="rect">
+            <a:avLst/>
+          </a:prstGeom>
+          <a:noFill/>
+        </p:spPr>
+        <p:txBody>
+          <a:bodyPr wrap="square" anchor="ctr">
+            <a:spAutoFit/>
+          </a:bodyPr>
+          <a:lstStyle/>
+          <a:p>
+            <a:pPr algn="ctr">
+              <a:lnSpc>
+                <a:spcPct val="105000"/>
+              </a:lnSpc>
+              <a:spcAft>
+                <a:spcPts val="600"/>
+              </a:spcAft>
+            </a:pPr>
+            <a:r>
+              <a:rPr sz="1400" b="1">
+                <a:solidFill>
+                  <a:srgbClr val="FFFFFF"/>
+                </a:solidFill>
+                <a:latin typeface="Calibri"/>
+              </a:rPr>
+              <a:t>REASONING</a:t>
+            </a:r>
+          </a:p>
+        </p:txBody>
+      </p:sp>
+      <p:sp>
+        <p:nvSpPr>
+          <p:cNvPr id="26" name="Rectangle 25">
+            <a:extLst>
+              <a:ext uri="{FF2B5EF4-FFF2-40B4-BE49-F238E27FC236}">
+                <a16:creationId xmlns:a16="http://schemas.microsoft.com/office/drawing/2014/main" id="{959E553F-784A-151A-28B5-AC075342D13C}"/>
+              </a:ext>
+            </a:extLst>
+          </p:cNvPr>
+          <p:cNvSpPr/>
+          <p:nvPr/>
+        </p:nvSpPr>
+        <p:spPr>
+          <a:xfrm>
+            <a:off x="548640" y="3712463"/>
+            <a:ext cx="2148840" cy="960120"/>
+          </a:xfrm>
+          <a:prstGeom prst="rect">
+            <a:avLst/>
+          </a:prstGeom>
+          <a:solidFill>
+            <a:srgbClr val="1E408A"/>
+          </a:solidFill>
+          <a:ln>
+            <a:noFill/>
+          </a:ln>
+          <a:effectLst/>
+        </p:spPr>
+        <p:style>
+          <a:lnRef idx="1">
+            <a:schemeClr val="accent1"/>
+          </a:lnRef>
+          <a:fillRef idx="3">
+            <a:schemeClr val="accent1"/>
+          </a:fillRef>
+          <a:effectRef idx="2">
+            <a:schemeClr val="accent1"/>
+          </a:effectRef>
+          <a:fontRef idx="minor">
+            <a:schemeClr val="lt1"/>
+          </a:fontRef>
+        </p:style>
+        <p:txBody>
+          <a:bodyPr rtlCol="0" anchor="ctr"/>
+          <a:lstStyle/>
+          <a:p>
+            <a:pPr algn="ctr"/>
+            <a:endParaRPr/>
+          </a:p>
+        </p:txBody>
+      </p:sp>
+      <p:sp>
+        <p:nvSpPr>
+          <p:cNvPr id="27" name="TextBox 26">
+            <a:extLst>
+              <a:ext uri="{FF2B5EF4-FFF2-40B4-BE49-F238E27FC236}">
+                <a16:creationId xmlns:a16="http://schemas.microsoft.com/office/drawing/2014/main" id="{7D2D4A65-6354-E569-4FAF-1F2C8BA2F397}"/>
+              </a:ext>
+            </a:extLst>
+          </p:cNvPr>
+          <p:cNvSpPr txBox="1"/>
+          <p:nvPr/>
+        </p:nvSpPr>
+        <p:spPr>
+          <a:xfrm>
+            <a:off x="548640" y="3712463"/>
+            <a:ext cx="2148840" cy="960120"/>
+          </a:xfrm>
+          <a:prstGeom prst="rect">
+            <a:avLst/>
+          </a:prstGeom>
+          <a:noFill/>
+        </p:spPr>
+        <p:txBody>
+          <a:bodyPr wrap="square" anchor="ctr">
+            <a:spAutoFit/>
+          </a:bodyPr>
+          <a:lstStyle/>
+          <a:p>
+            <a:pPr algn="ctr">
+              <a:lnSpc>
+                <a:spcPct val="105000"/>
+              </a:lnSpc>
+              <a:spcAft>
+                <a:spcPts val="600"/>
+              </a:spcAft>
+            </a:pPr>
+            <a:r>
+              <a:rPr sz="1400" b="1">
+                <a:solidFill>
+                  <a:srgbClr val="FFFFFF"/>
+                </a:solidFill>
+                <a:latin typeface="Calibri"/>
+              </a:rPr>
+              <a:t>ACTION</a:t>
+            </a:r>
+          </a:p>
+        </p:txBody>
+      </p:sp>
+      <p:sp>
+        <p:nvSpPr>
+          <p:cNvPr id="28" name="Rectangle 27">
+            <a:extLst>
+              <a:ext uri="{FF2B5EF4-FFF2-40B4-BE49-F238E27FC236}">
+                <a16:creationId xmlns:a16="http://schemas.microsoft.com/office/drawing/2014/main" id="{03612DE2-320E-A350-F0D8-F10D9BFA4C4B}"/>
+              </a:ext>
+            </a:extLst>
+          </p:cNvPr>
+          <p:cNvSpPr/>
+          <p:nvPr/>
+        </p:nvSpPr>
+        <p:spPr>
+          <a:xfrm>
+            <a:off x="548640" y="4791455"/>
+            <a:ext cx="2148840" cy="960120"/>
+          </a:xfrm>
+          <a:prstGeom prst="rect">
+            <a:avLst/>
+          </a:prstGeom>
+          <a:solidFill>
+            <a:srgbClr val="1E408A"/>
+          </a:solidFill>
+          <a:ln>
+            <a:noFill/>
+          </a:ln>
+          <a:effectLst/>
+        </p:spPr>
+        <p:style>
+          <a:lnRef idx="1">
+            <a:schemeClr val="accent1"/>
+          </a:lnRef>
+          <a:fillRef idx="3">
+            <a:schemeClr val="accent1"/>
+          </a:fillRef>
+          <a:effectRef idx="2">
+            <a:schemeClr val="accent1"/>
+          </a:effectRef>
+          <a:fontRef idx="minor">
+            <a:schemeClr val="lt1"/>
+          </a:fontRef>
+        </p:style>
+        <p:txBody>
+          <a:bodyPr rtlCol="0" anchor="ctr"/>
+          <a:lstStyle/>
+          <a:p>
+            <a:pPr algn="ctr"/>
+            <a:endParaRPr/>
+          </a:p>
+        </p:txBody>
+      </p:sp>
+      <p:sp>
+        <p:nvSpPr>
+          <p:cNvPr id="29" name="TextBox 28">
+            <a:extLst>
+              <a:ext uri="{FF2B5EF4-FFF2-40B4-BE49-F238E27FC236}">
+                <a16:creationId xmlns:a16="http://schemas.microsoft.com/office/drawing/2014/main" id="{A5221498-00B0-4BE2-B736-66FA8B07A523}"/>
+              </a:ext>
+            </a:extLst>
+          </p:cNvPr>
+          <p:cNvSpPr txBox="1"/>
+          <p:nvPr/>
+        </p:nvSpPr>
+        <p:spPr>
+          <a:xfrm>
+            <a:off x="548640" y="4791455"/>
+            <a:ext cx="2148840" cy="960120"/>
+          </a:xfrm>
+          <a:prstGeom prst="rect">
+            <a:avLst/>
+          </a:prstGeom>
+          <a:noFill/>
+        </p:spPr>
+        <p:txBody>
+          <a:bodyPr wrap="square" anchor="ctr">
+            <a:spAutoFit/>
+          </a:bodyPr>
+          <a:lstStyle/>
+          <a:p>
+            <a:pPr algn="ctr">
+              <a:lnSpc>
+                <a:spcPct val="105000"/>
+              </a:lnSpc>
+              <a:spcAft>
+                <a:spcPts val="600"/>
+              </a:spcAft>
+            </a:pPr>
+            <a:r>
+              <a:rPr sz="1400" b="1">
+                <a:solidFill>
+                  <a:srgbClr val="FFFFFF"/>
+                </a:solidFill>
+                <a:latin typeface="Calibri"/>
+              </a:rPr>
+              <a:t>LEARNING</a:t>
+            </a:r>
+          </a:p>
+        </p:txBody>
+      </p:sp>
+      <p:sp>
+        <p:nvSpPr>
+          <p:cNvPr id="30" name="TextBox 29">
+            <a:extLst>
+              <a:ext uri="{FF2B5EF4-FFF2-40B4-BE49-F238E27FC236}">
+                <a16:creationId xmlns:a16="http://schemas.microsoft.com/office/drawing/2014/main" id="{EADA48C6-D120-2BEF-3E05-730D6C6EF7B0}"/>
+              </a:ext>
+            </a:extLst>
+          </p:cNvPr>
+          <p:cNvSpPr txBox="1"/>
+          <p:nvPr/>
+        </p:nvSpPr>
+        <p:spPr>
+          <a:xfrm>
+            <a:off x="2743200" y="4800600"/>
+            <a:ext cx="8732520" cy="960120"/>
           </a:xfrm>
           <a:prstGeom prst="rect">
             <a:avLst/>
@@ -12286,40 +12533,79 @@
               </a:spcAft>
             </a:pPr>
             <a:r>
-              <a:rPr sz="1100" b="1">
-                <a:solidFill>
-                  <a:srgbClr val="0A1F6B"/>
-                </a:solidFill>
-                <a:latin typeface="Calibri"/>
-              </a:rPr>
-              <a:t>Rubric: </a:t>
-            </a:r>
-            <a:r>
-              <a:rPr sz="1100" b="0">
-                <a:solidFill>
-                  <a:srgbClr val="555555"/>
-                </a:solidFill>
-                <a:latin typeface="Calibri"/>
-              </a:rPr>
-              <a:t>Agentic thinking and autonomy (25 points)</a:t>
-            </a:r>
-            <a:r>
-              <a:rPr sz="1100" b="1">
-                <a:solidFill>
-                  <a:srgbClr val="0A1F6B"/>
-                </a:solidFill>
-                <a:latin typeface="Calibri"/>
-              </a:rPr>
-              <a:t>     |     Reference: </a:t>
-            </a:r>
-            <a:r>
-              <a:rPr sz="1100" b="0">
-                <a:solidFill>
-                  <a:srgbClr val="555555"/>
-                </a:solidFill>
-                <a:latin typeface="Calibri"/>
-              </a:rPr>
-              <a:t>Design handout, section 4</a:t>
+              <a:rPr sz="1400" b="0" dirty="0">
+                <a:solidFill>
+                  <a:srgbClr val="1A1A2E"/>
+                </a:solidFill>
+                <a:latin typeface="Calibri"/>
+              </a:rPr>
+              <a:t>Each run is stored in episodic memory; planner approvals and edits become feedback that tunes risk thresholds and supplier rankings</a:t>
+            </a:r>
+          </a:p>
+        </p:txBody>
+      </p:sp>
+      <p:sp>
+        <p:nvSpPr>
+          <p:cNvPr id="31" name="TextBox 30">
+            <a:extLst>
+              <a:ext uri="{FF2B5EF4-FFF2-40B4-BE49-F238E27FC236}">
+                <a16:creationId xmlns:a16="http://schemas.microsoft.com/office/drawing/2014/main" id="{FDDE1445-2C04-4FD8-5477-88967DF7C626}"/>
+              </a:ext>
+            </a:extLst>
+          </p:cNvPr>
+          <p:cNvSpPr txBox="1"/>
+          <p:nvPr/>
+        </p:nvSpPr>
+        <p:spPr>
+          <a:xfrm>
+            <a:off x="731520" y="6021357"/>
+            <a:ext cx="10698480" cy="301686"/>
+          </a:xfrm>
+          <a:prstGeom prst="rect">
+            <a:avLst/>
+          </a:prstGeom>
+          <a:noFill/>
+        </p:spPr>
+        <p:txBody>
+          <a:bodyPr wrap="square" anchor="ctr">
+            <a:spAutoFit/>
+          </a:bodyPr>
+          <a:lstStyle/>
+          <a:p>
+            <a:pPr algn="l">
+              <a:lnSpc>
+                <a:spcPct val="105000"/>
+              </a:lnSpc>
+              <a:spcAft>
+                <a:spcPts val="600"/>
+              </a:spcAft>
+            </a:pPr>
+            <a:r>
+              <a:rPr lang="de-CH" sz="1350" b="1" dirty="0">
+                <a:solidFill>
+                  <a:srgbClr val="FFFFFF"/>
+                </a:solidFill>
+                <a:latin typeface="Calibri"/>
+              </a:rPr>
+              <a:t>Honest </a:t>
+            </a:r>
+            <a:r>
+              <a:rPr lang="de-CH" sz="1350" b="1" dirty="0" err="1">
+                <a:solidFill>
+                  <a:srgbClr val="FFFFFF"/>
+                </a:solidFill>
+                <a:latin typeface="Calibri"/>
+              </a:rPr>
+              <a:t>note</a:t>
+            </a:r>
+            <a:r>
+              <a:rPr sz="1350" b="1" dirty="0">
+                <a:solidFill>
+                  <a:srgbClr val="FFFFFF"/>
+                </a:solidFill>
+                <a:latin typeface="Calibri"/>
+              </a:rPr>
+              <a:t>: agents do not self-learn for free; improvement comes from curated feedback.</a:t>
             </a:r>
           </a:p>
         </p:txBody>
@@ -12333,7 +12619,7 @@
 </file>
 
 <file path=ppt/slides/slide8.xml><?xml version="1.0" encoding="utf-8"?>
-<p:sld xmlns:a="http://schemas.openxmlformats.org/drawingml/2006/main" xmlns:p="http://schemas.openxmlformats.org/presentationml/2006/main" xmlns:r="http://schemas.openxmlformats.org/officeDocument/2006/relationships">
+<p:sld xmlns:a="http://schemas.openxmlformats.org/drawingml/2006/main" xmlns:r="http://schemas.openxmlformats.org/officeDocument/2006/relationships" xmlns:p="http://schemas.openxmlformats.org/presentationml/2006/main">
   <p:cSld>
     <p:spTree>
       <p:nvGrpSpPr>
@@ -12341,7 +12627,14 @@
         <p:cNvGrpSpPr/>
         <p:nvPr/>
       </p:nvGrpSpPr>
-      <p:grpSpPr/>
+      <p:grpSpPr>
+        <a:xfrm>
+          <a:off x="0" y="0"/>
+          <a:ext cx="0" cy="0"/>
+          <a:chOff x="0" y="0"/>
+          <a:chExt cx="0" cy="0"/>
+        </a:xfrm>
+      </p:grpSpPr>
       <p:sp>
         <p:nvSpPr>
           <p:cNvPr id="2" name="Rectangle 1"/>
@@ -12383,6 +12676,7 @@
           <a:lstStyle/>
           <a:p>
             <a:pPr algn="ctr"/>
+            <a:endParaRPr/>
           </a:p>
         </p:txBody>
       </p:sp>
@@ -12511,6 +12805,7 @@
           <a:lstStyle/>
           <a:p>
             <a:pPr algn="ctr"/>
+            <a:endParaRPr/>
           </a:p>
         </p:txBody>
       </p:sp>
@@ -12523,7 +12818,7 @@
         <p:spPr>
           <a:xfrm>
             <a:off x="548640" y="1417320"/>
-            <a:ext cx="11064240" cy="4023360"/>
+            <a:ext cx="11064240" cy="2662139"/>
           </a:xfrm>
           <a:prstGeom prst="rect">
             <a:avLst/>
@@ -12545,7 +12840,7 @@
               </a:spcAft>
             </a:pPr>
             <a:r>
-              <a:rPr sz="1400" b="1">
+              <a:rPr sz="1400" b="1" dirty="0">
                 <a:solidFill>
                   <a:srgbClr val="0E7C86"/>
                 </a:solidFill>
@@ -12554,7 +12849,7 @@
               <a:t>•  </a:t>
             </a:r>
             <a:r>
-              <a:rPr sz="1400" b="1">
+              <a:rPr sz="1400" b="1" dirty="0">
                 <a:solidFill>
                   <a:srgbClr val="1A1A2E"/>
                 </a:solidFill>
@@ -12563,7 +12858,7 @@
               <a:t>The trigger: </a:t>
             </a:r>
             <a:r>
-              <a:rPr sz="1400" b="0">
+              <a:rPr sz="1400" b="0" dirty="0">
                 <a:solidFill>
                   <a:srgbClr val="1A1A2E"/>
                 </a:solidFill>
@@ -12582,7 +12877,7 @@
               </a:spcAft>
             </a:pPr>
             <a:r>
-              <a:rPr sz="1400" b="1">
+              <a:rPr sz="1400" b="1" dirty="0">
                 <a:solidFill>
                   <a:srgbClr val="0E7C86"/>
                 </a:solidFill>
@@ -12591,16 +12886,25 @@
               <a:t>•  </a:t>
             </a:r>
             <a:r>
-              <a:rPr sz="1400" b="1">
+              <a:rPr lang="de-CH" sz="1400" b="1" dirty="0">
                 <a:solidFill>
                   <a:srgbClr val="1A1A2E"/>
                 </a:solidFill>
                 <a:latin typeface="Calibri"/>
               </a:rPr>
-              <a:t>Tracing it: </a:t>
-            </a:r>
-            <a:r>
-              <a:rPr sz="1400" b="0">
+              <a:t>Reason</a:t>
+            </a:r>
+            <a:r>
+              <a:rPr sz="1400" b="1" dirty="0">
+                <a:solidFill>
+                  <a:srgbClr val="1A1A2E"/>
+                </a:solidFill>
+                <a:latin typeface="Calibri"/>
+              </a:rPr>
+              <a:t>: </a:t>
+            </a:r>
+            <a:r>
+              <a:rPr sz="1400" b="0" dirty="0">
                 <a:solidFill>
                   <a:srgbClr val="1A1A2E"/>
                 </a:solidFill>
@@ -12619,7 +12923,7 @@
               </a:spcAft>
             </a:pPr>
             <a:r>
-              <a:rPr sz="1400" b="1">
+              <a:rPr sz="1400" b="1" dirty="0">
                 <a:solidFill>
                   <a:srgbClr val="0E7C86"/>
                 </a:solidFill>
@@ -12628,7 +12932,7 @@
               <a:t>•  </a:t>
             </a:r>
             <a:r>
-              <a:rPr sz="1400" b="1">
+              <a:rPr sz="1400" b="1" dirty="0">
                 <a:solidFill>
                   <a:srgbClr val="1A1A2E"/>
                 </a:solidFill>
@@ -12637,7 +12941,7 @@
               <a:t>Predicting: </a:t>
             </a:r>
             <a:r>
-              <a:rPr sz="1400" b="0">
+              <a:rPr sz="1400" b="0" dirty="0">
                 <a:solidFill>
                   <a:srgbClr val="1A1A2E"/>
                 </a:solidFill>
@@ -12656,7 +12960,7 @@
               </a:spcAft>
             </a:pPr>
             <a:r>
-              <a:rPr sz="1400" b="1">
+              <a:rPr sz="1400" b="1" dirty="0">
                 <a:solidFill>
                   <a:srgbClr val="0E7C86"/>
                 </a:solidFill>
@@ -12665,7 +12969,7 @@
               <a:t>•  </a:t>
             </a:r>
             <a:r>
-              <a:rPr sz="1400" b="1">
+              <a:rPr sz="1400" b="1" dirty="0">
                 <a:solidFill>
                   <a:srgbClr val="1A1A2E"/>
                 </a:solidFill>
@@ -12674,7 +12978,7 @@
               <a:t>Scoring: </a:t>
             </a:r>
             <a:r>
-              <a:rPr sz="1400" b="0">
+              <a:rPr sz="1400" b="0" dirty="0">
                 <a:solidFill>
                   <a:srgbClr val="1A1A2E"/>
                 </a:solidFill>
@@ -12693,7 +12997,7 @@
               </a:spcAft>
             </a:pPr>
             <a:r>
-              <a:rPr sz="1400" b="1">
+              <a:rPr sz="1400" b="1" dirty="0">
                 <a:solidFill>
                   <a:srgbClr val="0E7C86"/>
                 </a:solidFill>
@@ -12702,7 +13006,7 @@
               <a:t>•  </a:t>
             </a:r>
             <a:r>
-              <a:rPr sz="1400" b="1">
+              <a:rPr sz="1400" b="1" dirty="0">
                 <a:solidFill>
                   <a:srgbClr val="1A1A2E"/>
                 </a:solidFill>
@@ -12711,13 +13015,31 @@
               <a:t>Adapting: </a:t>
             </a:r>
             <a:r>
-              <a:rPr sz="1400" b="0">
+              <a:rPr sz="1400" b="0" dirty="0">
                 <a:solidFill>
                   <a:srgbClr val="1A1A2E"/>
                 </a:solidFill>
                 <a:latin typeface="Calibri"/>
               </a:rPr>
-              <a:t>the agent first considers rushing Nexa's shipment, then rejects that idea, because Nexa cannot ship without the missing chip, and instead switches to an approved European supplier, AltaControl, that avoids Taiwan altogether.</a:t>
+              <a:t>the agent first considers rushing Nexa's shipment, then rejects that idea, because Nexa cannot ship without the missing chip, and instead switches to an approved European supplier, </a:t>
+            </a:r>
+            <a:r>
+              <a:rPr sz="1400" b="0" dirty="0" err="1">
+                <a:solidFill>
+                  <a:srgbClr val="1A1A2E"/>
+                </a:solidFill>
+                <a:latin typeface="Calibri"/>
+              </a:rPr>
+              <a:t>AltaControl</a:t>
+            </a:r>
+            <a:r>
+              <a:rPr sz="1400" b="0" dirty="0">
+                <a:solidFill>
+                  <a:srgbClr val="1A1A2E"/>
+                </a:solidFill>
+                <a:latin typeface="Calibri"/>
+              </a:rPr>
+              <a:t>, that avoids Taiwan altogether.</a:t>
             </a:r>
           </a:p>
           <a:p>
@@ -12730,7 +13052,7 @@
               </a:spcAft>
             </a:pPr>
             <a:r>
-              <a:rPr sz="1400" b="1">
+              <a:rPr sz="1400" b="1" dirty="0">
                 <a:solidFill>
                   <a:srgbClr val="0E7C86"/>
                 </a:solidFill>
@@ -12739,16 +13061,52 @@
               <a:t>•  </a:t>
             </a:r>
             <a:r>
-              <a:rPr sz="1400" b="1">
+              <a:rPr sz="1400" b="1" dirty="0">
                 <a:solidFill>
                   <a:srgbClr val="1A1A2E"/>
                 </a:solidFill>
                 <a:latin typeface="Calibri"/>
               </a:rPr>
-              <a:t>Acting, with a person: </a:t>
-            </a:r>
-            <a:r>
-              <a:rPr sz="1400" b="0">
+              <a:t>Acting, with </a:t>
+            </a:r>
+            <a:r>
+              <a:rPr lang="de-CH" sz="1400" b="1" dirty="0">
+                <a:solidFill>
+                  <a:srgbClr val="1A1A2E"/>
+                </a:solidFill>
+                <a:latin typeface="Calibri"/>
+              </a:rPr>
+              <a:t>human-in-</a:t>
+            </a:r>
+            <a:r>
+              <a:rPr lang="de-CH" sz="1400" b="1" dirty="0" err="1">
+                <a:solidFill>
+                  <a:srgbClr val="1A1A2E"/>
+                </a:solidFill>
+                <a:latin typeface="Calibri"/>
+              </a:rPr>
+              <a:t>the</a:t>
+            </a:r>
+            <a:r>
+              <a:rPr lang="de-CH" sz="1400" b="1" dirty="0">
+                <a:solidFill>
+                  <a:srgbClr val="1A1A2E"/>
+                </a:solidFill>
+                <a:latin typeface="Calibri"/>
+              </a:rPr>
+              <a:t>-loop</a:t>
+            </a:r>
+            <a:r>
+              <a:rPr sz="1400" b="1" dirty="0">
+                <a:solidFill>
+                  <a:srgbClr val="1A1A2E"/>
+                </a:solidFill>
+                <a:latin typeface="Calibri"/>
+              </a:rPr>
+              <a:t>: </a:t>
+            </a:r>
+            <a:r>
+              <a:rPr sz="1400" b="0" dirty="0">
                 <a:solidFill>
                   <a:srgbClr val="1A1A2E"/>
                 </a:solidFill>
@@ -12800,6 +13158,7 @@
           <a:lstStyle/>
           <a:p>
             <a:pPr algn="ctr"/>
+            <a:endParaRPr/>
           </a:p>
         </p:txBody>
       </p:sp>
@@ -12811,8 +13170,8 @@
         </p:nvSpPr>
         <p:spPr>
           <a:xfrm>
-            <a:off x="731520" y="5577840"/>
-            <a:ext cx="10698480" cy="685800"/>
+            <a:off x="731520" y="5652974"/>
+            <a:ext cx="10698480" cy="535531"/>
           </a:xfrm>
           <a:prstGeom prst="rect">
             <a:avLst/>
@@ -12825,7 +13184,7 @@
           </a:bodyPr>
           <a:lstStyle/>
           <a:p>
-            <a:pPr algn="l">
+            <a:pPr>
               <a:lnSpc>
                 <a:spcPct val="105000"/>
               </a:lnSpc>
@@ -12834,7 +13193,7 @@
               </a:spcAft>
             </a:pPr>
             <a:r>
-              <a:rPr sz="1400" b="1">
+              <a:rPr sz="1400" b="1" dirty="0">
                 <a:solidFill>
                   <a:srgbClr val="6CB400"/>
                 </a:solidFill>
@@ -12843,7 +13202,7 @@
               <a:t>The result: </a:t>
             </a:r>
             <a:r>
-              <a:rPr sz="1400" b="0">
+              <a:rPr sz="1400" b="0" dirty="0">
                 <a:solidFill>
                   <a:srgbClr val="FFFFFF"/>
                 </a:solidFill>
@@ -12851,6 +13210,61 @@
               </a:rPr>
               <a:t>a critical risk caught around three weeks before the line would have stopped, with a costed plan ready and a complete record of every step. We can run this live.</a:t>
             </a:r>
+            <a:r>
+              <a:rPr lang="de-CH" sz="1400" b="0" dirty="0">
+                <a:solidFill>
+                  <a:srgbClr val="FFFFFF"/>
+                </a:solidFill>
+                <a:latin typeface="Calibri"/>
+              </a:rPr>
+              <a:t> </a:t>
+            </a:r>
+            <a:r>
+              <a:rPr lang="de-CH" sz="1400" dirty="0">
+                <a:solidFill>
+                  <a:srgbClr val="FFFFFF"/>
+                </a:solidFill>
+              </a:rPr>
+              <a:t>https://</a:t>
+            </a:r>
+            <a:r>
+              <a:rPr lang="de-CH" sz="1400" dirty="0" err="1">
+                <a:solidFill>
+                  <a:srgbClr val="FFFFFF"/>
+                </a:solidFill>
+              </a:rPr>
+              <a:t>agentic</a:t>
+            </a:r>
+            <a:r>
+              <a:rPr lang="de-CH" sz="1400" dirty="0">
+                <a:solidFill>
+                  <a:srgbClr val="FFFFFF"/>
+                </a:solidFill>
+              </a:rPr>
+              <a:t>-ai-</a:t>
+            </a:r>
+            <a:r>
+              <a:rPr lang="de-CH" sz="1400" dirty="0" err="1">
+                <a:solidFill>
+                  <a:srgbClr val="FFFFFF"/>
+                </a:solidFill>
+              </a:rPr>
+              <a:t>sentinel.streamlit.app</a:t>
+            </a:r>
+            <a:r>
+              <a:rPr lang="de-CH" sz="1400" dirty="0">
+                <a:solidFill>
+                  <a:srgbClr val="FFFFFF"/>
+                </a:solidFill>
+              </a:rPr>
+              <a:t>/</a:t>
+            </a:r>
+            <a:endParaRPr sz="1400" b="0" dirty="0">
+              <a:solidFill>
+                <a:srgbClr val="FFFFFF"/>
+              </a:solidFill>
+              <a:latin typeface="Calibri"/>
+            </a:endParaRPr>
           </a:p>
         </p:txBody>
       </p:sp>
@@ -12895,75 +13309,7 @@
           <a:lstStyle/>
           <a:p>
             <a:pPr algn="ctr"/>
-          </a:p>
-        </p:txBody>
-      </p:sp>
-      <p:sp>
-        <p:nvSpPr>
-          <p:cNvPr id="10" name="TextBox 9"/>
-          <p:cNvSpPr txBox="1"/>
-          <p:nvPr/>
-        </p:nvSpPr>
-        <p:spPr>
-          <a:xfrm>
-            <a:off x="502920" y="6519672"/>
-            <a:ext cx="11155680" cy="310896"/>
-          </a:xfrm>
-          <a:prstGeom prst="rect">
-            <a:avLst/>
-          </a:prstGeom>
-          <a:noFill/>
-        </p:spPr>
-        <p:txBody>
-          <a:bodyPr wrap="square" anchor="ctr">
-            <a:spAutoFit/>
-          </a:bodyPr>
-          <a:lstStyle/>
-          <a:p>
-            <a:pPr algn="l">
-              <a:lnSpc>
-                <a:spcPct val="105000"/>
-              </a:lnSpc>
-              <a:spcAft>
-                <a:spcPts val="600"/>
-              </a:spcAft>
-            </a:pPr>
-            <a:r>
-              <a:rPr sz="1100" b="1">
-                <a:solidFill>
-                  <a:srgbClr val="0A1F6B"/>
-                </a:solidFill>
-                <a:latin typeface="Calibri"/>
-              </a:rPr>
-              <a:t>Rubric: </a:t>
-            </a:r>
-            <a:r>
-              <a:rPr sz="1100" b="0">
-                <a:solidFill>
-                  <a:srgbClr val="555555"/>
-                </a:solidFill>
-                <a:latin typeface="Calibri"/>
-              </a:rPr>
-              <a:t>Agentic thinking and autonomy (25 points)</a:t>
-            </a:r>
-            <a:r>
-              <a:rPr sz="1100" b="1">
-                <a:solidFill>
-                  <a:srgbClr val="0A1F6B"/>
-                </a:solidFill>
-                <a:latin typeface="Calibri"/>
-              </a:rPr>
-              <a:t>     |     Reference: </a:t>
-            </a:r>
-            <a:r>
-              <a:rPr sz="1100" b="0">
-                <a:solidFill>
-                  <a:srgbClr val="555555"/>
-                </a:solidFill>
-                <a:latin typeface="Calibri"/>
-              </a:rPr>
-              <a:t>Design handout, section 7</a:t>
-            </a:r>
+            <a:endParaRPr/>
           </a:p>
         </p:txBody>
       </p:sp>
@@ -12976,7 +13322,7 @@
 </file>
 
 <file path=ppt/slides/slide9.xml><?xml version="1.0" encoding="utf-8"?>
-<p:sld xmlns:a="http://schemas.openxmlformats.org/drawingml/2006/main" xmlns:p="http://schemas.openxmlformats.org/presentationml/2006/main" xmlns:r="http://schemas.openxmlformats.org/officeDocument/2006/relationships">
+<p:sld xmlns:a="http://schemas.openxmlformats.org/drawingml/2006/main" xmlns:r="http://schemas.openxmlformats.org/officeDocument/2006/relationships" xmlns:p="http://schemas.openxmlformats.org/presentationml/2006/main">
   <p:cSld>
     <p:spTree>
       <p:nvGrpSpPr>
@@ -12984,7 +13330,14 @@
         <p:cNvGrpSpPr/>
         <p:nvPr/>
       </p:nvGrpSpPr>
-      <p:grpSpPr/>
+      <p:grpSpPr>
+        <a:xfrm>
+          <a:off x="0" y="0"/>
+          <a:ext cx="0" cy="0"/>
+          <a:chOff x="0" y="0"/>
+          <a:chExt cx="0" cy="0"/>
+        </a:xfrm>
+      </p:grpSpPr>
       <p:sp>
         <p:nvSpPr>
           <p:cNvPr id="2" name="Rectangle 1"/>
@@ -13026,6 +13379,7 @@
           <a:lstStyle/>
           <a:p>
             <a:pPr algn="ctr"/>
+            <a:endParaRPr/>
           </a:p>
         </p:txBody>
       </p:sp>
@@ -13154,6 +13508,7 @@
           <a:lstStyle/>
           <a:p>
             <a:pPr algn="ctr"/>
+            <a:endParaRPr/>
           </a:p>
         </p:txBody>
       </p:sp>
@@ -13163,7 +13518,13 @@
           <p:cNvGraphicFramePr>
             <a:graphicFrameLocks noGrp="1"/>
           </p:cNvGraphicFramePr>
-          <p:nvPr/>
+          <p:nvPr>
+            <p:extLst>
+              <p:ext uri="{D42A27DB-BD31-4B8C-83A1-F6EECF244321}">
+                <p14:modId xmlns:p14="http://schemas.microsoft.com/office/powerpoint/2010/main" val="3669741928"/>
+              </p:ext>
+            </p:extLst>
+          </p:nvPr>
         </p:nvGraphicFramePr>
         <p:xfrm>
           <a:off x="548640" y="1417320"/>
@@ -13176,8 +13537,20 @@
                 <a:tableStyleId>{5C22544A-7EE6-4342-B048-85BDC9FD1C3A}</a:tableStyleId>
               </a:tblPr>
               <a:tblGrid>
-                <a:gridCol w="3931920"/>
-                <a:gridCol w="7132320"/>
+                <a:gridCol w="3931920">
+                  <a:extLst>
+                    <a:ext uri="{9D8B030D-6E8A-4147-A177-3AD203B41FA5}">
+                      <a16:colId xmlns:a16="http://schemas.microsoft.com/office/drawing/2014/main" val="20000"/>
+                    </a:ext>
+                  </a:extLst>
+                </a:gridCol>
+                <a:gridCol w="7132320">
+                  <a:extLst>
+                    <a:ext uri="{9D8B030D-6E8A-4147-A177-3AD203B41FA5}">
+                      <a16:colId xmlns:a16="http://schemas.microsoft.com/office/drawing/2014/main" val="20001"/>
+                    </a:ext>
+                  </a:extLst>
+                </a:gridCol>
               </a:tblGrid>
               <a:tr h="566928">
                 <a:tc>
@@ -13186,14 +13559,20 @@
                     <a:lstStyle/>
                     <a:p>
                       <a:r>
-                        <a:rPr sz="1300" b="1">
+                        <a:rPr lang="de-CH" sz="1300" b="1" dirty="0">
                           <a:solidFill>
                             <a:srgbClr val="FFFFFF"/>
                           </a:solidFill>
                           <a:latin typeface="Calibri"/>
                         </a:rPr>
-                        <a:t>What could go wrong</a:t>
+                        <a:t>Risk</a:t>
                       </a:r>
+                      <a:endParaRPr sz="1300" b="1" dirty="0">
+                        <a:solidFill>
+                          <a:srgbClr val="FFFFFF"/>
+                        </a:solidFill>
+                        <a:latin typeface="Calibri"/>
+                      </a:endParaRPr>
                     </a:p>
                   </a:txBody>
                   <a:tcPr>
@@ -13208,14 +13587,20 @@
                     <a:lstStyle/>
                     <a:p>
                       <a:r>
-                        <a:rPr sz="1300" b="1">
+                        <a:rPr lang="de-CH" sz="1300" b="1" dirty="0" err="1">
                           <a:solidFill>
                             <a:srgbClr val="FFFFFF"/>
                           </a:solidFill>
                           <a:latin typeface="Calibri"/>
                         </a:rPr>
-                        <a:t>How we prevent it</a:t>
+                        <a:t>Guardrail</a:t>
                       </a:r>
+                      <a:endParaRPr sz="1300" b="1" dirty="0">
+                        <a:solidFill>
+                          <a:srgbClr val="FFFFFF"/>
+                        </a:solidFill>
+                        <a:latin typeface="Calibri"/>
+                      </a:endParaRPr>
                     </a:p>
                   </a:txBody>
                   <a:tcPr>
@@ -13224,6 +13609,11 @@
                     </a:solidFill>
                   </a:tcPr>
                 </a:tc>
+                <a:extLst>
+                  <a:ext uri="{0D108BD9-81ED-4DB2-BD59-A6C34878D82A}">
+                    <a16:rowId xmlns:a16="http://schemas.microsoft.com/office/drawing/2014/main" val="10000"/>
+                  </a:ext>
+                </a:extLst>
               </a:tr>
               <a:tr h="566928">
                 <a:tc>
@@ -13238,7 +13628,7 @@
                           </a:solidFill>
                           <a:latin typeface="Calibri"/>
                         </a:rPr>
-                        <a:t>A wrong or irreversible action</a:t>
+                        <a:t>Wrong or irreversible action</a:t>
                       </a:r>
                     </a:p>
                   </a:txBody>
@@ -13260,7 +13650,7 @@
                           </a:solidFill>
                           <a:latin typeface="Calibri"/>
                         </a:rPr>
-                        <a:t>Actions begin as drafts; anything costly or live needs a person to sign off.</a:t>
+                        <a:t>Writes are draft-by-default; costly or live writes require sign-off</a:t>
                       </a:r>
                     </a:p>
                   </a:txBody>
@@ -13270,6 +13660,11 @@
                     </a:solidFill>
                   </a:tcPr>
                 </a:tc>
+                <a:extLst>
+                  <a:ext uri="{0D108BD9-81ED-4DB2-BD59-A6C34878D82A}">
+                    <a16:rowId xmlns:a16="http://schemas.microsoft.com/office/drawing/2014/main" val="10001"/>
+                  </a:ext>
+                </a:extLst>
               </a:tr>
               <a:tr h="566928">
                 <a:tc>
@@ -13284,7 +13679,7 @@
                           </a:solidFill>
                           <a:latin typeface="Calibri"/>
                         </a:rPr>
-                        <a:t>An invented or imagined event</a:t>
+                        <a:t>Hallucinated event</a:t>
                       </a:r>
                     </a:p>
                   </a:txBody>
@@ -13306,7 +13701,7 @@
                           </a:solidFill>
                           <a:latin typeface="Calibri"/>
                         </a:rPr>
-                        <a:t>The risk specialist must point to a real signal in the feed; it may never guess.</a:t>
+                        <a:t>The Risk agent must cite a real feed event; no invention</a:t>
                       </a:r>
                     </a:p>
                   </a:txBody>
@@ -13316,6 +13711,11 @@
                     </a:solidFill>
                   </a:tcPr>
                 </a:tc>
+                <a:extLst>
+                  <a:ext uri="{0D108BD9-81ED-4DB2-BD59-A6C34878D82A}">
+                    <a16:rowId xmlns:a16="http://schemas.microsoft.com/office/drawing/2014/main" val="10002"/>
+                  </a:ext>
+                </a:extLst>
               </a:tr>
               <a:tr h="566928">
                 <a:tc>
@@ -13330,7 +13730,7 @@
                           </a:solidFill>
                           <a:latin typeface="Calibri"/>
                         </a:rPr>
-                        <a:t>Spending too much</a:t>
+                        <a:t>Over-spend</a:t>
                       </a:r>
                     </a:p>
                   </a:txBody>
@@ -13352,7 +13752,7 @@
                           </a:solidFill>
                           <a:latin typeface="Calibri"/>
                         </a:rPr>
-                        <a:t>A firm spending limit escalates large commitments, and orders go only to approved suppliers.</a:t>
+                        <a:t>Hard spend limit auto-escalates commits; scoped to qualified suppliers</a:t>
                       </a:r>
                     </a:p>
                   </a:txBody>
@@ -13362,6 +13762,11 @@
                     </a:solidFill>
                   </a:tcPr>
                 </a:tc>
+                <a:extLst>
+                  <a:ext uri="{0D108BD9-81ED-4DB2-BD59-A6C34878D82A}">
+                    <a16:rowId xmlns:a16="http://schemas.microsoft.com/office/drawing/2014/main" val="10003"/>
+                  </a:ext>
+                </a:extLst>
               </a:tr>
               <a:tr h="566928">
                 <a:tc>
@@ -13370,13 +13775,13 @@
                     <a:lstStyle/>
                     <a:p>
                       <a:r>
-                        <a:rPr sz="1300">
+                        <a:rPr sz="1300" dirty="0">
                           <a:solidFill>
                             <a:srgbClr val="1A1A2E"/>
                           </a:solidFill>
                           <a:latin typeface="Calibri"/>
                         </a:rPr>
-                        <a:t>One agent's mistake spreading</a:t>
+                        <a:t>Cascading multi-agent error</a:t>
                       </a:r>
                     </a:p>
                   </a:txBody>
@@ -13398,7 +13803,7 @@
                           </a:solidFill>
                           <a:latin typeface="Calibri"/>
                         </a:rPr>
-                        <a:t>A light supervisor, tightly limited tools, and a full trace of every step keep errors contained.</a:t>
+                        <a:t>Thin supervisor, tight tool scopes, full tracing for audit</a:t>
                       </a:r>
                     </a:p>
                   </a:txBody>
@@ -13408,6 +13813,11 @@
                     </a:solidFill>
                   </a:tcPr>
                 </a:tc>
+                <a:extLst>
+                  <a:ext uri="{0D108BD9-81ED-4DB2-BD59-A6C34878D82A}">
+                    <a16:rowId xmlns:a16="http://schemas.microsoft.com/office/drawing/2014/main" val="10004"/>
+                  </a:ext>
+                </a:extLst>
               </a:tr>
               <a:tr h="566928">
                 <a:tc>
@@ -13416,13 +13826,13 @@
                     <a:lstStyle/>
                     <a:p>
                       <a:r>
-                        <a:rPr sz="1300">
+                        <a:rPr sz="1300" dirty="0">
                           <a:solidFill>
                             <a:srgbClr val="1A1A2E"/>
                           </a:solidFill>
                           <a:latin typeface="Calibri"/>
                         </a:rPr>
-                        <a:t>Hidden instructions inside supplier messages</a:t>
+                        <a:t>Prompt injection via supplier text</a:t>
                       </a:r>
                     </a:p>
                   </a:txBody>
@@ -13438,13 +13848,13 @@
                     <a:lstStyle/>
                     <a:p>
                       <a:r>
-                        <a:rPr sz="1300">
+                        <a:rPr sz="1300" dirty="0">
                           <a:solidFill>
                             <a:srgbClr val="1A1A2E"/>
                           </a:solidFill>
                           <a:latin typeface="Calibri"/>
                         </a:rPr>
-                        <a:t>Outside text is always treated as information to read, never as commands to follow.</a:t>
+                        <a:t>External text treated as data, never as commands</a:t>
                       </a:r>
                     </a:p>
                   </a:txBody>
@@ -13454,6 +13864,11 @@
                     </a:solidFill>
                   </a:tcPr>
                 </a:tc>
+                <a:extLst>
+                  <a:ext uri="{0D108BD9-81ED-4DB2-BD59-A6C34878D82A}">
+                    <a16:rowId xmlns:a16="http://schemas.microsoft.com/office/drawing/2014/main" val="10005"/>
+                  </a:ext>
+                </a:extLst>
               </a:tr>
             </a:tbl>
           </a:graphicData>
@@ -13500,6 +13915,7 @@
           <a:lstStyle/>
           <a:p>
             <a:pPr algn="ctr"/>
+            <a:endParaRPr/>
           </a:p>
         </p:txBody>
       </p:sp>
@@ -13511,8 +13927,8 @@
         </p:nvSpPr>
         <p:spPr>
           <a:xfrm>
-            <a:off x="731520" y="5303520"/>
-            <a:ext cx="10698480" cy="777240"/>
+            <a:off x="731520" y="5424374"/>
+            <a:ext cx="10698480" cy="535531"/>
           </a:xfrm>
           <a:prstGeom prst="rect">
             <a:avLst/>
@@ -13534,16 +13950,34 @@
               </a:spcAft>
             </a:pPr>
             <a:r>
-              <a:rPr sz="1400" b="1">
+              <a:rPr lang="de-CH" sz="1400" b="1" dirty="0">
                 <a:solidFill>
                   <a:srgbClr val="C02A2A"/>
                 </a:solidFill>
                 <a:latin typeface="Calibri"/>
               </a:rPr>
-              <a:t>A person stays in the loop </a:t>
-            </a:r>
-            <a:r>
-              <a:rPr sz="1400" b="0">
+              <a:t>Human-in-</a:t>
+            </a:r>
+            <a:r>
+              <a:rPr lang="de-CH" sz="1400" b="1" dirty="0" err="1">
+                <a:solidFill>
+                  <a:srgbClr val="C02A2A"/>
+                </a:solidFill>
+                <a:latin typeface="Calibri"/>
+              </a:rPr>
+              <a:t>the</a:t>
+            </a:r>
+            <a:r>
+              <a:rPr lang="de-CH" sz="1400" b="1" dirty="0">
+                <a:solidFill>
+                  <a:srgbClr val="C02A2A"/>
+                </a:solidFill>
+                <a:latin typeface="Calibri"/>
+              </a:rPr>
+              <a:t>-loop </a:t>
+            </a:r>
+            <a:r>
+              <a:rPr sz="1400" b="0" dirty="0">
                 <a:solidFill>
                   <a:srgbClr val="1A1A2E"/>
                 </a:solidFill>
@@ -13595,75 +14029,7 @@
           <a:lstStyle/>
           <a:p>
             <a:pPr algn="ctr"/>
-          </a:p>
-        </p:txBody>
-      </p:sp>
-      <p:sp>
-        <p:nvSpPr>
-          <p:cNvPr id="10" name="TextBox 9"/>
-          <p:cNvSpPr txBox="1"/>
-          <p:nvPr/>
-        </p:nvSpPr>
-        <p:spPr>
-          <a:xfrm>
-            <a:off x="502920" y="6519672"/>
-            <a:ext cx="11155680" cy="310896"/>
-          </a:xfrm>
-          <a:prstGeom prst="rect">
-            <a:avLst/>
-          </a:prstGeom>
-          <a:noFill/>
-        </p:spPr>
-        <p:txBody>
-          <a:bodyPr wrap="square" anchor="ctr">
-            <a:spAutoFit/>
-          </a:bodyPr>
-          <a:lstStyle/>
-          <a:p>
-            <a:pPr algn="l">
-              <a:lnSpc>
-                <a:spcPct val="105000"/>
-              </a:lnSpc>
-              <a:spcAft>
-                <a:spcPts val="600"/>
-              </a:spcAft>
-            </a:pPr>
-            <a:r>
-              <a:rPr sz="1100" b="1">
-                <a:solidFill>
-                  <a:srgbClr val="0A1F6B"/>
-                </a:solidFill>
-                <a:latin typeface="Calibri"/>
-              </a:rPr>
-              <a:t>Rubric: </a:t>
-            </a:r>
-            <a:r>
-              <a:rPr sz="1100" b="0">
-                <a:solidFill>
-                  <a:srgbClr val="555555"/>
-                </a:solidFill>
-                <a:latin typeface="Calibri"/>
-              </a:rPr>
-              <a:t>Risk awareness and mitigation (15 points)</a:t>
-            </a:r>
-            <a:r>
-              <a:rPr sz="1100" b="1">
-                <a:solidFill>
-                  <a:srgbClr val="0A1F6B"/>
-                </a:solidFill>
-                <a:latin typeface="Calibri"/>
-              </a:rPr>
-              <a:t>     |     Reference: </a:t>
-            </a:r>
-            <a:r>
-              <a:rPr sz="1100" b="0">
-                <a:solidFill>
-                  <a:srgbClr val="555555"/>
-                </a:solidFill>
-                <a:latin typeface="Calibri"/>
-              </a:rPr>
-              <a:t>Design handout, section 6</a:t>
-            </a:r>
+            <a:endParaRPr/>
           </a:p>
         </p:txBody>
       </p:sp>
@@ -14006,44 +14372,44 @@
         <a:sysClr val="window" lastClr="FFFFFF"/>
       </a:lt1>
       <a:dk2>
-        <a:srgbClr val="1F497D"/>
+        <a:srgbClr val="0E2841"/>
       </a:dk2>
       <a:lt2>
-        <a:srgbClr val="EEECE1"/>
+        <a:srgbClr val="E8E8E8"/>
       </a:lt2>
       <a:accent1>
-        <a:srgbClr val="4F81BD"/>
+        <a:srgbClr val="156082"/>
       </a:accent1>
       <a:accent2>
-        <a:srgbClr val="C0504D"/>
+        <a:srgbClr val="E97132"/>
       </a:accent2>
       <a:accent3>
-        <a:srgbClr val="9BBB59"/>
+        <a:srgbClr val="196B24"/>
       </a:accent3>
       <a:accent4>
-        <a:srgbClr val="8064A2"/>
+        <a:srgbClr val="0F9ED5"/>
       </a:accent4>
       <a:accent5>
-        <a:srgbClr val="4BACC6"/>
+        <a:srgbClr val="A02B93"/>
       </a:accent5>
       <a:accent6>
-        <a:srgbClr val="F79646"/>
+        <a:srgbClr val="4EA72E"/>
       </a:accent6>
       <a:hlink>
-        <a:srgbClr val="0000FF"/>
+        <a:srgbClr val="467886"/>
       </a:hlink>
       <a:folHlink>
-        <a:srgbClr val="800080"/>
+        <a:srgbClr val="96607D"/>
       </a:folHlink>
     </a:clrScheme>
     <a:fontScheme name="Office">
       <a:majorFont>
-        <a:latin typeface="Calibri"/>
+        <a:latin typeface="Aptos Display" panose="02110004020202020204"/>
         <a:ea typeface=""/>
         <a:cs typeface=""/>
-        <a:font script="Jpan" typeface="ＭＳ Ｐゴシック"/>
+        <a:font script="Jpan" typeface="游ゴシック Light"/>
         <a:font script="Hang" typeface="맑은 고딕"/>
-        <a:font script="Hans" typeface="宋体"/>
+        <a:font script="Hans" typeface="等线 Light"/>
         <a:font script="Hant" typeface="新細明體"/>
         <a:font script="Arab" typeface="Times New Roman"/>
         <a:font script="Hebr" typeface="Times New Roman"/>
@@ -14071,14 +14437,31 @@
         <a:font script="Viet" typeface="Times New Roman"/>
         <a:font script="Uigh" typeface="Microsoft Uighur"/>
         <a:font script="Geor" typeface="Sylfaen"/>
+        <a:font script="Armn" typeface="Arial"/>
+        <a:font script="Bugi" typeface="Leelawadee UI"/>
+        <a:font script="Bopo" typeface="Microsoft JhengHei"/>
+        <a:font script="Java" typeface="Javanese Text"/>
+        <a:font script="Lisu" typeface="Segoe UI"/>
+        <a:font script="Mymr" typeface="Myanmar Text"/>
+        <a:font script="Nkoo" typeface="Ebrima"/>
+        <a:font script="Olck" typeface="Nirmala UI"/>
+        <a:font script="Osma" typeface="Ebrima"/>
+        <a:font script="Phag" typeface="Phagspa"/>
+        <a:font script="Syrn" typeface="Estrangelo Edessa"/>
+        <a:font script="Syrj" typeface="Estrangelo Edessa"/>
+        <a:font script="Syre" typeface="Estrangelo Edessa"/>
+        <a:font script="Sora" typeface="Nirmala UI"/>
+        <a:font script="Tale" typeface="Microsoft Tai Le"/>
+        <a:font script="Talu" typeface="Microsoft New Tai Lue"/>
+        <a:font script="Tfng" typeface="Ebrima"/>
       </a:majorFont>
       <a:minorFont>
-        <a:latin typeface="Calibri"/>
+        <a:latin typeface="Aptos" panose="02110004020202020204"/>
         <a:ea typeface=""/>
         <a:cs typeface=""/>
-        <a:font script="Jpan" typeface="ＭＳ Ｐゴシック"/>
+        <a:font script="Jpan" typeface="游ゴシック"/>
         <a:font script="Hang" typeface="맑은 고딕"/>
-        <a:font script="Hans" typeface="宋体"/>
+        <a:font script="Hans" typeface="等线"/>
         <a:font script="Hant" typeface="新細明體"/>
         <a:font script="Arab" typeface="Arial"/>
         <a:font script="Hebr" typeface="Arial"/>
@@ -14106,6 +14489,23 @@
         <a:font script="Viet" typeface="Arial"/>
         <a:font script="Uigh" typeface="Microsoft Uighur"/>
         <a:font script="Geor" typeface="Sylfaen"/>
+        <a:font script="Armn" typeface="Arial"/>
+        <a:font script="Bugi" typeface="Leelawadee UI"/>
+        <a:font script="Bopo" typeface="Microsoft JhengHei"/>
+        <a:font script="Java" typeface="Javanese Text"/>
+        <a:font script="Lisu" typeface="Segoe UI"/>
+        <a:font script="Mymr" typeface="Myanmar Text"/>
+        <a:font script="Nkoo" typeface="Ebrima"/>
+        <a:font script="Olck" typeface="Nirmala UI"/>
+        <a:font script="Osma" typeface="Ebrima"/>
+        <a:font script="Phag" typeface="Phagspa"/>
+        <a:font script="Syrn" typeface="Estrangelo Edessa"/>
+        <a:font script="Syrj" typeface="Estrangelo Edessa"/>
+        <a:font script="Syre" typeface="Estrangelo Edessa"/>
+        <a:font script="Sora" typeface="Nirmala UI"/>
+        <a:font script="Tale" typeface="Microsoft Tai Le"/>
+        <a:font script="Talu" typeface="Microsoft New Tai Lue"/>
+        <a:font script="Tfng" typeface="Ebrima"/>
       </a:minorFont>
     </a:fontScheme>
     <a:fmtScheme name="Office">
@@ -14117,180 +14517,136 @@
           <a:gsLst>
             <a:gs pos="0">
               <a:schemeClr val="phClr">
-                <a:tint val="50000"/>
-                <a:satMod val="300000"/>
+                <a:lumMod val="110000"/>
+                <a:satMod val="105000"/>
+                <a:tint val="67000"/>
               </a:schemeClr>
             </a:gs>
-            <a:gs pos="35000">
+            <a:gs pos="50000">
               <a:schemeClr val="phClr">
-                <a:tint val="37000"/>
-                <a:satMod val="300000"/>
+                <a:lumMod val="105000"/>
+                <a:satMod val="103000"/>
+                <a:tint val="73000"/>
               </a:schemeClr>
             </a:gs>
             <a:gs pos="100000">
               <a:schemeClr val="phClr">
-                <a:tint val="15000"/>
-                <a:satMod val="350000"/>
+                <a:lumMod val="105000"/>
+                <a:satMod val="109000"/>
+                <a:tint val="81000"/>
               </a:schemeClr>
             </a:gs>
           </a:gsLst>
-          <a:lin ang="16200000" scaled="1"/>
+          <a:lin ang="5400000" scaled="0"/>
         </a:gradFill>
         <a:gradFill rotWithShape="1">
           <a:gsLst>
             <a:gs pos="0">
               <a:schemeClr val="phClr">
-                <a:tint val="100000"/>
+                <a:satMod val="103000"/>
+                <a:lumMod val="102000"/>
+                <a:tint val="94000"/>
+              </a:schemeClr>
+            </a:gs>
+            <a:gs pos="50000">
+              <a:schemeClr val="phClr">
+                <a:satMod val="110000"/>
+                <a:lumMod val="100000"/>
                 <a:shade val="100000"/>
-                <a:satMod val="130000"/>
               </a:schemeClr>
             </a:gs>
             <a:gs pos="100000">
               <a:schemeClr val="phClr">
-                <a:tint val="50000"/>
-                <a:shade val="100000"/>
-                <a:satMod val="350000"/>
+                <a:lumMod val="99000"/>
+                <a:satMod val="120000"/>
+                <a:shade val="78000"/>
               </a:schemeClr>
             </a:gs>
           </a:gsLst>
-          <a:lin ang="16200000" scaled="0"/>
+          <a:lin ang="5400000" scaled="0"/>
         </a:gradFill>
       </a:fillStyleLst>
       <a:lnStyleLst>
-        <a:ln w="9525" cap="flat" cmpd="sng" algn="ctr">
+        <a:ln w="12700" cap="flat" cmpd="sng" algn="ctr">
           <a:solidFill>
-            <a:schemeClr val="phClr">
-              <a:shade val="95000"/>
-              <a:satMod val="105000"/>
-            </a:schemeClr>
+            <a:schemeClr val="phClr"/>
           </a:solidFill>
           <a:prstDash val="solid"/>
+          <a:miter lim="800000"/>
+        </a:ln>
+        <a:ln w="19050" cap="flat" cmpd="sng" algn="ctr">
+          <a:solidFill>
+            <a:schemeClr val="phClr"/>
+          </a:solidFill>
+          <a:prstDash val="solid"/>
+          <a:miter lim="800000"/>
         </a:ln>
         <a:ln w="25400" cap="flat" cmpd="sng" algn="ctr">
           <a:solidFill>
             <a:schemeClr val="phClr"/>
           </a:solidFill>
           <a:prstDash val="solid"/>
-        </a:ln>
-        <a:ln w="38100" cap="flat" cmpd="sng" algn="ctr">
-          <a:solidFill>
-            <a:schemeClr val="phClr"/>
-          </a:solidFill>
-          <a:prstDash val="solid"/>
+          <a:miter lim="800000"/>
         </a:ln>
       </a:lnStyleLst>
       <a:effectStyleLst>
         <a:effectStyle>
+          <a:effectLst/>
+        </a:effectStyle>
+        <a:effectStyle>
+          <a:effectLst/>
+        </a:effectStyle>
+        <a:effectStyle>
           <a:effectLst>
-            <a:outerShdw blurRad="40000" dist="20000" dir="5400000" rotWithShape="0">
+            <a:outerShdw blurRad="57150" dist="19050" dir="5400000" algn="ctr" rotWithShape="0">
               <a:srgbClr val="000000">
-                <a:alpha val="38000"/>
+                <a:alpha val="63000"/>
               </a:srgbClr>
             </a:outerShdw>
           </a:effectLst>
-        </a:effectStyle>
-        <a:effectStyle>
-          <a:effectLst>
-            <a:outerShdw blurRad="40000" dist="23000" dir="5400000" rotWithShape="0">
-              <a:srgbClr val="000000">
-                <a:alpha val="35000"/>
-              </a:srgbClr>
-            </a:outerShdw>
-          </a:effectLst>
-        </a:effectStyle>
-        <a:effectStyle>
-          <a:effectLst>
-            <a:outerShdw blurRad="40000" dist="23000" dir="5400000" rotWithShape="0">
-              <a:srgbClr val="000000">
-                <a:alpha val="35000"/>
-              </a:srgbClr>
-            </a:outerShdw>
-          </a:effectLst>
-          <a:scene3d>
-            <a:camera prst="orthographicFront">
-              <a:rot lat="0" lon="0" rev="0"/>
-            </a:camera>
-            <a:lightRig rig="threePt" dir="t">
-              <a:rot lat="0" lon="0" rev="1200000"/>
-            </a:lightRig>
-          </a:scene3d>
-          <a:sp3d>
-            <a:bevelT w="63500" h="25400"/>
-          </a:sp3d>
         </a:effectStyle>
       </a:effectStyleLst>
       <a:bgFillStyleLst>
         <a:solidFill>
           <a:schemeClr val="phClr"/>
         </a:solidFill>
+        <a:solidFill>
+          <a:schemeClr val="phClr">
+            <a:tint val="95000"/>
+            <a:satMod val="170000"/>
+          </a:schemeClr>
+        </a:solidFill>
         <a:gradFill rotWithShape="1">
           <a:gsLst>
             <a:gs pos="0">
               <a:schemeClr val="phClr">
-                <a:tint val="40000"/>
-                <a:satMod val="350000"/>
+                <a:tint val="93000"/>
+                <a:satMod val="150000"/>
+                <a:shade val="98000"/>
+                <a:lumMod val="102000"/>
               </a:schemeClr>
             </a:gs>
-            <a:gs pos="40000">
+            <a:gs pos="50000">
               <a:schemeClr val="phClr">
-                <a:tint val="45000"/>
-                <a:shade val="99000"/>
-                <a:satMod val="350000"/>
+                <a:tint val="98000"/>
+                <a:satMod val="130000"/>
+                <a:shade val="90000"/>
+                <a:lumMod val="103000"/>
               </a:schemeClr>
             </a:gs>
             <a:gs pos="100000">
               <a:schemeClr val="phClr">
-                <a:shade val="20000"/>
-                <a:satMod val="255000"/>
+                <a:shade val="63000"/>
+                <a:satMod val="120000"/>
               </a:schemeClr>
             </a:gs>
           </a:gsLst>
-          <a:path path="circle">
-            <a:fillToRect l="50000" t="-80000" r="50000" b="180000"/>
-          </a:path>
-        </a:gradFill>
-        <a:gradFill rotWithShape="1">
-          <a:gsLst>
-            <a:gs pos="0">
-              <a:schemeClr val="phClr">
-                <a:tint val="80000"/>
-                <a:satMod val="300000"/>
-              </a:schemeClr>
-            </a:gs>
-            <a:gs pos="100000">
-              <a:schemeClr val="phClr">
-                <a:shade val="30000"/>
-                <a:satMod val="200000"/>
-              </a:schemeClr>
-            </a:gs>
-          </a:gsLst>
-          <a:path path="circle">
-            <a:fillToRect l="50000" t="50000" r="50000" b="50000"/>
-          </a:path>
+          <a:lin ang="5400000" scaled="0"/>
         </a:gradFill>
       </a:bgFillStyleLst>
     </a:fmtScheme>
   </a:themeElements>
   <a:objectDefaults>
-    <a:spDef>
-      <a:spPr/>
-      <a:bodyPr/>
-      <a:lstStyle/>
-      <a:style>
-        <a:lnRef idx="1">
-          <a:schemeClr val="accent1"/>
-        </a:lnRef>
-        <a:fillRef idx="3">
-          <a:schemeClr val="accent1"/>
-        </a:fillRef>
-        <a:effectRef idx="2">
-          <a:schemeClr val="accent1"/>
-        </a:effectRef>
-        <a:fontRef idx="minor">
-          <a:schemeClr val="lt1"/>
-        </a:fontRef>
-      </a:style>
-    </a:spDef>
     <a:lnDef>
       <a:spPr/>
       <a:bodyPr/>
@@ -14312,5 +14668,10 @@
     </a:lnDef>
   </a:objectDefaults>
   <a:extraClrSchemeLst/>
+  <a:extLst>
+    <a:ext uri="{05A4C25C-085E-4340-85A3-A5531E510DB2}">
+      <thm15:themeFamily xmlns:thm15="http://schemas.microsoft.com/office/thememl/2012/main" name="Office Theme" id="{2E142A2C-CD16-42D6-873A-C26D2A0506FA}" vid="{1BDDFF52-6CD6-40A5-AB3C-68EB2F1E4D0A}"/>
+    </a:ext>
+  </a:extLst>
 </a:theme>
 </file>